--- a/deck/NextFrame.pptx
+++ b/deck/NextFrame.pptx
@@ -19306,7 +19306,7 @@
         </p:nvSpPr>
         <p:spPr>
           <a:xfrm>
-            <a:off x="5989320" y="1801368"/>
+            <a:off x="5989320" y="1800605"/>
             <a:ext cx="137160" cy="137160"/>
           </a:xfrm>
           <a:prstGeom prst="rect">
@@ -19351,7 +19351,7 @@
         <p:spPr>
           <a:xfrm>
             <a:off x="6263640" y="1773936"/>
-            <a:ext cx="2834640" cy="182880"/>
+            <a:ext cx="2834640" cy="190500"/>
           </a:xfrm>
           <a:prstGeom prst="rect">
             <a:avLst/>
@@ -19395,16 +19395,16 @@
         </p:nvSpPr>
         <p:spPr>
           <a:xfrm>
-            <a:off x="9116567" y="1783080"/>
-            <a:ext cx="1554480" cy="182880"/>
-          </a:xfrm>
-          <a:prstGeom prst="rect">
-            <a:avLst/>
-          </a:prstGeom>
-          <a:noFill/>
-        </p:spPr>
-        <p:txBody>
-          <a:bodyPr wrap="square" lIns="0" rIns="0" tIns="0" bIns="0" anchor="t">
+            <a:off x="9116567" y="1773936"/>
+            <a:ext cx="1554480" cy="190500"/>
+          </a:xfrm>
+          <a:prstGeom prst="rect">
+            <a:avLst/>
+          </a:prstGeom>
+          <a:noFill/>
+        </p:spPr>
+        <p:txBody>
+          <a:bodyPr wrap="square" lIns="0" rIns="0" tIns="0" bIns="0" anchor="ctr">
             <a:spAutoFit/>
           </a:bodyPr>
           <a:lstStyle/>
@@ -19441,20 +19441,20 @@
         <p:spPr>
           <a:xfrm>
             <a:off x="10707624" y="1773936"/>
-            <a:ext cx="310896" cy="182880"/>
-          </a:xfrm>
-          <a:prstGeom prst="rect">
-            <a:avLst/>
-          </a:prstGeom>
-          <a:noFill/>
-        </p:spPr>
-        <p:txBody>
-          <a:bodyPr wrap="square" lIns="0" rIns="0" tIns="0" bIns="0" anchor="t">
-            <a:spAutoFit/>
-          </a:bodyPr>
-          <a:lstStyle/>
-          <a:p>
-            <a:pPr algn="l">
+            <a:ext cx="310896" cy="190500"/>
+          </a:xfrm>
+          <a:prstGeom prst="rect">
+            <a:avLst/>
+          </a:prstGeom>
+          <a:noFill/>
+        </p:spPr>
+        <p:txBody>
+          <a:bodyPr wrap="square" lIns="0" rIns="0" tIns="0" bIns="0" anchor="ctr">
+            <a:spAutoFit/>
+          </a:bodyPr>
+          <a:lstStyle/>
+          <a:p>
+            <a:pPr algn="r">
               <a:lnSpc>
                 <a:spcPct val="125000"/>
               </a:lnSpc>
@@ -19520,7 +19520,7 @@
         </p:nvSpPr>
         <p:spPr>
           <a:xfrm>
-            <a:off x="5989320" y="2180844"/>
+            <a:off x="5989320" y="2159050"/>
             <a:ext cx="137160" cy="137160"/>
           </a:xfrm>
           <a:prstGeom prst="rect">
@@ -19564,8 +19564,8 @@
         </p:nvSpPr>
         <p:spPr>
           <a:xfrm>
-            <a:off x="6263640" y="2153412"/>
-            <a:ext cx="2834640" cy="182880"/>
+            <a:off x="6263640" y="2132380"/>
+            <a:ext cx="2834640" cy="190500"/>
           </a:xfrm>
           <a:prstGeom prst="rect">
             <a:avLst/>
@@ -19609,16 +19609,16 @@
         </p:nvSpPr>
         <p:spPr>
           <a:xfrm>
-            <a:off x="9116567" y="2162556"/>
-            <a:ext cx="1554480" cy="182880"/>
-          </a:xfrm>
-          <a:prstGeom prst="rect">
-            <a:avLst/>
-          </a:prstGeom>
-          <a:noFill/>
-        </p:spPr>
-        <p:txBody>
-          <a:bodyPr wrap="square" lIns="0" rIns="0" tIns="0" bIns="0" anchor="t">
+            <a:off x="9116567" y="2132380"/>
+            <a:ext cx="1554480" cy="190500"/>
+          </a:xfrm>
+          <a:prstGeom prst="rect">
+            <a:avLst/>
+          </a:prstGeom>
+          <a:noFill/>
+        </p:spPr>
+        <p:txBody>
+          <a:bodyPr wrap="square" lIns="0" rIns="0" tIns="0" bIns="0" anchor="ctr">
             <a:spAutoFit/>
           </a:bodyPr>
           <a:lstStyle/>
@@ -19654,21 +19654,21 @@
         </p:nvSpPr>
         <p:spPr>
           <a:xfrm>
-            <a:off x="10707624" y="2153412"/>
-            <a:ext cx="310896" cy="182880"/>
-          </a:xfrm>
-          <a:prstGeom prst="rect">
-            <a:avLst/>
-          </a:prstGeom>
-          <a:noFill/>
-        </p:spPr>
-        <p:txBody>
-          <a:bodyPr wrap="square" lIns="0" rIns="0" tIns="0" bIns="0" anchor="t">
-            <a:spAutoFit/>
-          </a:bodyPr>
-          <a:lstStyle/>
-          <a:p>
-            <a:pPr algn="l">
+            <a:off x="10707624" y="2132380"/>
+            <a:ext cx="310896" cy="190500"/>
+          </a:xfrm>
+          <a:prstGeom prst="rect">
+            <a:avLst/>
+          </a:prstGeom>
+          <a:noFill/>
+        </p:spPr>
+        <p:txBody>
+          <a:bodyPr wrap="square" lIns="0" rIns="0" tIns="0" bIns="0" anchor="ctr">
+            <a:spAutoFit/>
+          </a:bodyPr>
+          <a:lstStyle/>
+          <a:p>
+            <a:pPr algn="r">
               <a:lnSpc>
                 <a:spcPct val="125000"/>
               </a:lnSpc>
@@ -19699,7 +19699,7 @@
         </p:nvCxnSpPr>
         <p:spPr>
           <a:xfrm>
-            <a:off x="5989320" y="2446020"/>
+            <a:off x="5989320" y="2424988"/>
             <a:ext cx="5029200" cy="0"/>
           </a:xfrm>
           <a:prstGeom prst="line">
@@ -19734,7 +19734,7 @@
         </p:nvSpPr>
         <p:spPr>
           <a:xfrm>
-            <a:off x="5989320" y="2560320"/>
+            <a:off x="5989320" y="2517495"/>
             <a:ext cx="137160" cy="137160"/>
           </a:xfrm>
           <a:prstGeom prst="rect">
@@ -19778,8 +19778,8 @@
         </p:nvSpPr>
         <p:spPr>
           <a:xfrm>
-            <a:off x="6263640" y="2532888"/>
-            <a:ext cx="2834640" cy="182880"/>
+            <a:off x="6263640" y="2490825"/>
+            <a:ext cx="2834640" cy="190500"/>
           </a:xfrm>
           <a:prstGeom prst="rect">
             <a:avLst/>
@@ -19823,16 +19823,16 @@
         </p:nvSpPr>
         <p:spPr>
           <a:xfrm>
-            <a:off x="9116567" y="2542032"/>
-            <a:ext cx="1554480" cy="182880"/>
-          </a:xfrm>
-          <a:prstGeom prst="rect">
-            <a:avLst/>
-          </a:prstGeom>
-          <a:noFill/>
-        </p:spPr>
-        <p:txBody>
-          <a:bodyPr wrap="square" lIns="0" rIns="0" tIns="0" bIns="0" anchor="t">
+            <a:off x="9116567" y="2490825"/>
+            <a:ext cx="1554480" cy="190500"/>
+          </a:xfrm>
+          <a:prstGeom prst="rect">
+            <a:avLst/>
+          </a:prstGeom>
+          <a:noFill/>
+        </p:spPr>
+        <p:txBody>
+          <a:bodyPr wrap="square" lIns="0" rIns="0" tIns="0" bIns="0" anchor="ctr">
             <a:spAutoFit/>
           </a:bodyPr>
           <a:lstStyle/>
@@ -19868,21 +19868,21 @@
         </p:nvSpPr>
         <p:spPr>
           <a:xfrm>
-            <a:off x="10707624" y="2532888"/>
-            <a:ext cx="310896" cy="182880"/>
-          </a:xfrm>
-          <a:prstGeom prst="rect">
-            <a:avLst/>
-          </a:prstGeom>
-          <a:noFill/>
-        </p:spPr>
-        <p:txBody>
-          <a:bodyPr wrap="square" lIns="0" rIns="0" tIns="0" bIns="0" anchor="t">
-            <a:spAutoFit/>
-          </a:bodyPr>
-          <a:lstStyle/>
-          <a:p>
-            <a:pPr algn="l">
+            <a:off x="10707624" y="2490825"/>
+            <a:ext cx="310896" cy="190500"/>
+          </a:xfrm>
+          <a:prstGeom prst="rect">
+            <a:avLst/>
+          </a:prstGeom>
+          <a:noFill/>
+        </p:spPr>
+        <p:txBody>
+          <a:bodyPr wrap="square" lIns="0" rIns="0" tIns="0" bIns="0" anchor="ctr">
+            <a:spAutoFit/>
+          </a:bodyPr>
+          <a:lstStyle/>
+          <a:p>
+            <a:pPr algn="r">
               <a:lnSpc>
                 <a:spcPct val="125000"/>
               </a:lnSpc>
@@ -19913,7 +19913,7 @@
         </p:nvCxnSpPr>
         <p:spPr>
           <a:xfrm>
-            <a:off x="5989320" y="2825496"/>
+            <a:off x="5989320" y="2783433"/>
             <a:ext cx="5029200" cy="0"/>
           </a:xfrm>
           <a:prstGeom prst="line">
@@ -19948,7 +19948,7 @@
         </p:nvSpPr>
         <p:spPr>
           <a:xfrm>
-            <a:off x="5989320" y="2939795"/>
+            <a:off x="5989320" y="2875940"/>
             <a:ext cx="137160" cy="137160"/>
           </a:xfrm>
           <a:prstGeom prst="rect">
@@ -19992,8 +19992,8 @@
         </p:nvSpPr>
         <p:spPr>
           <a:xfrm>
-            <a:off x="6263640" y="2912363"/>
-            <a:ext cx="2834640" cy="182880"/>
+            <a:off x="6263640" y="2849270"/>
+            <a:ext cx="2834640" cy="190500"/>
           </a:xfrm>
           <a:prstGeom prst="rect">
             <a:avLst/>
@@ -20037,16 +20037,16 @@
         </p:nvSpPr>
         <p:spPr>
           <a:xfrm>
-            <a:off x="9116567" y="2921507"/>
-            <a:ext cx="1554480" cy="182880"/>
-          </a:xfrm>
-          <a:prstGeom prst="rect">
-            <a:avLst/>
-          </a:prstGeom>
-          <a:noFill/>
-        </p:spPr>
-        <p:txBody>
-          <a:bodyPr wrap="square" lIns="0" rIns="0" tIns="0" bIns="0" anchor="t">
+            <a:off x="9116567" y="2849270"/>
+            <a:ext cx="1554480" cy="190500"/>
+          </a:xfrm>
+          <a:prstGeom prst="rect">
+            <a:avLst/>
+          </a:prstGeom>
+          <a:noFill/>
+        </p:spPr>
+        <p:txBody>
+          <a:bodyPr wrap="square" lIns="0" rIns="0" tIns="0" bIns="0" anchor="ctr">
             <a:spAutoFit/>
           </a:bodyPr>
           <a:lstStyle/>
@@ -20082,21 +20082,21 @@
         </p:nvSpPr>
         <p:spPr>
           <a:xfrm>
-            <a:off x="10707624" y="2912363"/>
-            <a:ext cx="310896" cy="182880"/>
-          </a:xfrm>
-          <a:prstGeom prst="rect">
-            <a:avLst/>
-          </a:prstGeom>
-          <a:noFill/>
-        </p:spPr>
-        <p:txBody>
-          <a:bodyPr wrap="square" lIns="0" rIns="0" tIns="0" bIns="0" anchor="t">
-            <a:spAutoFit/>
-          </a:bodyPr>
-          <a:lstStyle/>
-          <a:p>
-            <a:pPr algn="l">
+            <a:off x="10707624" y="2849270"/>
+            <a:ext cx="310896" cy="190500"/>
+          </a:xfrm>
+          <a:prstGeom prst="rect">
+            <a:avLst/>
+          </a:prstGeom>
+          <a:noFill/>
+        </p:spPr>
+        <p:txBody>
+          <a:bodyPr wrap="square" lIns="0" rIns="0" tIns="0" bIns="0" anchor="ctr">
+            <a:spAutoFit/>
+          </a:bodyPr>
+          <a:lstStyle/>
+          <a:p>
+            <a:pPr algn="r">
               <a:lnSpc>
                 <a:spcPct val="125000"/>
               </a:lnSpc>
@@ -20127,7 +20127,7 @@
         </p:nvCxnSpPr>
         <p:spPr>
           <a:xfrm>
-            <a:off x="5989320" y="3204971"/>
+            <a:off x="5989320" y="3141878"/>
             <a:ext cx="5029200" cy="0"/>
           </a:xfrm>
           <a:prstGeom prst="line">
@@ -20162,7 +20162,7 @@
         </p:nvSpPr>
         <p:spPr>
           <a:xfrm>
-            <a:off x="5989320" y="3319271"/>
+            <a:off x="5989320" y="3234385"/>
             <a:ext cx="137160" cy="137160"/>
           </a:xfrm>
           <a:prstGeom prst="rect">
@@ -20206,8 +20206,8 @@
         </p:nvSpPr>
         <p:spPr>
           <a:xfrm>
-            <a:off x="6263640" y="3291839"/>
-            <a:ext cx="2834640" cy="182880"/>
+            <a:off x="6263640" y="3207715"/>
+            <a:ext cx="2834640" cy="381000"/>
           </a:xfrm>
           <a:prstGeom prst="rect">
             <a:avLst/>
@@ -20251,16 +20251,16 @@
         </p:nvSpPr>
         <p:spPr>
           <a:xfrm>
-            <a:off x="9116567" y="3300983"/>
-            <a:ext cx="1554480" cy="182880"/>
-          </a:xfrm>
-          <a:prstGeom prst="rect">
-            <a:avLst/>
-          </a:prstGeom>
-          <a:noFill/>
-        </p:spPr>
-        <p:txBody>
-          <a:bodyPr wrap="square" lIns="0" rIns="0" tIns="0" bIns="0" anchor="t">
+            <a:off x="9116567" y="3207715"/>
+            <a:ext cx="1554480" cy="190500"/>
+          </a:xfrm>
+          <a:prstGeom prst="rect">
+            <a:avLst/>
+          </a:prstGeom>
+          <a:noFill/>
+        </p:spPr>
+        <p:txBody>
+          <a:bodyPr wrap="square" lIns="0" rIns="0" tIns="0" bIns="0" anchor="ctr">
             <a:spAutoFit/>
           </a:bodyPr>
           <a:lstStyle/>
@@ -20296,21 +20296,21 @@
         </p:nvSpPr>
         <p:spPr>
           <a:xfrm>
-            <a:off x="10707624" y="3291839"/>
-            <a:ext cx="310896" cy="182880"/>
-          </a:xfrm>
-          <a:prstGeom prst="rect">
-            <a:avLst/>
-          </a:prstGeom>
-          <a:noFill/>
-        </p:spPr>
-        <p:txBody>
-          <a:bodyPr wrap="square" lIns="0" rIns="0" tIns="0" bIns="0" anchor="t">
-            <a:spAutoFit/>
-          </a:bodyPr>
-          <a:lstStyle/>
-          <a:p>
-            <a:pPr algn="l">
+            <a:off x="10707624" y="3207715"/>
+            <a:ext cx="310896" cy="190500"/>
+          </a:xfrm>
+          <a:prstGeom prst="rect">
+            <a:avLst/>
+          </a:prstGeom>
+          <a:noFill/>
+        </p:spPr>
+        <p:txBody>
+          <a:bodyPr wrap="square" lIns="0" rIns="0" tIns="0" bIns="0" anchor="ctr">
+            <a:spAutoFit/>
+          </a:bodyPr>
+          <a:lstStyle/>
+          <a:p>
+            <a:pPr algn="r">
               <a:lnSpc>
                 <a:spcPct val="125000"/>
               </a:lnSpc>
@@ -20341,7 +20341,7 @@
         </p:nvCxnSpPr>
         <p:spPr>
           <a:xfrm>
-            <a:off x="5989320" y="3584447"/>
+            <a:off x="5989320" y="3690823"/>
             <a:ext cx="5029200" cy="0"/>
           </a:xfrm>
           <a:prstGeom prst="line">
@@ -20376,7 +20376,7 @@
         </p:nvSpPr>
         <p:spPr>
           <a:xfrm>
-            <a:off x="5989320" y="3698748"/>
+            <a:off x="5989320" y="3783329"/>
             <a:ext cx="137160" cy="137160"/>
           </a:xfrm>
           <a:prstGeom prst="rect">
@@ -20420,8 +20420,8 @@
         </p:nvSpPr>
         <p:spPr>
           <a:xfrm>
-            <a:off x="6263640" y="3671315"/>
-            <a:ext cx="2834640" cy="182880"/>
+            <a:off x="6263640" y="3756659"/>
+            <a:ext cx="2834640" cy="190500"/>
           </a:xfrm>
           <a:prstGeom prst="rect">
             <a:avLst/>
@@ -20465,16 +20465,16 @@
         </p:nvSpPr>
         <p:spPr>
           <a:xfrm>
-            <a:off x="9116567" y="3680459"/>
-            <a:ext cx="1554480" cy="182880"/>
-          </a:xfrm>
-          <a:prstGeom prst="rect">
-            <a:avLst/>
-          </a:prstGeom>
-          <a:noFill/>
-        </p:spPr>
-        <p:txBody>
-          <a:bodyPr wrap="square" lIns="0" rIns="0" tIns="0" bIns="0" anchor="t">
+            <a:off x="9116567" y="3756659"/>
+            <a:ext cx="1554480" cy="190500"/>
+          </a:xfrm>
+          <a:prstGeom prst="rect">
+            <a:avLst/>
+          </a:prstGeom>
+          <a:noFill/>
+        </p:spPr>
+        <p:txBody>
+          <a:bodyPr wrap="square" lIns="0" rIns="0" tIns="0" bIns="0" anchor="ctr">
             <a:spAutoFit/>
           </a:bodyPr>
           <a:lstStyle/>
@@ -20510,21 +20510,21 @@
         </p:nvSpPr>
         <p:spPr>
           <a:xfrm>
-            <a:off x="10707624" y="3671315"/>
-            <a:ext cx="310896" cy="182880"/>
-          </a:xfrm>
-          <a:prstGeom prst="rect">
-            <a:avLst/>
-          </a:prstGeom>
-          <a:noFill/>
-        </p:spPr>
-        <p:txBody>
-          <a:bodyPr wrap="square" lIns="0" rIns="0" tIns="0" bIns="0" anchor="t">
-            <a:spAutoFit/>
-          </a:bodyPr>
-          <a:lstStyle/>
-          <a:p>
-            <a:pPr algn="l">
+            <a:off x="10707624" y="3756659"/>
+            <a:ext cx="310896" cy="190500"/>
+          </a:xfrm>
+          <a:prstGeom prst="rect">
+            <a:avLst/>
+          </a:prstGeom>
+          <a:noFill/>
+        </p:spPr>
+        <p:txBody>
+          <a:bodyPr wrap="square" lIns="0" rIns="0" tIns="0" bIns="0" anchor="ctr">
+            <a:spAutoFit/>
+          </a:bodyPr>
+          <a:lstStyle/>
+          <a:p>
+            <a:pPr algn="r">
               <a:lnSpc>
                 <a:spcPct val="125000"/>
               </a:lnSpc>
@@ -20555,7 +20555,7 @@
         </p:nvCxnSpPr>
         <p:spPr>
           <a:xfrm>
-            <a:off x="5989320" y="3963924"/>
+            <a:off x="5989320" y="4049267"/>
             <a:ext cx="5029200" cy="0"/>
           </a:xfrm>
           <a:prstGeom prst="line">
@@ -20590,7 +20590,7 @@
         </p:nvSpPr>
         <p:spPr>
           <a:xfrm>
-            <a:off x="5989320" y="4078224"/>
+            <a:off x="5989320" y="4141774"/>
             <a:ext cx="137160" cy="137160"/>
           </a:xfrm>
           <a:prstGeom prst="rect">
@@ -20634,8 +20634,8 @@
         </p:nvSpPr>
         <p:spPr>
           <a:xfrm>
-            <a:off x="6263640" y="4050791"/>
-            <a:ext cx="2834640" cy="182880"/>
+            <a:off x="6263640" y="4115104"/>
+            <a:ext cx="2834640" cy="190500"/>
           </a:xfrm>
           <a:prstGeom prst="rect">
             <a:avLst/>
@@ -20679,16 +20679,16 @@
         </p:nvSpPr>
         <p:spPr>
           <a:xfrm>
-            <a:off x="9116567" y="4059935"/>
-            <a:ext cx="1554480" cy="182880"/>
-          </a:xfrm>
-          <a:prstGeom prst="rect">
-            <a:avLst/>
-          </a:prstGeom>
-          <a:noFill/>
-        </p:spPr>
-        <p:txBody>
-          <a:bodyPr wrap="square" lIns="0" rIns="0" tIns="0" bIns="0" anchor="t">
+            <a:off x="9116567" y="4115104"/>
+            <a:ext cx="1554480" cy="190500"/>
+          </a:xfrm>
+          <a:prstGeom prst="rect">
+            <a:avLst/>
+          </a:prstGeom>
+          <a:noFill/>
+        </p:spPr>
+        <p:txBody>
+          <a:bodyPr wrap="square" lIns="0" rIns="0" tIns="0" bIns="0" anchor="ctr">
             <a:spAutoFit/>
           </a:bodyPr>
           <a:lstStyle/>
@@ -20724,21 +20724,21 @@
         </p:nvSpPr>
         <p:spPr>
           <a:xfrm>
-            <a:off x="10707624" y="4050791"/>
-            <a:ext cx="310896" cy="182880"/>
-          </a:xfrm>
-          <a:prstGeom prst="rect">
-            <a:avLst/>
-          </a:prstGeom>
-          <a:noFill/>
-        </p:spPr>
-        <p:txBody>
-          <a:bodyPr wrap="square" lIns="0" rIns="0" tIns="0" bIns="0" anchor="t">
-            <a:spAutoFit/>
-          </a:bodyPr>
-          <a:lstStyle/>
-          <a:p>
-            <a:pPr algn="l">
+            <a:off x="10707624" y="4115104"/>
+            <a:ext cx="310896" cy="190500"/>
+          </a:xfrm>
+          <a:prstGeom prst="rect">
+            <a:avLst/>
+          </a:prstGeom>
+          <a:noFill/>
+        </p:spPr>
+        <p:txBody>
+          <a:bodyPr wrap="square" lIns="0" rIns="0" tIns="0" bIns="0" anchor="ctr">
+            <a:spAutoFit/>
+          </a:bodyPr>
+          <a:lstStyle/>
+          <a:p>
+            <a:pPr algn="r">
               <a:lnSpc>
                 <a:spcPct val="125000"/>
               </a:lnSpc>
@@ -20769,7 +20769,7 @@
         </p:nvCxnSpPr>
         <p:spPr>
           <a:xfrm>
-            <a:off x="5989320" y="4343400"/>
+            <a:off x="5989320" y="4407712"/>
             <a:ext cx="5029200" cy="0"/>
           </a:xfrm>
           <a:prstGeom prst="line">
@@ -20804,7 +20804,7 @@
         </p:nvSpPr>
         <p:spPr>
           <a:xfrm>
-            <a:off x="5989320" y="4457700"/>
+            <a:off x="5989320" y="4500219"/>
             <a:ext cx="137160" cy="137160"/>
           </a:xfrm>
           <a:prstGeom prst="rect">
@@ -20848,8 +20848,8 @@
         </p:nvSpPr>
         <p:spPr>
           <a:xfrm>
-            <a:off x="6263640" y="4430268"/>
-            <a:ext cx="2834640" cy="182880"/>
+            <a:off x="6263640" y="4473549"/>
+            <a:ext cx="2834640" cy="190500"/>
           </a:xfrm>
           <a:prstGeom prst="rect">
             <a:avLst/>
@@ -20893,16 +20893,16 @@
         </p:nvSpPr>
         <p:spPr>
           <a:xfrm>
-            <a:off x="9116567" y="4439412"/>
-            <a:ext cx="1554480" cy="182880"/>
-          </a:xfrm>
-          <a:prstGeom prst="rect">
-            <a:avLst/>
-          </a:prstGeom>
-          <a:noFill/>
-        </p:spPr>
-        <p:txBody>
-          <a:bodyPr wrap="square" lIns="0" rIns="0" tIns="0" bIns="0" anchor="t">
+            <a:off x="9116567" y="4473549"/>
+            <a:ext cx="1554480" cy="190500"/>
+          </a:xfrm>
+          <a:prstGeom prst="rect">
+            <a:avLst/>
+          </a:prstGeom>
+          <a:noFill/>
+        </p:spPr>
+        <p:txBody>
+          <a:bodyPr wrap="square" lIns="0" rIns="0" tIns="0" bIns="0" anchor="ctr">
             <a:spAutoFit/>
           </a:bodyPr>
           <a:lstStyle/>
@@ -20938,21 +20938,21 @@
         </p:nvSpPr>
         <p:spPr>
           <a:xfrm>
-            <a:off x="10707624" y="4430268"/>
-            <a:ext cx="310896" cy="182880"/>
-          </a:xfrm>
-          <a:prstGeom prst="rect">
-            <a:avLst/>
-          </a:prstGeom>
-          <a:noFill/>
-        </p:spPr>
-        <p:txBody>
-          <a:bodyPr wrap="square" lIns="0" rIns="0" tIns="0" bIns="0" anchor="t">
-            <a:spAutoFit/>
-          </a:bodyPr>
-          <a:lstStyle/>
-          <a:p>
-            <a:pPr algn="l">
+            <a:off x="10707624" y="4473549"/>
+            <a:ext cx="310896" cy="190500"/>
+          </a:xfrm>
+          <a:prstGeom prst="rect">
+            <a:avLst/>
+          </a:prstGeom>
+          <a:noFill/>
+        </p:spPr>
+        <p:txBody>
+          <a:bodyPr wrap="square" lIns="0" rIns="0" tIns="0" bIns="0" anchor="ctr">
+            <a:spAutoFit/>
+          </a:bodyPr>
+          <a:lstStyle/>
+          <a:p>
+            <a:pPr algn="r">
               <a:lnSpc>
                 <a:spcPct val="125000"/>
               </a:lnSpc>
@@ -20983,7 +20983,7 @@
         </p:nvCxnSpPr>
         <p:spPr>
           <a:xfrm>
-            <a:off x="5989320" y="4722876"/>
+            <a:off x="5989320" y="4766157"/>
             <a:ext cx="5029200" cy="0"/>
           </a:xfrm>
           <a:prstGeom prst="line">
@@ -21018,7 +21018,7 @@
         </p:nvSpPr>
         <p:spPr>
           <a:xfrm>
-            <a:off x="5989320" y="4837176"/>
+            <a:off x="5989320" y="4858664"/>
             <a:ext cx="137160" cy="137160"/>
           </a:xfrm>
           <a:prstGeom prst="rect">
@@ -21062,8 +21062,8 @@
         </p:nvSpPr>
         <p:spPr>
           <a:xfrm>
-            <a:off x="6263640" y="4809744"/>
-            <a:ext cx="2834640" cy="182880"/>
+            <a:off x="6263640" y="4831994"/>
+            <a:ext cx="2834640" cy="190500"/>
           </a:xfrm>
           <a:prstGeom prst="rect">
             <a:avLst/>
@@ -21107,16 +21107,16 @@
         </p:nvSpPr>
         <p:spPr>
           <a:xfrm>
-            <a:off x="9116567" y="4818888"/>
-            <a:ext cx="1554480" cy="182880"/>
-          </a:xfrm>
-          <a:prstGeom prst="rect">
-            <a:avLst/>
-          </a:prstGeom>
-          <a:noFill/>
-        </p:spPr>
-        <p:txBody>
-          <a:bodyPr wrap="square" lIns="0" rIns="0" tIns="0" bIns="0" anchor="t">
+            <a:off x="9116567" y="4831994"/>
+            <a:ext cx="1554480" cy="190500"/>
+          </a:xfrm>
+          <a:prstGeom prst="rect">
+            <a:avLst/>
+          </a:prstGeom>
+          <a:noFill/>
+        </p:spPr>
+        <p:txBody>
+          <a:bodyPr wrap="square" lIns="0" rIns="0" tIns="0" bIns="0" anchor="ctr">
             <a:spAutoFit/>
           </a:bodyPr>
           <a:lstStyle/>
@@ -21152,21 +21152,21 @@
         </p:nvSpPr>
         <p:spPr>
           <a:xfrm>
-            <a:off x="10707624" y="4809744"/>
-            <a:ext cx="310896" cy="182880"/>
-          </a:xfrm>
-          <a:prstGeom prst="rect">
-            <a:avLst/>
-          </a:prstGeom>
-          <a:noFill/>
-        </p:spPr>
-        <p:txBody>
-          <a:bodyPr wrap="square" lIns="0" rIns="0" tIns="0" bIns="0" anchor="t">
-            <a:spAutoFit/>
-          </a:bodyPr>
-          <a:lstStyle/>
-          <a:p>
-            <a:pPr algn="l">
+            <a:off x="10707624" y="4831994"/>
+            <a:ext cx="310896" cy="190500"/>
+          </a:xfrm>
+          <a:prstGeom prst="rect">
+            <a:avLst/>
+          </a:prstGeom>
+          <a:noFill/>
+        </p:spPr>
+        <p:txBody>
+          <a:bodyPr wrap="square" lIns="0" rIns="0" tIns="0" bIns="0" anchor="ctr">
+            <a:spAutoFit/>
+          </a:bodyPr>
+          <a:lstStyle/>
+          <a:p>
+            <a:pPr algn="r">
               <a:lnSpc>
                 <a:spcPct val="125000"/>
               </a:lnSpc>
@@ -21197,7 +21197,7 @@
         </p:nvCxnSpPr>
         <p:spPr>
           <a:xfrm>
-            <a:off x="5989320" y="5102352"/>
+            <a:off x="5989320" y="5124602"/>
             <a:ext cx="5029200" cy="0"/>
           </a:xfrm>
           <a:prstGeom prst="line">
@@ -21232,7 +21232,7 @@
         </p:nvSpPr>
         <p:spPr>
           <a:xfrm>
-            <a:off x="5989320" y="5216652"/>
+            <a:off x="5989320" y="5217109"/>
             <a:ext cx="137160" cy="137160"/>
           </a:xfrm>
           <a:prstGeom prst="rect">
@@ -21276,8 +21276,8 @@
         </p:nvSpPr>
         <p:spPr>
           <a:xfrm>
-            <a:off x="6263640" y="5189220"/>
-            <a:ext cx="2834640" cy="182880"/>
+            <a:off x="6263640" y="5190439"/>
+            <a:ext cx="2834640" cy="190500"/>
           </a:xfrm>
           <a:prstGeom prst="rect">
             <a:avLst/>
@@ -21321,16 +21321,16 @@
         </p:nvSpPr>
         <p:spPr>
           <a:xfrm>
-            <a:off x="9116567" y="5198364"/>
-            <a:ext cx="1554480" cy="182880"/>
-          </a:xfrm>
-          <a:prstGeom prst="rect">
-            <a:avLst/>
-          </a:prstGeom>
-          <a:noFill/>
-        </p:spPr>
-        <p:txBody>
-          <a:bodyPr wrap="square" lIns="0" rIns="0" tIns="0" bIns="0" anchor="t">
+            <a:off x="9116567" y="5190439"/>
+            <a:ext cx="1554480" cy="190500"/>
+          </a:xfrm>
+          <a:prstGeom prst="rect">
+            <a:avLst/>
+          </a:prstGeom>
+          <a:noFill/>
+        </p:spPr>
+        <p:txBody>
+          <a:bodyPr wrap="square" lIns="0" rIns="0" tIns="0" bIns="0" anchor="ctr">
             <a:spAutoFit/>
           </a:bodyPr>
           <a:lstStyle/>
@@ -21366,21 +21366,21 @@
         </p:nvSpPr>
         <p:spPr>
           <a:xfrm>
-            <a:off x="10707624" y="5189220"/>
-            <a:ext cx="310896" cy="182880"/>
-          </a:xfrm>
-          <a:prstGeom prst="rect">
-            <a:avLst/>
-          </a:prstGeom>
-          <a:noFill/>
-        </p:spPr>
-        <p:txBody>
-          <a:bodyPr wrap="square" lIns="0" rIns="0" tIns="0" bIns="0" anchor="t">
-            <a:spAutoFit/>
-          </a:bodyPr>
-          <a:lstStyle/>
-          <a:p>
-            <a:pPr algn="l">
+            <a:off x="10707624" y="5190439"/>
+            <a:ext cx="310896" cy="190500"/>
+          </a:xfrm>
+          <a:prstGeom prst="rect">
+            <a:avLst/>
+          </a:prstGeom>
+          <a:noFill/>
+        </p:spPr>
+        <p:txBody>
+          <a:bodyPr wrap="square" lIns="0" rIns="0" tIns="0" bIns="0" anchor="ctr">
+            <a:spAutoFit/>
+          </a:bodyPr>
+          <a:lstStyle/>
+          <a:p>
+            <a:pPr algn="r">
               <a:lnSpc>
                 <a:spcPct val="125000"/>
               </a:lnSpc>
@@ -21411,7 +21411,7 @@
         </p:nvCxnSpPr>
         <p:spPr>
           <a:xfrm>
-            <a:off x="5989320" y="5481828"/>
+            <a:off x="5989320" y="5483047"/>
             <a:ext cx="5029200" cy="0"/>
           </a:xfrm>
           <a:prstGeom prst="line">

--- a/deck/NextFrame.pptx
+++ b/deck/NextFrame.pptx
@@ -1,31 +1,31 @@
 
 <file path=ppt/presentation.xml><?xml version="1.0" encoding="utf-8"?>
-<p:presentation xmlns:a="http://schemas.openxmlformats.org/drawingml/2006/main" xmlns:r="http://schemas.openxmlformats.org/officeDocument/2006/relationships" xmlns:p="http://schemas.openxmlformats.org/presentationml/2006/main" saveSubsetFonts="1" autoCompressPictures="0">
+<p:presentation xmlns:a="http://schemas.openxmlformats.org/drawingml/2006/main" xmlns:r="http://schemas.openxmlformats.org/officeDocument/2006/relationships" xmlns:p="http://schemas.openxmlformats.org/presentationml/2006/main" saveSubsetFonts="1">
   <p:sldMasterIdLst>
     <p:sldMasterId id="2147483648" r:id="rId1"/>
   </p:sldMasterIdLst>
+  <p:notesMasterIdLst>
+    <p:notesMasterId r:id="rId2"/>
+  </p:notesMasterIdLst>
   <p:sldIdLst>
-    <p:sldId id="256" r:id="rId7"/>
-    <p:sldId id="257" r:id="rId9"/>
-    <p:sldId id="258" r:id="rId10"/>
-    <p:sldId id="259" r:id="rId11"/>
-    <p:sldId id="260" r:id="rId12"/>
-    <p:sldId id="261" r:id="rId13"/>
-    <p:sldId id="262" r:id="rId14"/>
-    <p:sldId id="263" r:id="rId15"/>
-    <p:sldId id="264" r:id="rId16"/>
-    <p:sldId id="265" r:id="rId17"/>
-    <p:sldId id="266" r:id="rId18"/>
-    <p:sldId id="267" r:id="rId19"/>
-    <p:sldId id="268" r:id="rId20"/>
-    <p:sldId id="269" r:id="rId21"/>
+    <p:sldId id="256" r:id="rId3"/>
+    <p:sldId id="257" r:id="rId4"/>
+    <p:sldId id="258" r:id="rId5"/>
+    <p:sldId id="259" r:id="rId6"/>
+    <p:sldId id="260" r:id="rId7"/>
+    <p:sldId id="261" r:id="rId8"/>
+    <p:sldId id="262" r:id="rId9"/>
+    <p:sldId id="263" r:id="rId10"/>
+    <p:sldId id="264" r:id="rId11"/>
+    <p:sldId id="265" r:id="rId12"/>
+    <p:sldId id="266" r:id="rId13"/>
+    <p:sldId id="267" r:id="rId14"/>
+    <p:sldId id="268" r:id="rId15"/>
+    <p:sldId id="269" r:id="rId16"/>
   </p:sldIdLst>
-  <p:sldSz cx="12191695" cy="6858000" type="screen4x3"/>
+  <p:sldSz cx="12191695" cy="6858000"/>
   <p:notesSz cx="6858000" cy="9144000"/>
   <p:defaultTextStyle>
-    <a:defPPr>
-      <a:defRPr lang="en-US"/>
-    </a:defPPr>
     <a:lvl1pPr marL="0" algn="l" defTabSz="457200" rtl="0" eaLnBrk="1" latinLnBrk="0" hangingPunct="1">
       <a:defRPr sz="1800" kern="1200">
         <a:solidFill>
@@ -121,7 +121,7 @@
 </file>
 
 <file path=ppt/notesMasters/notesMaster1.xml><?xml version="1.0" encoding="utf-8"?>
-<p:notesMaster xmlns:a="http://schemas.openxmlformats.org/drawingml/2006/main" xmlns:p="http://schemas.openxmlformats.org/presentationml/2006/main" xmlns:r="http://schemas.openxmlformats.org/officeDocument/2006/relationships">
+<p:notesMaster xmlns:a="http://schemas.openxmlformats.org/drawingml/2006/main" xmlns:r="http://schemas.openxmlformats.org/officeDocument/2006/relationships" xmlns:p="http://schemas.openxmlformats.org/presentationml/2006/main">
   <p:cSld>
     <p:bg>
       <p:bgRef idx="1001">
@@ -200,8 +200,8 @@
             </a:lvl1pPr>
           </a:lstStyle>
           <a:p>
-            <a:fld id="{0F89C1C7-3DCD-1040-A9CF-14679D8B5DDD}" type="datetimeFigureOut">
-              <a:rPr lang="en-US" smtClean="0"/>
+            <a:fld id="{B998F326-38F9-40E9-844A-EC66DA56CEC0}" type="datetimeFigureOut">
+              <a:rPr lang="en-US"/>
               <a:t>10/17/16</a:t>
             </a:fld>
             <a:endParaRPr lang="en-US"/>
@@ -212,7 +212,7 @@
         <p:nvSpPr>
           <p:cNvPr id="4" name="Slide Image Placeholder 3"/>
           <p:cNvSpPr>
-            <a:spLocks noGrp="1" noRot="1" noChangeAspect="1"/>
+            <a:spLocks noGrp="1"/>
           </p:cNvSpPr>
           <p:nvPr>
             <p:ph type="sldImg" idx="2"/>
@@ -264,37 +264,36 @@
           <a:bodyPr vert="horz" lIns="91440" tIns="45720" rIns="91440" bIns="45720" rtlCol="0"/>
           <a:lstStyle/>
           <a:p>
-            <a:pPr lvl="0"/>
-            <a:r>
-              <a:rPr lang="en-US" smtClean="0"/>
+            <a:r>
+              <a:rPr lang="en-US"/>
               <a:t>Click to edit Master text styles</a:t>
             </a:r>
           </a:p>
           <a:p>
             <a:pPr lvl="1"/>
             <a:r>
-              <a:rPr lang="en-US" smtClean="0"/>
+              <a:rPr lang="en-US"/>
               <a:t>Second level</a:t>
             </a:r>
           </a:p>
           <a:p>
             <a:pPr lvl="2"/>
             <a:r>
-              <a:rPr lang="en-US" smtClean="0"/>
+              <a:rPr lang="en-US"/>
               <a:t>Third level</a:t>
             </a:r>
           </a:p>
           <a:p>
             <a:pPr lvl="3"/>
             <a:r>
-              <a:rPr lang="en-US" smtClean="0"/>
+              <a:rPr lang="en-US"/>
               <a:t>Fourth level</a:t>
             </a:r>
           </a:p>
           <a:p>
             <a:pPr lvl="4"/>
             <a:r>
-              <a:rPr lang="en-US" smtClean="0"/>
+              <a:rPr lang="en-US"/>
               <a:t>Fifth level</a:t>
             </a:r>
             <a:endParaRPr lang="en-US"/>
@@ -359,8 +358,8 @@
             </a:lvl1pPr>
           </a:lstStyle>
           <a:p>
-            <a:fld id="{BB5E49A5-4136-284D-997B-48E1D791AD67}" type="slidenum">
-              <a:rPr lang="en-US" smtClean="0"/>
+            <a:fld id="{344DB33E-DF1A-4DDD-8617-8BEBD58B3BBA}" type="slidenum">
+              <a:rPr lang="en-US"/>
               <a:t>‹#›</a:t>
             </a:fld>
             <a:endParaRPr lang="en-US"/>
@@ -368,11 +367,6 @@
         </p:txBody>
       </p:sp>
     </p:spTree>
-    <p:extLst>
-      <p:ext uri="{BB962C8B-B14F-4D97-AF65-F5344CB8AC3E}">
-        <p14:creationId xmlns:p14="http://schemas.microsoft.com/office/powerpoint/2010/main" val="2623252185"/>
-      </p:ext>
-    </p:extLst>
   </p:cSld>
   <p:clrMap bg1="lt1" tx1="dk1" bg2="lt2" tx2="dk2" accent1="accent1" accent2="accent2" accent3="accent3" accent4="accent4" accent5="accent5" accent6="accent6" hlink="hlink" folHlink="folHlink"/>
   <p:notesStyle>
@@ -471,7 +465,7 @@
 </file>
 
 <file path=ppt/notesSlides/notesSlide1.xml><?xml version="1.0" encoding="utf-8"?>
-<p:notes xmlns:a="http://schemas.openxmlformats.org/drawingml/2006/main" xmlns:p="http://schemas.openxmlformats.org/presentationml/2006/main" xmlns:r="http://schemas.openxmlformats.org/officeDocument/2006/relationships">
+<p:notes xmlns:a="http://schemas.openxmlformats.org/drawingml/2006/main" xmlns:r="http://schemas.openxmlformats.org/officeDocument/2006/relationships" xmlns:p="http://schemas.openxmlformats.org/presentationml/2006/main">
   <p:cSld>
     <p:spTree>
       <p:nvGrpSpPr>
@@ -494,7 +488,7 @@
             <a:spLocks noGrp="1"/>
           </p:cNvSpPr>
           <p:nvPr>
-            <p:ph type="sldImg" idx="2"/>
+            <p:ph type="sldImg"/>
           </p:nvPr>
         </p:nvSpPr>
         <p:spPr/>
@@ -506,7 +500,7 @@
             <a:spLocks noGrp="1"/>
           </p:cNvSpPr>
           <p:nvPr>
-            <p:ph type="body" idx="3" sz="quarter"/>
+            <p:ph type="body" idx="1"/>
           </p:nvPr>
         </p:nvSpPr>
         <p:spPr/>
@@ -515,22 +509,11 @@
           <a:lstStyle/>
           <a:p>
             <a:r>
+              <a:rPr/>
               <a:t>Open on the claim, not the agenda. Everything on the next twelve slides is one graph, seven topics from the syllabus, and arithmetic that the app repeats live. Four presenters, three slides each.</a:t>
             </a:r>
           </a:p>
         </p:txBody>
-      </p:sp>
-      <p:sp>
-        <p:nvSpPr>
-          <p:cNvPr id="4" name="Slide Number Placeholder 3"/>
-          <p:cNvSpPr>
-            <a:spLocks noGrp="1"/>
-          </p:cNvSpPr>
-          <p:nvPr>
-            <p:ph type="sldNum" idx="5" sz="quarter"/>
-          </p:nvPr>
-        </p:nvSpPr>
-        <p:spPr/>
       </p:sp>
     </p:spTree>
   </p:cSld>
@@ -541,7 +524,7 @@
 </file>
 
 <file path=ppt/notesSlides/notesSlide10.xml><?xml version="1.0" encoding="utf-8"?>
-<p:notes xmlns:a="http://schemas.openxmlformats.org/drawingml/2006/main" xmlns:p="http://schemas.openxmlformats.org/presentationml/2006/main" xmlns:r="http://schemas.openxmlformats.org/officeDocument/2006/relationships">
+<p:notes xmlns:a="http://schemas.openxmlformats.org/drawingml/2006/main" xmlns:r="http://schemas.openxmlformats.org/officeDocument/2006/relationships" xmlns:p="http://schemas.openxmlformats.org/presentationml/2006/main">
   <p:cSld>
     <p:spTree>
       <p:nvGrpSpPr>
@@ -564,7 +547,7 @@
             <a:spLocks noGrp="1"/>
           </p:cNvSpPr>
           <p:nvPr>
-            <p:ph type="sldImg" idx="2"/>
+            <p:ph type="sldImg"/>
           </p:nvPr>
         </p:nvSpPr>
         <p:spPr/>
@@ -576,7 +559,7 @@
             <a:spLocks noGrp="1"/>
           </p:cNvSpPr>
           <p:nvPr>
-            <p:ph type="body" idx="3" sz="quarter"/>
+            <p:ph type="body" idx="1"/>
           </p:nvPr>
         </p:nvSpPr>
         <p:spPr/>
@@ -585,22 +568,11 @@
           <a:lstStyle/>
           <a:p>
             <a:r>
+              <a:rPr/>
               <a:t>Different question: visit every vertex exactly once, not every edge. The ten candidates from the previous score become the vertices, and the weight between two of them is their Jaccard similarity. Held–Karp is exact and runs in n²·2ⁿ — 10,240 states here — which is why the list is ten long and not a hundred. Greedy nearest-neighbour loses 3%: worth showing, because it is the argument for the exact method.</a:t>
             </a:r>
           </a:p>
         </p:txBody>
-      </p:sp>
-      <p:sp>
-        <p:nvSpPr>
-          <p:cNvPr id="4" name="Slide Number Placeholder 3"/>
-          <p:cNvSpPr>
-            <a:spLocks noGrp="1"/>
-          </p:cNvSpPr>
-          <p:nvPr>
-            <p:ph type="sldNum" idx="5" sz="quarter"/>
-          </p:nvPr>
-        </p:nvSpPr>
-        <p:spPr/>
       </p:sp>
     </p:spTree>
   </p:cSld>
@@ -611,7 +583,7 @@
 </file>
 
 <file path=ppt/notesSlides/notesSlide11.xml><?xml version="1.0" encoding="utf-8"?>
-<p:notes xmlns:a="http://schemas.openxmlformats.org/drawingml/2006/main" xmlns:p="http://schemas.openxmlformats.org/presentationml/2006/main" xmlns:r="http://schemas.openxmlformats.org/officeDocument/2006/relationships">
+<p:notes xmlns:a="http://schemas.openxmlformats.org/drawingml/2006/main" xmlns:r="http://schemas.openxmlformats.org/officeDocument/2006/relationships" xmlns:p="http://schemas.openxmlformats.org/presentationml/2006/main">
   <p:cSld>
     <p:spTree>
       <p:nvGrpSpPr>
@@ -634,7 +606,7 @@
             <a:spLocks noGrp="1"/>
           </p:cNvSpPr>
           <p:nvPr>
-            <p:ph type="sldImg" idx="2"/>
+            <p:ph type="sldImg"/>
           </p:nvPr>
         </p:nvSpPr>
         <p:spPr/>
@@ -646,7 +618,7 @@
             <a:spLocks noGrp="1"/>
           </p:cNvSpPr>
           <p:nvPr>
-            <p:ph type="body" idx="3" sz="quarter"/>
+            <p:ph type="body" idx="1"/>
           </p:nvPr>
         </p:nvSpPr>
         <p:spPr/>
@@ -655,22 +627,11 @@
           <a:lstStyle/>
           <a:p>
             <a:r>
+              <a:rPr/>
               <a:t>Now the genre graph loses its multiplicities and keeps an edge when two genres co-occur in at least six titles. That leaves 19 vertices and 98 edges. For any planar graph with three or more vertices, e ≤ 3v − 6 = 51. 98 is nearly double the ceiling, so no drawing can avoid crossings — that is a counting argument, no drawing required. Kuratowski confirms it structurally: there is a K5 sitting inside.</a:t>
             </a:r>
           </a:p>
         </p:txBody>
-      </p:sp>
-      <p:sp>
-        <p:nvSpPr>
-          <p:cNvPr id="4" name="Slide Number Placeholder 3"/>
-          <p:cNvSpPr>
-            <a:spLocks noGrp="1"/>
-          </p:cNvSpPr>
-          <p:nvPr>
-            <p:ph type="sldNum" idx="5" sz="quarter"/>
-          </p:nvPr>
-        </p:nvSpPr>
-        <p:spPr/>
       </p:sp>
     </p:spTree>
   </p:cSld>
@@ -681,7 +642,7 @@
 </file>
 
 <file path=ppt/notesSlides/notesSlide12.xml><?xml version="1.0" encoding="utf-8"?>
-<p:notes xmlns:a="http://schemas.openxmlformats.org/drawingml/2006/main" xmlns:p="http://schemas.openxmlformats.org/presentationml/2006/main" xmlns:r="http://schemas.openxmlformats.org/officeDocument/2006/relationships">
+<p:notes xmlns:a="http://schemas.openxmlformats.org/drawingml/2006/main" xmlns:r="http://schemas.openxmlformats.org/officeDocument/2006/relationships" xmlns:p="http://schemas.openxmlformats.org/presentationml/2006/main">
   <p:cSld>
     <p:spTree>
       <p:nvGrpSpPr>
@@ -704,7 +665,7 @@
             <a:spLocks noGrp="1"/>
           </p:cNvSpPr>
           <p:nvPr>
-            <p:ph type="sldImg" idx="2"/>
+            <p:ph type="sldImg"/>
           </p:nvPr>
         </p:nvSpPr>
         <p:spPr/>
@@ -716,7 +677,7 @@
             <a:spLocks noGrp="1"/>
           </p:cNvSpPr>
           <p:nvPr>
-            <p:ph type="body" idx="3" sz="quarter"/>
+            <p:ph type="body" idx="1"/>
           </p:nvPr>
         </p:nvSpPr>
         <p:spPr/>
@@ -725,22 +686,11 @@
           <a:lstStyle/>
           <a:p>
             <a:r>
+              <a:rPr/>
               <a:t>Keep the heaviest edges in descending co-occurrence order and discard any edge that breaks planarity. That leaves 47 of 98 — 51 dropped. Tutte's barycentric method: fix the outer face on a circle, put every interior vertex at the average of its neighbours, iterate. The interior crowds by construction; that is the theorem's output, not a layout bug. Euler's formula checks out at 30 faces. DSATUR needs four colours, and a K4 sits inside, so four is optimal.</a:t>
             </a:r>
           </a:p>
         </p:txBody>
-      </p:sp>
-      <p:sp>
-        <p:nvSpPr>
-          <p:cNvPr id="4" name="Slide Number Placeholder 3"/>
-          <p:cNvSpPr>
-            <a:spLocks noGrp="1"/>
-          </p:cNvSpPr>
-          <p:nvPr>
-            <p:ph type="sldNum" idx="5" sz="quarter"/>
-          </p:nvPr>
-        </p:nvSpPr>
-        <p:spPr/>
       </p:sp>
     </p:spTree>
   </p:cSld>
@@ -751,7 +701,7 @@
 </file>
 
 <file path=ppt/notesSlides/notesSlide13.xml><?xml version="1.0" encoding="utf-8"?>
-<p:notes xmlns:a="http://schemas.openxmlformats.org/drawingml/2006/main" xmlns:p="http://schemas.openxmlformats.org/presentationml/2006/main" xmlns:r="http://schemas.openxmlformats.org/officeDocument/2006/relationships">
+<p:notes xmlns:a="http://schemas.openxmlformats.org/drawingml/2006/main" xmlns:r="http://schemas.openxmlformats.org/officeDocument/2006/relationships" xmlns:p="http://schemas.openxmlformats.org/presentationml/2006/main">
   <p:cSld>
     <p:spTree>
       <p:nvGrpSpPr>
@@ -774,7 +724,7 @@
             <a:spLocks noGrp="1"/>
           </p:cNvSpPr>
           <p:nvPr>
-            <p:ph type="sldImg" idx="2"/>
+            <p:ph type="sldImg"/>
           </p:nvPr>
         </p:nvSpPr>
         <p:spPr/>
@@ -786,7 +736,7 @@
             <a:spLocks noGrp="1"/>
           </p:cNvSpPr>
           <p:nvPr>
-            <p:ph type="body" idx="3" sz="quarter"/>
+            <p:ph type="body" idx="1"/>
           </p:nvPr>
         </p:nvSpPr>
         <p:spPr/>
@@ -795,22 +745,11 @@
           <a:lstStyle/>
           <a:p>
             <a:r>
+              <a:rPr/>
               <a:t>The last colouring is the one the viewer actually sees. Build a conflict graph on the top ten: two titles are adjacent when they share a genre. DSATUR — highest saturation degree first — needs seven colours, and there is a K7 in the graph, so seven is optimal, not just what the heuristic found. A proper colouring means the list can be ordered so that similar titles never sit next to each other. That is the whole point: variety.</a:t>
             </a:r>
           </a:p>
         </p:txBody>
-      </p:sp>
-      <p:sp>
-        <p:nvSpPr>
-          <p:cNvPr id="4" name="Slide Number Placeholder 3"/>
-          <p:cNvSpPr>
-            <a:spLocks noGrp="1"/>
-          </p:cNvSpPr>
-          <p:nvPr>
-            <p:ph type="sldNum" idx="5" sz="quarter"/>
-          </p:nvPr>
-        </p:nvSpPr>
-        <p:spPr/>
       </p:sp>
     </p:spTree>
   </p:cSld>
@@ -821,7 +760,7 @@
 </file>
 
 <file path=ppt/notesSlides/notesSlide14.xml><?xml version="1.0" encoding="utf-8"?>
-<p:notes xmlns:a="http://schemas.openxmlformats.org/drawingml/2006/main" xmlns:p="http://schemas.openxmlformats.org/presentationml/2006/main" xmlns:r="http://schemas.openxmlformats.org/officeDocument/2006/relationships">
+<p:notes xmlns:a="http://schemas.openxmlformats.org/drawingml/2006/main" xmlns:r="http://schemas.openxmlformats.org/officeDocument/2006/relationships" xmlns:p="http://schemas.openxmlformats.org/presentationml/2006/main">
   <p:cSld>
     <p:spTree>
       <p:nvGrpSpPr>
@@ -844,7 +783,7 @@
             <a:spLocks noGrp="1"/>
           </p:cNvSpPr>
           <p:nvPr>
-            <p:ph type="sldImg" idx="2"/>
+            <p:ph type="sldImg"/>
           </p:nvPr>
         </p:nvSpPr>
         <p:spPr/>
@@ -856,7 +795,7 @@
             <a:spLocks noGrp="1"/>
           </p:cNvSpPr>
           <p:nvPr>
-            <p:ph type="body" idx="3" sz="quarter"/>
+            <p:ph type="body" idx="1"/>
           </p:nvPr>
         </p:nvSpPr>
         <p:spPr/>
@@ -865,22 +804,11 @@
           <a:lstStyle/>
           <a:p>
             <a:r>
+              <a:rPr/>
               <a:t>Close by making the shape visible: each topic answered a different question about the same object, and each answer is a number the app can show. Then be honest about the limits — the sample, the three-hop window, the 2018 cut-off. The project is stronger for naming them than for hiding them.</a:t>
             </a:r>
           </a:p>
         </p:txBody>
-      </p:sp>
-      <p:sp>
-        <p:nvSpPr>
-          <p:cNvPr id="4" name="Slide Number Placeholder 3"/>
-          <p:cNvSpPr>
-            <a:spLocks noGrp="1"/>
-          </p:cNvSpPr>
-          <p:nvPr>
-            <p:ph type="sldNum" idx="5" sz="quarter"/>
-          </p:nvPr>
-        </p:nvSpPr>
-        <p:spPr/>
       </p:sp>
     </p:spTree>
   </p:cSld>
@@ -891,7 +819,7 @@
 </file>
 
 <file path=ppt/notesSlides/notesSlide2.xml><?xml version="1.0" encoding="utf-8"?>
-<p:notes xmlns:a="http://schemas.openxmlformats.org/drawingml/2006/main" xmlns:p="http://schemas.openxmlformats.org/presentationml/2006/main" xmlns:r="http://schemas.openxmlformats.org/officeDocument/2006/relationships">
+<p:notes xmlns:a="http://schemas.openxmlformats.org/drawingml/2006/main" xmlns:r="http://schemas.openxmlformats.org/officeDocument/2006/relationships" xmlns:p="http://schemas.openxmlformats.org/presentationml/2006/main">
   <p:cSld>
     <p:spTree>
       <p:nvGrpSpPr>
@@ -914,7 +842,7 @@
             <a:spLocks noGrp="1"/>
           </p:cNvSpPr>
           <p:nvPr>
-            <p:ph type="sldImg" idx="2"/>
+            <p:ph type="sldImg"/>
           </p:nvPr>
         </p:nvSpPr>
         <p:spPr/>
@@ -926,7 +854,7 @@
             <a:spLocks noGrp="1"/>
           </p:cNvSpPr>
           <p:nvPr>
-            <p:ph type="body" idx="3" sz="quarter"/>
+            <p:ph type="body" idx="1"/>
           </p:nvPr>
         </p:nvSpPr>
         <p:spPr/>
@@ -935,22 +863,11 @@
           <a:lstStyle/>
           <a:p>
             <a:r>
+              <a:rPr/>
               <a:t>Start with the object. A rating at or above 3.5 is a like, and a like is an edge between a viewer and a title — that is a bipartite graph. We then project it onto the titles so the graph-theory topics have something to count. The projection is what every later slide operates on. Point out the cut-offs: they are the only editorial decisions in the build.</a:t>
             </a:r>
           </a:p>
         </p:txBody>
-      </p:sp>
-      <p:sp>
-        <p:nvSpPr>
-          <p:cNvPr id="4" name="Slide Number Placeholder 3"/>
-          <p:cNvSpPr>
-            <a:spLocks noGrp="1"/>
-          </p:cNvSpPr>
-          <p:nvPr>
-            <p:ph type="sldNum" idx="5" sz="quarter"/>
-          </p:nvPr>
-        </p:nvSpPr>
-        <p:spPr/>
       </p:sp>
     </p:spTree>
   </p:cSld>
@@ -961,7 +878,7 @@
 </file>
 
 <file path=ppt/notesSlides/notesSlide3.xml><?xml version="1.0" encoding="utf-8"?>
-<p:notes xmlns:a="http://schemas.openxmlformats.org/drawingml/2006/main" xmlns:p="http://schemas.openxmlformats.org/presentationml/2006/main" xmlns:r="http://schemas.openxmlformats.org/officeDocument/2006/relationships">
+<p:notes xmlns:a="http://schemas.openxmlformats.org/drawingml/2006/main" xmlns:r="http://schemas.openxmlformats.org/officeDocument/2006/relationships" xmlns:p="http://schemas.openxmlformats.org/presentationml/2006/main">
   <p:cSld>
     <p:spTree>
       <p:nvGrpSpPr>
@@ -984,7 +901,7 @@
             <a:spLocks noGrp="1"/>
           </p:cNvSpPr>
           <p:nvPr>
-            <p:ph type="sldImg" idx="2"/>
+            <p:ph type="sldImg"/>
           </p:nvPr>
         </p:nvSpPr>
         <p:spPr/>
@@ -996,7 +913,7 @@
             <a:spLocks noGrp="1"/>
           </p:cNvSpPr>
           <p:nvPr>
-            <p:ph type="body" idx="3" sz="quarter"/>
+            <p:ph type="body" idx="1"/>
           </p:nvPr>
         </p:nvSpPr>
         <p:spPr/>
@@ -1005,22 +922,11 @@
           <a:lstStyle/>
           <a:p>
             <a:r>
+              <a:rPr/>
               <a:t>This is the distinction that matters for the rest of the talk. Audience size is how many people liked a title; similarity degree is how many titles sit next to it in the projected graph. Audience size is what the popularity term in the score reads. Similarity degree is what the topics — components, paths, colouring — count. The distribution is heavy-tailed but almost flat at the bottom because k = 8 is a floor: every title keeps eight edges.</a:t>
             </a:r>
           </a:p>
         </p:txBody>
-      </p:sp>
-      <p:sp>
-        <p:nvSpPr>
-          <p:cNvPr id="4" name="Slide Number Placeholder 3"/>
-          <p:cNvSpPr>
-            <a:spLocks noGrp="1"/>
-          </p:cNvSpPr>
-          <p:nvPr>
-            <p:ph type="sldNum" idx="5" sz="quarter"/>
-          </p:nvPr>
-        </p:nvSpPr>
-        <p:spPr/>
       </p:sp>
     </p:spTree>
   </p:cSld>
@@ -1031,7 +937,7 @@
 </file>
 
 <file path=ppt/notesSlides/notesSlide4.xml><?xml version="1.0" encoding="utf-8"?>
-<p:notes xmlns:a="http://schemas.openxmlformats.org/drawingml/2006/main" xmlns:p="http://schemas.openxmlformats.org/presentationml/2006/main" xmlns:r="http://schemas.openxmlformats.org/officeDocument/2006/relationships">
+<p:notes xmlns:a="http://schemas.openxmlformats.org/drawingml/2006/main" xmlns:r="http://schemas.openxmlformats.org/officeDocument/2006/relationships" xmlns:p="http://schemas.openxmlformats.org/presentationml/2006/main">
   <p:cSld>
     <p:spTree>
       <p:nvGrpSpPr>
@@ -1054,7 +960,7 @@
             <a:spLocks noGrp="1"/>
           </p:cNvSpPr>
           <p:nvPr>
-            <p:ph type="sldImg" idx="2"/>
+            <p:ph type="sldImg"/>
           </p:nvPr>
         </p:nvSpPr>
         <p:spPr/>
@@ -1066,7 +972,7 @@
             <a:spLocks noGrp="1"/>
           </p:cNvSpPr>
           <p:nvPr>
-            <p:ph type="body" idx="3" sz="quarter"/>
+            <p:ph type="body" idx="1"/>
           </p:nvPr>
         </p:nvSpPr>
         <p:spPr/>
@@ -1075,22 +981,11 @@
           <a:lstStyle/>
           <a:p>
             <a:r>
+              <a:rPr/>
               <a:t>Union-find over the edges gives one component holding every title. Nothing is stranded, which is the precondition for the rest of the work: a path exists from any title to any other. No articulation point and no bridge means no single title holds the catalogue together — remove any one and it stays connected. The bottom bar is viewer 498's own breadth-first reach.</a:t>
             </a:r>
           </a:p>
         </p:txBody>
-      </p:sp>
-      <p:sp>
-        <p:nvSpPr>
-          <p:cNvPr id="4" name="Slide Number Placeholder 3"/>
-          <p:cNvSpPr>
-            <a:spLocks noGrp="1"/>
-          </p:cNvSpPr>
-          <p:nvPr>
-            <p:ph type="sldNum" idx="5" sz="quarter"/>
-          </p:nvPr>
-        </p:nvSpPr>
-        <p:spPr/>
       </p:sp>
     </p:spTree>
   </p:cSld>
@@ -1101,7 +996,7 @@
 </file>
 
 <file path=ppt/notesSlides/notesSlide5.xml><?xml version="1.0" encoding="utf-8"?>
-<p:notes xmlns:a="http://schemas.openxmlformats.org/drawingml/2006/main" xmlns:p="http://schemas.openxmlformats.org/presentationml/2006/main" xmlns:r="http://schemas.openxmlformats.org/officeDocument/2006/relationships">
+<p:notes xmlns:a="http://schemas.openxmlformats.org/drawingml/2006/main" xmlns:r="http://schemas.openxmlformats.org/officeDocument/2006/relationships" xmlns:p="http://schemas.openxmlformats.org/presentationml/2006/main">
   <p:cSld>
     <p:spTree>
       <p:nvGrpSpPr>
@@ -1124,7 +1019,7 @@
             <a:spLocks noGrp="1"/>
           </p:cNvSpPr>
           <p:nvPr>
-            <p:ph type="sldImg" idx="2"/>
+            <p:ph type="sldImg"/>
           </p:nvPr>
         </p:nvSpPr>
         <p:spPr/>
@@ -1136,7 +1031,7 @@
             <a:spLocks noGrp="1"/>
           </p:cNvSpPr>
           <p:nvPr>
-            <p:ph type="body" idx="3" sz="quarter"/>
+            <p:ph type="body" idx="1"/>
           </p:nvPr>
         </p:nvSpPr>
         <p:spPr/>
@@ -1145,22 +1040,11 @@
           <a:lstStyle/>
           <a:p>
             <a:r>
+              <a:rPr/>
               <a:t>A path here is not an abstraction — it is the witness. Viewer, co-liker, anchor, candidate: three edges, alternating between the viewer and title parts of the original bipartite graph. The co-liker is the proof that the candidate belongs in this neighbourhood; the anchor is the title the two viewers most agree on. Count the paths and you get the support term in the score.</a:t>
             </a:r>
           </a:p>
         </p:txBody>
-      </p:sp>
-      <p:sp>
-        <p:nvSpPr>
-          <p:cNvPr id="4" name="Slide Number Placeholder 3"/>
-          <p:cNvSpPr>
-            <a:spLocks noGrp="1"/>
-          </p:cNvSpPr>
-          <p:nvPr>
-            <p:ph type="sldNum" idx="5" sz="quarter"/>
-          </p:nvPr>
-        </p:nvSpPr>
-        <p:spPr/>
       </p:sp>
     </p:spTree>
   </p:cSld>
@@ -1171,7 +1055,7 @@
 </file>
 
 <file path=ppt/notesSlides/notesSlide6.xml><?xml version="1.0" encoding="utf-8"?>
-<p:notes xmlns:a="http://schemas.openxmlformats.org/drawingml/2006/main" xmlns:p="http://schemas.openxmlformats.org/presentationml/2006/main" xmlns:r="http://schemas.openxmlformats.org/officeDocument/2006/relationships">
+<p:notes xmlns:a="http://schemas.openxmlformats.org/drawingml/2006/main" xmlns:r="http://schemas.openxmlformats.org/officeDocument/2006/relationships" xmlns:p="http://schemas.openxmlformats.org/presentationml/2006/main">
   <p:cSld>
     <p:spTree>
       <p:nvGrpSpPr>
@@ -1194,7 +1078,7 @@
             <a:spLocks noGrp="1"/>
           </p:cNvSpPr>
           <p:nvPr>
-            <p:ph type="sldImg" idx="2"/>
+            <p:ph type="sldImg"/>
           </p:nvPr>
         </p:nvSpPr>
         <p:spPr/>
@@ -1206,7 +1090,7 @@
             <a:spLocks noGrp="1"/>
           </p:cNvSpPr>
           <p:nvPr>
-            <p:ph type="body" idx="3" sz="quarter"/>
+            <p:ph type="body" idx="1"/>
           </p:nvPr>
         </p:nvSpPr>
         <p:spPr/>
@@ -1215,22 +1099,11 @@
           <a:lstStyle/>
           <a:p>
             <a:r>
+              <a:rPr/>
               <a:t>Every path closes into a cycle, and a cycle means agreement already banked. If a title's whole audience is already inside the viewer's one-hop set, then recommending it tells the viewer nothing. E is the fraction of the candidate's audience that the viewer's co-likers already cover. The Matrix is the extreme case: 225 of 239. The novelty term inverts it.</a:t>
             </a:r>
           </a:p>
         </p:txBody>
-      </p:sp>
-      <p:sp>
-        <p:nvSpPr>
-          <p:cNvPr id="4" name="Slide Number Placeholder 3"/>
-          <p:cNvSpPr>
-            <a:spLocks noGrp="1"/>
-          </p:cNvSpPr>
-          <p:nvPr>
-            <p:ph type="sldNum" idx="5" sz="quarter"/>
-          </p:nvPr>
-        </p:nvSpPr>
-        <p:spPr/>
       </p:sp>
     </p:spTree>
   </p:cSld>
@@ -1241,7 +1114,7 @@
 </file>
 
 <file path=ppt/notesSlides/notesSlide7.xml><?xml version="1.0" encoding="utf-8"?>
-<p:notes xmlns:a="http://schemas.openxmlformats.org/drawingml/2006/main" xmlns:p="http://schemas.openxmlformats.org/presentationml/2006/main" xmlns:r="http://schemas.openxmlformats.org/officeDocument/2006/relationships">
+<p:notes xmlns:a="http://schemas.openxmlformats.org/drawingml/2006/main" xmlns:r="http://schemas.openxmlformats.org/officeDocument/2006/relationships" xmlns:p="http://schemas.openxmlformats.org/presentationml/2006/main">
   <p:cSld>
     <p:spTree>
       <p:nvGrpSpPr>
@@ -1264,7 +1137,7 @@
             <a:spLocks noGrp="1"/>
           </p:cNvSpPr>
           <p:nvPr>
-            <p:ph type="sldImg" idx="2"/>
+            <p:ph type="sldImg"/>
           </p:nvPr>
         </p:nvSpPr>
         <p:spPr/>
@@ -1276,7 +1149,7 @@
             <a:spLocks noGrp="1"/>
           </p:cNvSpPr>
           <p:nvPr>
-            <p:ph type="body" idx="3" sz="quarter"/>
+            <p:ph type="body" idx="1"/>
           </p:nvPr>
         </p:nvSpPr>
         <p:spPr/>
@@ -1285,22 +1158,11 @@
           <a:lstStyle/>
           <a:p>
             <a:r>
+              <a:rPr/>
               <a:t>This is the arithmetic the app shows on screen, line by line. Support is logarithmic because the cycle count is heavy-tailed — 1,124 versus a handful. Popularity is damped by 0.35 so a blockbuster cannot win on audience alone. Novelty divides echo out. The Matrix ranks first of 1,416 candidates while sitting third on popularity, which is the damping working.</a:t>
             </a:r>
           </a:p>
         </p:txBody>
-      </p:sp>
-      <p:sp>
-        <p:nvSpPr>
-          <p:cNvPr id="4" name="Slide Number Placeholder 3"/>
-          <p:cNvSpPr>
-            <a:spLocks noGrp="1"/>
-          </p:cNvSpPr>
-          <p:nvPr>
-            <p:ph type="sldNum" idx="5" sz="quarter"/>
-          </p:nvPr>
-        </p:nvSpPr>
-        <p:spPr/>
       </p:sp>
     </p:spTree>
   </p:cSld>
@@ -1311,7 +1173,7 @@
 </file>
 
 <file path=ppt/notesSlides/notesSlide8.xml><?xml version="1.0" encoding="utf-8"?>
-<p:notes xmlns:a="http://schemas.openxmlformats.org/drawingml/2006/main" xmlns:p="http://schemas.openxmlformats.org/presentationml/2006/main" xmlns:r="http://schemas.openxmlformats.org/officeDocument/2006/relationships">
+<p:notes xmlns:a="http://schemas.openxmlformats.org/drawingml/2006/main" xmlns:r="http://schemas.openxmlformats.org/officeDocument/2006/relationships" xmlns:p="http://schemas.openxmlformats.org/presentationml/2006/main">
   <p:cSld>
     <p:spTree>
       <p:nvGrpSpPr>
@@ -1334,7 +1196,7 @@
             <a:spLocks noGrp="1"/>
           </p:cNvSpPr>
           <p:nvPr>
-            <p:ph type="sldImg" idx="2"/>
+            <p:ph type="sldImg"/>
           </p:nvPr>
         </p:nvSpPr>
         <p:spPr/>
@@ -1346,7 +1208,7 @@
             <a:spLocks noGrp="1"/>
           </p:cNvSpPr>
           <p:nvPr>
-            <p:ph type="body" idx="3" sz="quarter"/>
+            <p:ph type="body" idx="1"/>
           </p:nvPr>
         </p:nvSpPr>
         <p:spPr/>
@@ -1355,22 +1217,11 @@
           <a:lstStyle/>
           <a:p>
             <a:r>
+              <a:rPr/>
               <a:t>Build the genre graph: two genres are adjacent when a title carries both, and the edge is the title itself — so it is a multigraph, 1,212 parallel edges over 19 vertices. Euler's condition is connected plus every degree even. Ten vertices are odd, so an Eulerian circuit does not exist. The next slide repairs it.</a:t>
             </a:r>
           </a:p>
         </p:txBody>
-      </p:sp>
-      <p:sp>
-        <p:nvSpPr>
-          <p:cNvPr id="4" name="Slide Number Placeholder 3"/>
-          <p:cNvSpPr>
-            <a:spLocks noGrp="1"/>
-          </p:cNvSpPr>
-          <p:nvPr>
-            <p:ph type="sldNum" idx="5" sz="quarter"/>
-          </p:nvPr>
-        </p:nvSpPr>
-        <p:spPr/>
       </p:sp>
     </p:spTree>
   </p:cSld>
@@ -1381,7 +1232,7 @@
 </file>
 
 <file path=ppt/notesSlides/notesSlide9.xml><?xml version="1.0" encoding="utf-8"?>
-<p:notes xmlns:a="http://schemas.openxmlformats.org/drawingml/2006/main" xmlns:p="http://schemas.openxmlformats.org/presentationml/2006/main" xmlns:r="http://schemas.openxmlformats.org/officeDocument/2006/relationships">
+<p:notes xmlns:a="http://schemas.openxmlformats.org/drawingml/2006/main" xmlns:r="http://schemas.openxmlformats.org/officeDocument/2006/relationships" xmlns:p="http://schemas.openxmlformats.org/presentationml/2006/main">
   <p:cSld>
     <p:spTree>
       <p:nvGrpSpPr>
@@ -1404,7 +1255,7 @@
             <a:spLocks noGrp="1"/>
           </p:cNvSpPr>
           <p:nvPr>
-            <p:ph type="sldImg" idx="2"/>
+            <p:ph type="sldImg"/>
           </p:nvPr>
         </p:nvSpPr>
         <p:spPr/>
@@ -1416,7 +1267,7 @@
             <a:spLocks noGrp="1"/>
           </p:cNvSpPr>
           <p:nvPr>
-            <p:ph type="body" idx="3" sz="quarter"/>
+            <p:ph type="body" idx="1"/>
           </p:nvPr>
         </p:nvSpPr>
         <p:spPr/>
@@ -1425,22 +1276,11 @@
           <a:lstStyle/>
           <a:p>
             <a:r>
+              <a:rPr/>
               <a:t>This is the route-inspection repair. Pair the odd vertices greedily by shortest distance in the underlying simple genre graph — five pairs — and duplicate every edge along each connecting path. Parity flips at both ends and along the interior of each path, so every degree becomes even and the circuit exists. Nine edges added, 1,212 to 1,221, and Hierholzer's stack returns the traversal.</a:t>
             </a:r>
           </a:p>
         </p:txBody>
-      </p:sp>
-      <p:sp>
-        <p:nvSpPr>
-          <p:cNvPr id="4" name="Slide Number Placeholder 3"/>
-          <p:cNvSpPr>
-            <a:spLocks noGrp="1"/>
-          </p:cNvSpPr>
-          <p:nvPr>
-            <p:ph type="sldNum" idx="5" sz="quarter"/>
-          </p:nvPr>
-        </p:nvSpPr>
-        <p:spPr/>
       </p:sp>
     </p:spTree>
   </p:cSld>
@@ -1482,13 +1322,16 @@
             <a:off x="685800" y="2130425"/>
             <a:ext cx="7772400" cy="1470025"/>
           </a:xfrm>
+          <a:prstGeom prst="rect">
+            <a:avLst/>
+          </a:prstGeom>
         </p:spPr>
         <p:txBody>
           <a:bodyPr/>
           <a:lstStyle/>
           <a:p>
             <a:r>
-              <a:rPr lang="en-US" smtClean="0"/>
+              <a:rPr lang="en-US"/>
               <a:t>Click to edit Master title style</a:t>
             </a:r>
             <a:endParaRPr lang="en-US"/>
@@ -1510,6 +1353,9 @@
             <a:off x="1371600" y="3886200"/>
             <a:ext cx="6400800" cy="1752600"/>
           </a:xfrm>
+          <a:prstGeom prst="rect">
+            <a:avLst/>
+          </a:prstGeom>
         </p:spPr>
         <p:txBody>
           <a:bodyPr/>
@@ -1607,7 +1453,7 @@
           </a:lstStyle>
           <a:p>
             <a:r>
-              <a:rPr lang="en-US" smtClean="0"/>
+              <a:rPr lang="en-US"/>
               <a:t>Click to edit Master subtitle style</a:t>
             </a:r>
             <a:endParaRPr lang="en-US"/>
@@ -1629,8 +1475,8 @@
           <a:bodyPr/>
           <a:lstStyle/>
           <a:p>
-            <a:fld id="{5BCAD085-E8A6-8845-BD4E-CB4CCA059FC4}" type="datetimeFigureOut">
-              <a:rPr lang="en-US" smtClean="0"/>
+            <a:fld id="{CF395B21-E8EE-4505-87E0-7B7F2C3DBBD0}" type="datetimeFigureOut">
+              <a:rPr lang="en-US"/>
               <a:t>1/27/13</a:t>
             </a:fld>
             <a:endParaRPr lang="en-US"/>
@@ -1671,8 +1517,8 @@
           <a:bodyPr/>
           <a:lstStyle/>
           <a:p>
-            <a:fld id="{C1FF6DA9-008F-8B48-92A6-B652298478BF}" type="slidenum">
-              <a:rPr lang="en-US" smtClean="0"/>
+            <a:fld id="{7DDC6D5D-A00E-4AA9-84F2-364CBECE0EEA}" type="slidenum">
+              <a:rPr lang="en-US"/>
               <a:t>‹#›</a:t>
             </a:fld>
             <a:endParaRPr lang="en-US"/>
@@ -1680,11 +1526,6 @@
         </p:txBody>
       </p:sp>
     </p:spTree>
-    <p:extLst>
-      <p:ext uri="{BB962C8B-B14F-4D97-AF65-F5344CB8AC3E}">
-        <p14:creationId xmlns:p14="http://schemas.microsoft.com/office/powerpoint/2010/main" val="3168075583"/>
-      </p:ext>
-    </p:extLst>
   </p:cSld>
   <p:clrMapOvr>
     <a:masterClrMapping/>
@@ -1725,7 +1566,7 @@
           <a:lstStyle/>
           <a:p>
             <a:r>
-              <a:rPr lang="en-US" smtClean="0"/>
+              <a:rPr lang="en-US"/>
               <a:t>Click to edit Master title style</a:t>
             </a:r>
             <a:endParaRPr lang="en-US"/>
@@ -1747,37 +1588,36 @@
           <a:bodyPr vert="eaVert"/>
           <a:lstStyle/>
           <a:p>
-            <a:pPr lvl="0"/>
-            <a:r>
-              <a:rPr lang="en-US" smtClean="0"/>
+            <a:r>
+              <a:rPr lang="en-US"/>
               <a:t>Click to edit Master text styles</a:t>
             </a:r>
           </a:p>
           <a:p>
             <a:pPr lvl="1"/>
             <a:r>
-              <a:rPr lang="en-US" smtClean="0"/>
+              <a:rPr lang="en-US"/>
               <a:t>Second level</a:t>
             </a:r>
           </a:p>
           <a:p>
             <a:pPr lvl="2"/>
             <a:r>
-              <a:rPr lang="en-US" smtClean="0"/>
+              <a:rPr lang="en-US"/>
               <a:t>Third level</a:t>
             </a:r>
           </a:p>
           <a:p>
             <a:pPr lvl="3"/>
             <a:r>
-              <a:rPr lang="en-US" smtClean="0"/>
+              <a:rPr lang="en-US"/>
               <a:t>Fourth level</a:t>
             </a:r>
           </a:p>
           <a:p>
             <a:pPr lvl="4"/>
             <a:r>
-              <a:rPr lang="en-US" smtClean="0"/>
+              <a:rPr lang="en-US"/>
               <a:t>Fifth level</a:t>
             </a:r>
             <a:endParaRPr lang="en-US"/>
@@ -1799,8 +1639,8 @@
           <a:bodyPr/>
           <a:lstStyle/>
           <a:p>
-            <a:fld id="{5BCAD085-E8A6-8845-BD4E-CB4CCA059FC4}" type="datetimeFigureOut">
-              <a:rPr lang="en-US" smtClean="0"/>
+            <a:fld id="{27602B83-4DFE-444B-8222-D5FF1EA6B44C}" type="datetimeFigureOut">
+              <a:rPr lang="en-US"/>
               <a:t>1/27/13</a:t>
             </a:fld>
             <a:endParaRPr lang="en-US"/>
@@ -1841,8 +1681,8 @@
           <a:bodyPr/>
           <a:lstStyle/>
           <a:p>
-            <a:fld id="{C1FF6DA9-008F-8B48-92A6-B652298478BF}" type="slidenum">
-              <a:rPr lang="en-US" smtClean="0"/>
+            <a:fld id="{DE19C649-D3E0-46CB-87C1-67136E4226A6}" type="slidenum">
+              <a:rPr lang="en-US"/>
               <a:t>‹#›</a:t>
             </a:fld>
             <a:endParaRPr lang="en-US"/>
@@ -1850,11 +1690,6 @@
         </p:txBody>
       </p:sp>
     </p:spTree>
-    <p:extLst>
-      <p:ext uri="{BB962C8B-B14F-4D97-AF65-F5344CB8AC3E}">
-        <p14:creationId xmlns:p14="http://schemas.microsoft.com/office/powerpoint/2010/main" val="2910927964"/>
-      </p:ext>
-    </p:extLst>
   </p:cSld>
   <p:clrMapOvr>
     <a:masterClrMapping/>
@@ -1894,13 +1729,16 @@
             <a:off x="6629400" y="274638"/>
             <a:ext cx="2057400" cy="5851525"/>
           </a:xfrm>
+          <a:prstGeom prst="rect">
+            <a:avLst/>
+          </a:prstGeom>
         </p:spPr>
         <p:txBody>
           <a:bodyPr vert="eaVert"/>
           <a:lstStyle/>
           <a:p>
             <a:r>
-              <a:rPr lang="en-US" smtClean="0"/>
+              <a:rPr lang="en-US"/>
               <a:t>Click to edit Master title style</a:t>
             </a:r>
             <a:endParaRPr lang="en-US"/>
@@ -1922,42 +1760,44 @@
             <a:off x="457200" y="274638"/>
             <a:ext cx="6019800" cy="5851525"/>
           </a:xfrm>
+          <a:prstGeom prst="rect">
+            <a:avLst/>
+          </a:prstGeom>
         </p:spPr>
         <p:txBody>
           <a:bodyPr vert="eaVert"/>
           <a:lstStyle/>
           <a:p>
-            <a:pPr lvl="0"/>
-            <a:r>
-              <a:rPr lang="en-US" smtClean="0"/>
+            <a:r>
+              <a:rPr lang="en-US"/>
               <a:t>Click to edit Master text styles</a:t>
             </a:r>
           </a:p>
           <a:p>
             <a:pPr lvl="1"/>
             <a:r>
-              <a:rPr lang="en-US" smtClean="0"/>
+              <a:rPr lang="en-US"/>
               <a:t>Second level</a:t>
             </a:r>
           </a:p>
           <a:p>
             <a:pPr lvl="2"/>
             <a:r>
-              <a:rPr lang="en-US" smtClean="0"/>
+              <a:rPr lang="en-US"/>
               <a:t>Third level</a:t>
             </a:r>
           </a:p>
           <a:p>
             <a:pPr lvl="3"/>
             <a:r>
-              <a:rPr lang="en-US" smtClean="0"/>
+              <a:rPr lang="en-US"/>
               <a:t>Fourth level</a:t>
             </a:r>
           </a:p>
           <a:p>
             <a:pPr lvl="4"/>
             <a:r>
-              <a:rPr lang="en-US" smtClean="0"/>
+              <a:rPr lang="en-US"/>
               <a:t>Fifth level</a:t>
             </a:r>
             <a:endParaRPr lang="en-US"/>
@@ -1979,8 +1819,8 @@
           <a:bodyPr/>
           <a:lstStyle/>
           <a:p>
-            <a:fld id="{5BCAD085-E8A6-8845-BD4E-CB4CCA059FC4}" type="datetimeFigureOut">
-              <a:rPr lang="en-US" smtClean="0"/>
+            <a:fld id="{A6FA40F9-1701-4EB4-806D-4ED861E7A003}" type="datetimeFigureOut">
+              <a:rPr lang="en-US"/>
               <a:t>1/27/13</a:t>
             </a:fld>
             <a:endParaRPr lang="en-US"/>
@@ -2021,8 +1861,8 @@
           <a:bodyPr/>
           <a:lstStyle/>
           <a:p>
-            <a:fld id="{C1FF6DA9-008F-8B48-92A6-B652298478BF}" type="slidenum">
-              <a:rPr lang="en-US" smtClean="0"/>
+            <a:fld id="{20EBE78A-EB3E-401E-81B5-D7F53201DAF3}" type="slidenum">
+              <a:rPr lang="en-US"/>
               <a:t>‹#›</a:t>
             </a:fld>
             <a:endParaRPr lang="en-US"/>
@@ -2030,11 +1870,6 @@
         </p:txBody>
       </p:sp>
     </p:spTree>
-    <p:extLst>
-      <p:ext uri="{BB962C8B-B14F-4D97-AF65-F5344CB8AC3E}">
-        <p14:creationId xmlns:p14="http://schemas.microsoft.com/office/powerpoint/2010/main" val="3612223792"/>
-      </p:ext>
-    </p:extLst>
   </p:cSld>
   <p:clrMapOvr>
     <a:masterClrMapping/>
@@ -2075,7 +1910,7 @@
           <a:lstStyle/>
           <a:p>
             <a:r>
-              <a:rPr lang="en-US" smtClean="0"/>
+              <a:rPr lang="en-US"/>
               <a:t>Click to edit Master title style</a:t>
             </a:r>
             <a:endParaRPr lang="en-US"/>
@@ -2097,37 +1932,36 @@
           <a:bodyPr/>
           <a:lstStyle/>
           <a:p>
-            <a:pPr lvl="0"/>
-            <a:r>
-              <a:rPr lang="en-US" smtClean="0"/>
+            <a:r>
+              <a:rPr lang="en-US"/>
               <a:t>Click to edit Master text styles</a:t>
             </a:r>
           </a:p>
           <a:p>
             <a:pPr lvl="1"/>
             <a:r>
-              <a:rPr lang="en-US" smtClean="0"/>
+              <a:rPr lang="en-US"/>
               <a:t>Second level</a:t>
             </a:r>
           </a:p>
           <a:p>
             <a:pPr lvl="2"/>
             <a:r>
-              <a:rPr lang="en-US" smtClean="0"/>
+              <a:rPr lang="en-US"/>
               <a:t>Third level</a:t>
             </a:r>
           </a:p>
           <a:p>
             <a:pPr lvl="3"/>
             <a:r>
-              <a:rPr lang="en-US" smtClean="0"/>
+              <a:rPr lang="en-US"/>
               <a:t>Fourth level</a:t>
             </a:r>
           </a:p>
           <a:p>
             <a:pPr lvl="4"/>
             <a:r>
-              <a:rPr lang="en-US" smtClean="0"/>
+              <a:rPr lang="en-US"/>
               <a:t>Fifth level</a:t>
             </a:r>
             <a:endParaRPr lang="en-US"/>
@@ -2149,8 +1983,8 @@
           <a:bodyPr/>
           <a:lstStyle/>
           <a:p>
-            <a:fld id="{5BCAD085-E8A6-8845-BD4E-CB4CCA059FC4}" type="datetimeFigureOut">
-              <a:rPr lang="en-US" smtClean="0"/>
+            <a:fld id="{05E609E6-1126-4CCC-8F95-892B304C12E9}" type="datetimeFigureOut">
+              <a:rPr lang="en-US"/>
               <a:t>1/27/13</a:t>
             </a:fld>
             <a:endParaRPr lang="en-US"/>
@@ -2191,8 +2025,8 @@
           <a:bodyPr/>
           <a:lstStyle/>
           <a:p>
-            <a:fld id="{C1FF6DA9-008F-8B48-92A6-B652298478BF}" type="slidenum">
-              <a:rPr lang="en-US" smtClean="0"/>
+            <a:fld id="{EDCD0F9E-EF7E-4C26-8662-25A73F2263DD}" type="slidenum">
+              <a:rPr lang="en-US"/>
               <a:t>‹#›</a:t>
             </a:fld>
             <a:endParaRPr lang="en-US"/>
@@ -2200,11 +2034,6 @@
         </p:txBody>
       </p:sp>
     </p:spTree>
-    <p:extLst>
-      <p:ext uri="{BB962C8B-B14F-4D97-AF65-F5344CB8AC3E}">
-        <p14:creationId xmlns:p14="http://schemas.microsoft.com/office/powerpoint/2010/main" val="2614314258"/>
-      </p:ext>
-    </p:extLst>
   </p:cSld>
   <p:clrMapOvr>
     <a:masterClrMapping/>
@@ -2244,6 +2073,9 @@
             <a:off x="722313" y="4406900"/>
             <a:ext cx="7772400" cy="1362075"/>
           </a:xfrm>
+          <a:prstGeom prst="rect">
+            <a:avLst/>
+          </a:prstGeom>
         </p:spPr>
         <p:txBody>
           <a:bodyPr anchor="t"/>
@@ -2254,7 +2086,7 @@
           </a:lstStyle>
           <a:p>
             <a:r>
-              <a:rPr lang="en-US" smtClean="0"/>
+              <a:rPr lang="en-US"/>
               <a:t>Click to edit Master title style</a:t>
             </a:r>
             <a:endParaRPr lang="en-US"/>
@@ -2276,6 +2108,9 @@
             <a:off x="722313" y="2906713"/>
             <a:ext cx="7772400" cy="1500187"/>
           </a:xfrm>
+          <a:prstGeom prst="rect">
+            <a:avLst/>
+          </a:prstGeom>
         </p:spPr>
         <p:txBody>
           <a:bodyPr anchor="b"/>
@@ -2372,9 +2207,8 @@
             </a:lvl9pPr>
           </a:lstStyle>
           <a:p>
-            <a:pPr lvl="0"/>
-            <a:r>
-              <a:rPr lang="en-US" smtClean="0"/>
+            <a:r>
+              <a:rPr lang="en-US"/>
               <a:t>Click to edit Master text styles</a:t>
             </a:r>
           </a:p>
@@ -2395,8 +2229,8 @@
           <a:bodyPr/>
           <a:lstStyle/>
           <a:p>
-            <a:fld id="{5BCAD085-E8A6-8845-BD4E-CB4CCA059FC4}" type="datetimeFigureOut">
-              <a:rPr lang="en-US" smtClean="0"/>
+            <a:fld id="{B43082BF-5467-4883-8896-824F7369BC9A}" type="datetimeFigureOut">
+              <a:rPr lang="en-US"/>
               <a:t>1/27/13</a:t>
             </a:fld>
             <a:endParaRPr lang="en-US"/>
@@ -2437,8 +2271,8 @@
           <a:bodyPr/>
           <a:lstStyle/>
           <a:p>
-            <a:fld id="{C1FF6DA9-008F-8B48-92A6-B652298478BF}" type="slidenum">
-              <a:rPr lang="en-US" smtClean="0"/>
+            <a:fld id="{87C18080-B33E-4073-8615-72D8F5AE8F78}" type="slidenum">
+              <a:rPr lang="en-US"/>
               <a:t>‹#›</a:t>
             </a:fld>
             <a:endParaRPr lang="en-US"/>
@@ -2446,11 +2280,6 @@
         </p:txBody>
       </p:sp>
     </p:spTree>
-    <p:extLst>
-      <p:ext uri="{BB962C8B-B14F-4D97-AF65-F5344CB8AC3E}">
-        <p14:creationId xmlns:p14="http://schemas.microsoft.com/office/powerpoint/2010/main" val="960648375"/>
-      </p:ext>
-    </p:extLst>
   </p:cSld>
   <p:clrMapOvr>
     <a:masterClrMapping/>
@@ -2491,7 +2320,7 @@
           <a:lstStyle/>
           <a:p>
             <a:r>
-              <a:rPr lang="en-US" smtClean="0"/>
+              <a:rPr lang="en-US"/>
               <a:t>Click to edit Master title style</a:t>
             </a:r>
             <a:endParaRPr lang="en-US"/>
@@ -2513,6 +2342,9 @@
             <a:off x="457200" y="1600200"/>
             <a:ext cx="4038600" cy="4525963"/>
           </a:xfrm>
+          <a:prstGeom prst="rect">
+            <a:avLst/>
+          </a:prstGeom>
         </p:spPr>
         <p:txBody>
           <a:bodyPr/>
@@ -2546,37 +2378,36 @@
             </a:lvl9pPr>
           </a:lstStyle>
           <a:p>
-            <a:pPr lvl="0"/>
-            <a:r>
-              <a:rPr lang="en-US" smtClean="0"/>
+            <a:r>
+              <a:rPr lang="en-US"/>
               <a:t>Click to edit Master text styles</a:t>
             </a:r>
           </a:p>
           <a:p>
             <a:pPr lvl="1"/>
             <a:r>
-              <a:rPr lang="en-US" smtClean="0"/>
+              <a:rPr lang="en-US"/>
               <a:t>Second level</a:t>
             </a:r>
           </a:p>
           <a:p>
             <a:pPr lvl="2"/>
             <a:r>
-              <a:rPr lang="en-US" smtClean="0"/>
+              <a:rPr lang="en-US"/>
               <a:t>Third level</a:t>
             </a:r>
           </a:p>
           <a:p>
             <a:pPr lvl="3"/>
             <a:r>
-              <a:rPr lang="en-US" smtClean="0"/>
+              <a:rPr lang="en-US"/>
               <a:t>Fourth level</a:t>
             </a:r>
           </a:p>
           <a:p>
             <a:pPr lvl="4"/>
             <a:r>
-              <a:rPr lang="en-US" smtClean="0"/>
+              <a:rPr lang="en-US"/>
               <a:t>Fifth level</a:t>
             </a:r>
             <a:endParaRPr lang="en-US"/>
@@ -2598,6 +2429,9 @@
             <a:off x="4648200" y="1600200"/>
             <a:ext cx="4038600" cy="4525963"/>
           </a:xfrm>
+          <a:prstGeom prst="rect">
+            <a:avLst/>
+          </a:prstGeom>
         </p:spPr>
         <p:txBody>
           <a:bodyPr/>
@@ -2631,37 +2465,36 @@
             </a:lvl9pPr>
           </a:lstStyle>
           <a:p>
-            <a:pPr lvl="0"/>
-            <a:r>
-              <a:rPr lang="en-US" smtClean="0"/>
+            <a:r>
+              <a:rPr lang="en-US"/>
               <a:t>Click to edit Master text styles</a:t>
             </a:r>
           </a:p>
           <a:p>
             <a:pPr lvl="1"/>
             <a:r>
-              <a:rPr lang="en-US" smtClean="0"/>
+              <a:rPr lang="en-US"/>
               <a:t>Second level</a:t>
             </a:r>
           </a:p>
           <a:p>
             <a:pPr lvl="2"/>
             <a:r>
-              <a:rPr lang="en-US" smtClean="0"/>
+              <a:rPr lang="en-US"/>
               <a:t>Third level</a:t>
             </a:r>
           </a:p>
           <a:p>
             <a:pPr lvl="3"/>
             <a:r>
-              <a:rPr lang="en-US" smtClean="0"/>
+              <a:rPr lang="en-US"/>
               <a:t>Fourth level</a:t>
             </a:r>
           </a:p>
           <a:p>
             <a:pPr lvl="4"/>
             <a:r>
-              <a:rPr lang="en-US" smtClean="0"/>
+              <a:rPr lang="en-US"/>
               <a:t>Fifth level</a:t>
             </a:r>
             <a:endParaRPr lang="en-US"/>
@@ -2683,8 +2516,8 @@
           <a:bodyPr/>
           <a:lstStyle/>
           <a:p>
-            <a:fld id="{5BCAD085-E8A6-8845-BD4E-CB4CCA059FC4}" type="datetimeFigureOut">
-              <a:rPr lang="en-US" smtClean="0"/>
+            <a:fld id="{A3A66248-C912-41CA-84D9-08E1C7982093}" type="datetimeFigureOut">
+              <a:rPr lang="en-US"/>
               <a:t>1/27/13</a:t>
             </a:fld>
             <a:endParaRPr lang="en-US"/>
@@ -2725,8 +2558,8 @@
           <a:bodyPr/>
           <a:lstStyle/>
           <a:p>
-            <a:fld id="{C1FF6DA9-008F-8B48-92A6-B652298478BF}" type="slidenum">
-              <a:rPr lang="en-US" smtClean="0"/>
+            <a:fld id="{85CB9569-04AF-4288-8880-64CE52ABE7A3}" type="slidenum">
+              <a:rPr lang="en-US"/>
               <a:t>‹#›</a:t>
             </a:fld>
             <a:endParaRPr lang="en-US"/>
@@ -2734,11 +2567,6 @@
         </p:txBody>
       </p:sp>
     </p:spTree>
-    <p:extLst>
-      <p:ext uri="{BB962C8B-B14F-4D97-AF65-F5344CB8AC3E}">
-        <p14:creationId xmlns:p14="http://schemas.microsoft.com/office/powerpoint/2010/main" val="2782244947"/>
-      </p:ext>
-    </p:extLst>
   </p:cSld>
   <p:clrMapOvr>
     <a:masterClrMapping/>
@@ -2777,13 +2605,11 @@
         <p:txBody>
           <a:bodyPr/>
           <a:lstStyle>
-            <a:lvl1pPr>
-              <a:defRPr/>
-            </a:lvl1pPr>
+            <a:lvl1pPr/>
           </a:lstStyle>
           <a:p>
             <a:r>
-              <a:rPr lang="en-US" smtClean="0"/>
+              <a:rPr lang="en-US"/>
               <a:t>Click to edit Master title style</a:t>
             </a:r>
             <a:endParaRPr lang="en-US"/>
@@ -2805,6 +2631,9 @@
             <a:off x="457200" y="1535113"/>
             <a:ext cx="4040188" cy="639762"/>
           </a:xfrm>
+          <a:prstGeom prst="rect">
+            <a:avLst/>
+          </a:prstGeom>
         </p:spPr>
         <p:txBody>
           <a:bodyPr anchor="b"/>
@@ -2847,9 +2676,8 @@
             </a:lvl9pPr>
           </a:lstStyle>
           <a:p>
-            <a:pPr lvl="0"/>
-            <a:r>
-              <a:rPr lang="en-US" smtClean="0"/>
+            <a:r>
+              <a:rPr lang="en-US"/>
               <a:t>Click to edit Master text styles</a:t>
             </a:r>
           </a:p>
@@ -2870,6 +2698,9 @@
             <a:off x="457200" y="2174875"/>
             <a:ext cx="4040188" cy="3951288"/>
           </a:xfrm>
+          <a:prstGeom prst="rect">
+            <a:avLst/>
+          </a:prstGeom>
         </p:spPr>
         <p:txBody>
           <a:bodyPr/>
@@ -2903,37 +2734,36 @@
             </a:lvl9pPr>
           </a:lstStyle>
           <a:p>
-            <a:pPr lvl="0"/>
-            <a:r>
-              <a:rPr lang="en-US" smtClean="0"/>
+            <a:r>
+              <a:rPr lang="en-US"/>
               <a:t>Click to edit Master text styles</a:t>
             </a:r>
           </a:p>
           <a:p>
             <a:pPr lvl="1"/>
             <a:r>
-              <a:rPr lang="en-US" smtClean="0"/>
+              <a:rPr lang="en-US"/>
               <a:t>Second level</a:t>
             </a:r>
           </a:p>
           <a:p>
             <a:pPr lvl="2"/>
             <a:r>
-              <a:rPr lang="en-US" smtClean="0"/>
+              <a:rPr lang="en-US"/>
               <a:t>Third level</a:t>
             </a:r>
           </a:p>
           <a:p>
             <a:pPr lvl="3"/>
             <a:r>
-              <a:rPr lang="en-US" smtClean="0"/>
+              <a:rPr lang="en-US"/>
               <a:t>Fourth level</a:t>
             </a:r>
           </a:p>
           <a:p>
             <a:pPr lvl="4"/>
             <a:r>
-              <a:rPr lang="en-US" smtClean="0"/>
+              <a:rPr lang="en-US"/>
               <a:t>Fifth level</a:t>
             </a:r>
             <a:endParaRPr lang="en-US"/>
@@ -2955,6 +2785,9 @@
             <a:off x="4645025" y="1535113"/>
             <a:ext cx="4041775" cy="639762"/>
           </a:xfrm>
+          <a:prstGeom prst="rect">
+            <a:avLst/>
+          </a:prstGeom>
         </p:spPr>
         <p:txBody>
           <a:bodyPr anchor="b"/>
@@ -2997,9 +2830,8 @@
             </a:lvl9pPr>
           </a:lstStyle>
           <a:p>
-            <a:pPr lvl="0"/>
-            <a:r>
-              <a:rPr lang="en-US" smtClean="0"/>
+            <a:r>
+              <a:rPr lang="en-US"/>
               <a:t>Click to edit Master text styles</a:t>
             </a:r>
           </a:p>
@@ -3020,6 +2852,9 @@
             <a:off x="4645025" y="2174875"/>
             <a:ext cx="4041775" cy="3951288"/>
           </a:xfrm>
+          <a:prstGeom prst="rect">
+            <a:avLst/>
+          </a:prstGeom>
         </p:spPr>
         <p:txBody>
           <a:bodyPr/>
@@ -3053,37 +2888,36 @@
             </a:lvl9pPr>
           </a:lstStyle>
           <a:p>
-            <a:pPr lvl="0"/>
-            <a:r>
-              <a:rPr lang="en-US" smtClean="0"/>
+            <a:r>
+              <a:rPr lang="en-US"/>
               <a:t>Click to edit Master text styles</a:t>
             </a:r>
           </a:p>
           <a:p>
             <a:pPr lvl="1"/>
             <a:r>
-              <a:rPr lang="en-US" smtClean="0"/>
+              <a:rPr lang="en-US"/>
               <a:t>Second level</a:t>
             </a:r>
           </a:p>
           <a:p>
             <a:pPr lvl="2"/>
             <a:r>
-              <a:rPr lang="en-US" smtClean="0"/>
+              <a:rPr lang="en-US"/>
               <a:t>Third level</a:t>
             </a:r>
           </a:p>
           <a:p>
             <a:pPr lvl="3"/>
             <a:r>
-              <a:rPr lang="en-US" smtClean="0"/>
+              <a:rPr lang="en-US"/>
               <a:t>Fourth level</a:t>
             </a:r>
           </a:p>
           <a:p>
             <a:pPr lvl="4"/>
             <a:r>
-              <a:rPr lang="en-US" smtClean="0"/>
+              <a:rPr lang="en-US"/>
               <a:t>Fifth level</a:t>
             </a:r>
             <a:endParaRPr lang="en-US"/>
@@ -3105,8 +2939,8 @@
           <a:bodyPr/>
           <a:lstStyle/>
           <a:p>
-            <a:fld id="{5BCAD085-E8A6-8845-BD4E-CB4CCA059FC4}" type="datetimeFigureOut">
-              <a:rPr lang="en-US" smtClean="0"/>
+            <a:fld id="{54EFB636-F4D9-4299-85F9-44D23E27C49C}" type="datetimeFigureOut">
+              <a:rPr lang="en-US"/>
               <a:t>1/27/13</a:t>
             </a:fld>
             <a:endParaRPr lang="en-US"/>
@@ -3147,8 +2981,8 @@
           <a:bodyPr/>
           <a:lstStyle/>
           <a:p>
-            <a:fld id="{C1FF6DA9-008F-8B48-92A6-B652298478BF}" type="slidenum">
-              <a:rPr lang="en-US" smtClean="0"/>
+            <a:fld id="{BF533E07-937E-4FED-8300-891295843456}" type="slidenum">
+              <a:rPr lang="en-US"/>
               <a:t>‹#›</a:t>
             </a:fld>
             <a:endParaRPr lang="en-US"/>
@@ -3156,11 +2990,6 @@
         </p:txBody>
       </p:sp>
     </p:spTree>
-    <p:extLst>
-      <p:ext uri="{BB962C8B-B14F-4D97-AF65-F5344CB8AC3E}">
-        <p14:creationId xmlns:p14="http://schemas.microsoft.com/office/powerpoint/2010/main" val="990158736"/>
-      </p:ext>
-    </p:extLst>
   </p:cSld>
   <p:clrMapOvr>
     <a:masterClrMapping/>
@@ -3201,7 +3030,7 @@
           <a:lstStyle/>
           <a:p>
             <a:r>
-              <a:rPr lang="en-US" smtClean="0"/>
+              <a:rPr lang="en-US"/>
               <a:t>Click to edit Master title style</a:t>
             </a:r>
             <a:endParaRPr lang="en-US"/>
@@ -3223,8 +3052,8 @@
           <a:bodyPr/>
           <a:lstStyle/>
           <a:p>
-            <a:fld id="{5BCAD085-E8A6-8845-BD4E-CB4CCA059FC4}" type="datetimeFigureOut">
-              <a:rPr lang="en-US" smtClean="0"/>
+            <a:fld id="{D5CAC346-E4DF-45C0-848B-E2AC5513E0D5}" type="datetimeFigureOut">
+              <a:rPr lang="en-US"/>
               <a:t>1/27/13</a:t>
             </a:fld>
             <a:endParaRPr lang="en-US"/>
@@ -3265,8 +3094,8 @@
           <a:bodyPr/>
           <a:lstStyle/>
           <a:p>
-            <a:fld id="{C1FF6DA9-008F-8B48-92A6-B652298478BF}" type="slidenum">
-              <a:rPr lang="en-US" smtClean="0"/>
+            <a:fld id="{7A28B55B-FA15-48BA-860D-0231187503D9}" type="slidenum">
+              <a:rPr lang="en-US"/>
               <a:t>‹#›</a:t>
             </a:fld>
             <a:endParaRPr lang="en-US"/>
@@ -3274,11 +3103,6 @@
         </p:txBody>
       </p:sp>
     </p:spTree>
-    <p:extLst>
-      <p:ext uri="{BB962C8B-B14F-4D97-AF65-F5344CB8AC3E}">
-        <p14:creationId xmlns:p14="http://schemas.microsoft.com/office/powerpoint/2010/main" val="727027711"/>
-      </p:ext>
-    </p:extLst>
   </p:cSld>
   <p:clrMapOvr>
     <a:masterClrMapping/>
@@ -3318,8 +3142,8 @@
           <a:bodyPr/>
           <a:lstStyle/>
           <a:p>
-            <a:fld id="{5BCAD085-E8A6-8845-BD4E-CB4CCA059FC4}" type="datetimeFigureOut">
-              <a:rPr lang="en-US" smtClean="0"/>
+            <a:fld id="{FE20B29E-DC2A-4D67-887F-3BE2DC8489D6}" type="datetimeFigureOut">
+              <a:rPr lang="en-US"/>
               <a:t>1/27/13</a:t>
             </a:fld>
             <a:endParaRPr lang="en-US"/>
@@ -3360,8 +3184,8 @@
           <a:bodyPr/>
           <a:lstStyle/>
           <a:p>
-            <a:fld id="{C1FF6DA9-008F-8B48-92A6-B652298478BF}" type="slidenum">
-              <a:rPr lang="en-US" smtClean="0"/>
+            <a:fld id="{00E0EBC0-ADA9-4FA7-889C-9287646BC794}" type="slidenum">
+              <a:rPr lang="en-US"/>
               <a:t>‹#›</a:t>
             </a:fld>
             <a:endParaRPr lang="en-US"/>
@@ -3369,11 +3193,6 @@
         </p:txBody>
       </p:sp>
     </p:spTree>
-    <p:extLst>
-      <p:ext uri="{BB962C8B-B14F-4D97-AF65-F5344CB8AC3E}">
-        <p14:creationId xmlns:p14="http://schemas.microsoft.com/office/powerpoint/2010/main" val="1212999818"/>
-      </p:ext>
-    </p:extLst>
   </p:cSld>
   <p:clrMapOvr>
     <a:masterClrMapping/>
@@ -3413,6 +3232,9 @@
             <a:off x="457200" y="273050"/>
             <a:ext cx="3008313" cy="1162050"/>
           </a:xfrm>
+          <a:prstGeom prst="rect">
+            <a:avLst/>
+          </a:prstGeom>
         </p:spPr>
         <p:txBody>
           <a:bodyPr anchor="b"/>
@@ -3423,7 +3245,7 @@
           </a:lstStyle>
           <a:p>
             <a:r>
-              <a:rPr lang="en-US" smtClean="0"/>
+              <a:rPr lang="en-US"/>
               <a:t>Click to edit Master title style</a:t>
             </a:r>
             <a:endParaRPr lang="en-US"/>
@@ -3445,6 +3267,9 @@
             <a:off x="3575050" y="273050"/>
             <a:ext cx="5111750" cy="5853113"/>
           </a:xfrm>
+          <a:prstGeom prst="rect">
+            <a:avLst/>
+          </a:prstGeom>
         </p:spPr>
         <p:txBody>
           <a:bodyPr/>
@@ -3478,37 +3303,36 @@
             </a:lvl9pPr>
           </a:lstStyle>
           <a:p>
-            <a:pPr lvl="0"/>
-            <a:r>
-              <a:rPr lang="en-US" smtClean="0"/>
+            <a:r>
+              <a:rPr lang="en-US"/>
               <a:t>Click to edit Master text styles</a:t>
             </a:r>
           </a:p>
           <a:p>
             <a:pPr lvl="1"/>
             <a:r>
-              <a:rPr lang="en-US" smtClean="0"/>
+              <a:rPr lang="en-US"/>
               <a:t>Second level</a:t>
             </a:r>
           </a:p>
           <a:p>
             <a:pPr lvl="2"/>
             <a:r>
-              <a:rPr lang="en-US" smtClean="0"/>
+              <a:rPr lang="en-US"/>
               <a:t>Third level</a:t>
             </a:r>
           </a:p>
           <a:p>
             <a:pPr lvl="3"/>
             <a:r>
-              <a:rPr lang="en-US" smtClean="0"/>
+              <a:rPr lang="en-US"/>
               <a:t>Fourth level</a:t>
             </a:r>
           </a:p>
           <a:p>
             <a:pPr lvl="4"/>
             <a:r>
-              <a:rPr lang="en-US" smtClean="0"/>
+              <a:rPr lang="en-US"/>
               <a:t>Fifth level</a:t>
             </a:r>
             <a:endParaRPr lang="en-US"/>
@@ -3530,6 +3354,9 @@
             <a:off x="457200" y="1435100"/>
             <a:ext cx="3008313" cy="4691063"/>
           </a:xfrm>
+          <a:prstGeom prst="rect">
+            <a:avLst/>
+          </a:prstGeom>
         </p:spPr>
         <p:txBody>
           <a:bodyPr/>
@@ -3572,9 +3399,8 @@
             </a:lvl9pPr>
           </a:lstStyle>
           <a:p>
-            <a:pPr lvl="0"/>
-            <a:r>
-              <a:rPr lang="en-US" smtClean="0"/>
+            <a:r>
+              <a:rPr lang="en-US"/>
               <a:t>Click to edit Master text styles</a:t>
             </a:r>
           </a:p>
@@ -3595,8 +3421,8 @@
           <a:bodyPr/>
           <a:lstStyle/>
           <a:p>
-            <a:fld id="{5BCAD085-E8A6-8845-BD4E-CB4CCA059FC4}" type="datetimeFigureOut">
-              <a:rPr lang="en-US" smtClean="0"/>
+            <a:fld id="{AFC563BD-7186-488E-816C-8F41FA24179F}" type="datetimeFigureOut">
+              <a:rPr lang="en-US"/>
               <a:t>1/27/13</a:t>
             </a:fld>
             <a:endParaRPr lang="en-US"/>
@@ -3637,8 +3463,8 @@
           <a:bodyPr/>
           <a:lstStyle/>
           <a:p>
-            <a:fld id="{C1FF6DA9-008F-8B48-92A6-B652298478BF}" type="slidenum">
-              <a:rPr lang="en-US" smtClean="0"/>
+            <a:fld id="{7DA25AB8-FB3A-479C-8780-0B7E5F586C0F}" type="slidenum">
+              <a:rPr lang="en-US"/>
               <a:t>‹#›</a:t>
             </a:fld>
             <a:endParaRPr lang="en-US"/>
@@ -3646,11 +3472,6 @@
         </p:txBody>
       </p:sp>
     </p:spTree>
-    <p:extLst>
-      <p:ext uri="{BB962C8B-B14F-4D97-AF65-F5344CB8AC3E}">
-        <p14:creationId xmlns:p14="http://schemas.microsoft.com/office/powerpoint/2010/main" val="1840726560"/>
-      </p:ext>
-    </p:extLst>
   </p:cSld>
   <p:clrMapOvr>
     <a:masterClrMapping/>
@@ -3690,6 +3511,9 @@
             <a:off x="1792288" y="4800600"/>
             <a:ext cx="5486400" cy="566738"/>
           </a:xfrm>
+          <a:prstGeom prst="rect">
+            <a:avLst/>
+          </a:prstGeom>
         </p:spPr>
         <p:txBody>
           <a:bodyPr anchor="b"/>
@@ -3700,7 +3524,7 @@
           </a:lstStyle>
           <a:p>
             <a:r>
-              <a:rPr lang="en-US" smtClean="0"/>
+              <a:rPr lang="en-US"/>
               <a:t>Click to edit Master title style</a:t>
             </a:r>
             <a:endParaRPr lang="en-US"/>
@@ -3722,6 +3546,9 @@
             <a:off x="1792288" y="612775"/>
             <a:ext cx="5486400" cy="4114800"/>
           </a:xfrm>
+          <a:prstGeom prst="rect">
+            <a:avLst/>
+          </a:prstGeom>
         </p:spPr>
         <p:txBody>
           <a:bodyPr/>
@@ -3783,6 +3610,9 @@
             <a:off x="1792288" y="5367338"/>
             <a:ext cx="5486400" cy="804862"/>
           </a:xfrm>
+          <a:prstGeom prst="rect">
+            <a:avLst/>
+          </a:prstGeom>
         </p:spPr>
         <p:txBody>
           <a:bodyPr/>
@@ -3825,9 +3655,8 @@
             </a:lvl9pPr>
           </a:lstStyle>
           <a:p>
-            <a:pPr lvl="0"/>
-            <a:r>
-              <a:rPr lang="en-US" smtClean="0"/>
+            <a:r>
+              <a:rPr lang="en-US"/>
               <a:t>Click to edit Master text styles</a:t>
             </a:r>
           </a:p>
@@ -3848,8 +3677,8 @@
           <a:bodyPr/>
           <a:lstStyle/>
           <a:p>
-            <a:fld id="{5BCAD085-E8A6-8845-BD4E-CB4CCA059FC4}" type="datetimeFigureOut">
-              <a:rPr lang="en-US" smtClean="0"/>
+            <a:fld id="{1EE02C48-70E8-4C8D-81F4-17FB598144B8}" type="datetimeFigureOut">
+              <a:rPr lang="en-US"/>
               <a:t>1/27/13</a:t>
             </a:fld>
             <a:endParaRPr lang="en-US"/>
@@ -3890,8 +3719,8 @@
           <a:bodyPr/>
           <a:lstStyle/>
           <a:p>
-            <a:fld id="{C1FF6DA9-008F-8B48-92A6-B652298478BF}" type="slidenum">
-              <a:rPr lang="en-US" smtClean="0"/>
+            <a:fld id="{5AEFC29A-6C4F-4141-86E3-1A3E2D58E3A2}" type="slidenum">
+              <a:rPr lang="en-US"/>
               <a:t>‹#›</a:t>
             </a:fld>
             <a:endParaRPr lang="en-US"/>
@@ -3899,11 +3728,6 @@
         </p:txBody>
       </p:sp>
     </p:spTree>
-    <p:extLst>
-      <p:ext uri="{BB962C8B-B14F-4D97-AF65-F5344CB8AC3E}">
-        <p14:creationId xmlns:p14="http://schemas.microsoft.com/office/powerpoint/2010/main" val="3889236939"/>
-      </p:ext>
-    </p:extLst>
   </p:cSld>
   <p:clrMapOvr>
     <a:masterClrMapping/>
@@ -3913,7 +3737,7 @@
 
 <file path=ppt/slideMasters/slideMaster1.xml><?xml version="1.0" encoding="utf-8"?>
 <p:sldMaster xmlns:a="http://schemas.openxmlformats.org/drawingml/2006/main" xmlns:r="http://schemas.openxmlformats.org/officeDocument/2006/relationships" xmlns:p="http://schemas.openxmlformats.org/presentationml/2006/main">
-  <p:cSld>
+  <p:cSld name="Office Theme">
     <p:bg>
       <p:bgRef idx="1001">
         <a:schemeClr val="bg1"/>
@@ -3959,7 +3783,7 @@
           <a:lstStyle/>
           <a:p>
             <a:r>
-              <a:rPr lang="en-US" smtClean="0"/>
+              <a:rPr lang="en-US"/>
               <a:t>Click to edit Master title style</a:t>
             </a:r>
             <a:endParaRPr lang="en-US"/>
@@ -3991,37 +3815,36 @@
           </a:bodyPr>
           <a:lstStyle/>
           <a:p>
-            <a:pPr lvl="0"/>
-            <a:r>
-              <a:rPr lang="en-US" smtClean="0"/>
+            <a:r>
+              <a:rPr lang="en-US"/>
               <a:t>Click to edit Master text styles</a:t>
             </a:r>
           </a:p>
           <a:p>
             <a:pPr lvl="1"/>
             <a:r>
-              <a:rPr lang="en-US" smtClean="0"/>
+              <a:rPr lang="en-US"/>
               <a:t>Second level</a:t>
             </a:r>
           </a:p>
           <a:p>
             <a:pPr lvl="2"/>
             <a:r>
-              <a:rPr lang="en-US" smtClean="0"/>
+              <a:rPr lang="en-US"/>
               <a:t>Third level</a:t>
             </a:r>
           </a:p>
           <a:p>
             <a:pPr lvl="3"/>
             <a:r>
-              <a:rPr lang="en-US" smtClean="0"/>
+              <a:rPr lang="en-US"/>
               <a:t>Fourth level</a:t>
             </a:r>
           </a:p>
           <a:p>
             <a:pPr lvl="4"/>
             <a:r>
-              <a:rPr lang="en-US" smtClean="0"/>
+              <a:rPr lang="en-US"/>
               <a:t>Fifth level</a:t>
             </a:r>
             <a:endParaRPr lang="en-US"/>
@@ -4061,8 +3884,8 @@
             </a:lvl1pPr>
           </a:lstStyle>
           <a:p>
-            <a:fld id="{5BCAD085-E8A6-8845-BD4E-CB4CCA059FC4}" type="datetimeFigureOut">
-              <a:rPr lang="en-US" smtClean="0"/>
+            <a:fld id="{90ADADCF-DC63-475D-8D69-AEBF4EDF3BBC}" type="datetimeFigureOut">
+              <a:rPr lang="en-US"/>
               <a:t>1/27/13</a:t>
             </a:fld>
             <a:endParaRPr lang="en-US"/>
@@ -4139,8 +3962,8 @@
             </a:lvl1pPr>
           </a:lstStyle>
           <a:p>
-            <a:fld id="{C1FF6DA9-008F-8B48-92A6-B652298478BF}" type="slidenum">
-              <a:rPr lang="en-US" smtClean="0"/>
+            <a:fld id="{473D6AB1-0FDA-49F1-8390-8828CE9E6676}" type="slidenum">
+              <a:rPr lang="en-US"/>
               <a:t>‹#›</a:t>
             </a:fld>
             <a:endParaRPr lang="en-US"/>
@@ -4148,11 +3971,6 @@
         </p:txBody>
       </p:sp>
     </p:spTree>
-    <p:extLst>
-      <p:ext uri="{BB962C8B-B14F-4D97-AF65-F5344CB8AC3E}">
-        <p14:creationId xmlns:p14="http://schemas.microsoft.com/office/powerpoint/2010/main" val="2209977519"/>
-      </p:ext>
-    </p:extLst>
   </p:cSld>
   <p:clrMap bg1="lt1" tx1="dk1" bg2="lt2" tx2="dk2" accent1="accent1" accent2="accent2" accent3="accent3" accent4="accent4" accent5="accent5" accent6="accent6" hlink="hlink" folHlink="folHlink"/>
   <p:sldLayoutIdLst>
@@ -4323,9 +4141,6 @@
       </a:lvl9pPr>
     </p:bodyStyle>
     <p:otherStyle>
-      <a:defPPr>
-        <a:defRPr lang="en-US"/>
-      </a:defPPr>
       <a:lvl1pPr marL="0" algn="l" defTabSz="457200" rtl="0" eaLnBrk="1" latinLnBrk="0" hangingPunct="1">
         <a:defRPr sz="1800" kern="1200">
           <a:solidFill>
@@ -4422,7 +4237,7 @@
 </file>
 
 <file path=ppt/slides/slide1.xml><?xml version="1.0" encoding="utf-8"?>
-<p:sld xmlns:a="http://schemas.openxmlformats.org/drawingml/2006/main" xmlns:p="http://schemas.openxmlformats.org/presentationml/2006/main" xmlns:r="http://schemas.openxmlformats.org/officeDocument/2006/relationships">
+<p:sld xmlns:a="http://schemas.openxmlformats.org/drawingml/2006/main" xmlns:r="http://schemas.openxmlformats.org/officeDocument/2006/relationships" xmlns:p="http://schemas.openxmlformats.org/presentationml/2006/main">
   <p:cSld>
     <p:bg>
       <p:bgPr>
@@ -4438,52 +4253,14 @@
         <p:cNvGrpSpPr/>
         <p:nvPr/>
       </p:nvGrpSpPr>
-      <p:grpSpPr/>
-      <p:sp>
-        <p:nvSpPr>
-          <p:cNvPr id="2" name="TextBox 1"/>
-          <p:cNvSpPr txBox="1"/>
-          <p:nvPr/>
-        </p:nvSpPr>
-        <p:spPr>
-          <a:xfrm>
-            <a:off x="777240" y="6382512"/>
-            <a:ext cx="5486400" cy="182880"/>
-          </a:xfrm>
-          <a:prstGeom prst="rect">
-            <a:avLst/>
-          </a:prstGeom>
-          <a:noFill/>
-        </p:spPr>
-        <p:txBody>
-          <a:bodyPr wrap="square" lIns="0" rIns="0" tIns="0" bIns="0" anchor="t">
-            <a:spAutoFit/>
-          </a:bodyPr>
-          <a:lstStyle/>
-          <a:p>
-            <a:pPr algn="l">
-              <a:lnSpc>
-                <a:spcPct val="125000"/>
-              </a:lnSpc>
-              <a:spcBef>
-                <a:spcPts val="0"/>
-              </a:spcBef>
-              <a:spcAft>
-                <a:spcPts val="0"/>
-              </a:spcAft>
-            </a:pPr>
-            <a:r>
-              <a:rPr sz="900" b="0" i="1">
-                <a:solidFill>
-                  <a:srgbClr val="5D6470"/>
-                </a:solidFill>
-                <a:latin typeface="IBM Plex Serif"/>
-              </a:rPr>
-              <a:t>NextFrame · discrete mathematics, semester VII</a:t>
-            </a:r>
-          </a:p>
-        </p:txBody>
-      </p:sp>
+      <p:grpSpPr>
+        <a:xfrm>
+          <a:off x="0" y="0"/>
+          <a:ext cx="0" cy="0"/>
+          <a:chOff x="0" y="0"/>
+          <a:chExt cx="0" cy="0"/>
+        </a:xfrm>
+      </p:grpSpPr>
       <p:sp>
         <p:nvSpPr>
           <p:cNvPr id="3" name="TextBox 2"/>
@@ -4501,7 +4278,7 @@
           <a:noFill/>
         </p:spPr>
         <p:txBody>
-          <a:bodyPr wrap="square" lIns="0" rIns="0" tIns="0" bIns="0" anchor="t">
+          <a:bodyPr wrap="square" lIns="0" tIns="0" rIns="0" bIns="0" anchor="t">
             <a:spAutoFit/>
           </a:bodyPr>
           <a:lstStyle/>
@@ -4748,7 +4525,7 @@
           <a:noFill/>
         </p:spPr>
         <p:txBody>
-          <a:bodyPr wrap="square" lIns="0" rIns="0" tIns="0" bIns="0" anchor="t">
+          <a:bodyPr wrap="square" lIns="0" tIns="0" rIns="0" bIns="0" anchor="t">
             <a:spAutoFit/>
           </a:bodyPr>
           <a:lstStyle/>
@@ -4793,7 +4570,7 @@
           <a:noFill/>
         </p:spPr>
         <p:txBody>
-          <a:bodyPr wrap="square" lIns="0" rIns="0" tIns="0" bIns="0" anchor="t">
+          <a:bodyPr wrap="square" lIns="0" tIns="0" rIns="0" bIns="0" anchor="t">
             <a:spAutoFit/>
           </a:bodyPr>
           <a:lstStyle/>
@@ -4838,7 +4615,7 @@
           <a:noFill/>
         </p:spPr>
         <p:txBody>
-          <a:bodyPr wrap="square" lIns="0" rIns="0" tIns="0" bIns="0" anchor="t">
+          <a:bodyPr wrap="square" lIns="0" tIns="0" rIns="0" bIns="0" anchor="t">
             <a:spAutoFit/>
           </a:bodyPr>
           <a:lstStyle/>
@@ -4918,7 +4695,7 @@
           <a:noFill/>
         </p:spPr>
         <p:txBody>
-          <a:bodyPr wrap="square" lIns="0" rIns="0" tIns="0" bIns="0" anchor="t">
+          <a:bodyPr wrap="square" lIns="0" tIns="0" rIns="0" bIns="0" anchor="t">
             <a:spAutoFit/>
           </a:bodyPr>
           <a:lstStyle/>
@@ -4963,7 +4740,7 @@
           <a:noFill/>
         </p:spPr>
         <p:txBody>
-          <a:bodyPr wrap="square" lIns="0" rIns="0" tIns="0" bIns="0" anchor="t">
+          <a:bodyPr wrap="square" lIns="0" tIns="0" rIns="0" bIns="0" anchor="t">
             <a:spAutoFit/>
           </a:bodyPr>
           <a:lstStyle/>
@@ -5022,7 +4799,7 @@
 </file>
 
 <file path=ppt/slides/slide10.xml><?xml version="1.0" encoding="utf-8"?>
-<p:sld xmlns:a="http://schemas.openxmlformats.org/drawingml/2006/main" xmlns:p="http://schemas.openxmlformats.org/presentationml/2006/main" xmlns:r="http://schemas.openxmlformats.org/officeDocument/2006/relationships">
+<p:sld xmlns:a="http://schemas.openxmlformats.org/drawingml/2006/main" xmlns:r="http://schemas.openxmlformats.org/officeDocument/2006/relationships" xmlns:p="http://schemas.openxmlformats.org/presentationml/2006/main">
   <p:cSld>
     <p:bg>
       <p:bgPr>
@@ -5038,7 +4815,14 @@
         <p:cNvGrpSpPr/>
         <p:nvPr/>
       </p:nvGrpSpPr>
-      <p:grpSpPr/>
+      <p:grpSpPr>
+        <a:xfrm>
+          <a:off x="0" y="0"/>
+          <a:ext cx="0" cy="0"/>
+          <a:chOff x="0" y="0"/>
+          <a:chExt cx="0" cy="0"/>
+        </a:xfrm>
+      </p:grpSpPr>
       <p:sp>
         <p:nvSpPr>
           <p:cNvPr id="2" name="TextBox 1"/>
@@ -5056,7 +4840,7 @@
           <a:noFill/>
         </p:spPr>
         <p:txBody>
-          <a:bodyPr wrap="square" lIns="0" rIns="0" tIns="0" bIns="0" anchor="t">
+          <a:bodyPr wrap="square" lIns="0" tIns="0" rIns="0" bIns="0" anchor="t">
             <a:spAutoFit/>
           </a:bodyPr>
           <a:lstStyle/>
@@ -5101,7 +4885,7 @@
           <a:noFill/>
         </p:spPr>
         <p:txBody>
-          <a:bodyPr wrap="square" lIns="0" rIns="0" tIns="0" bIns="0" anchor="t">
+          <a:bodyPr wrap="square" lIns="0" tIns="0" rIns="0" bIns="0" anchor="t">
             <a:spAutoFit/>
           </a:bodyPr>
           <a:lstStyle/>
@@ -5166,51 +4950,6 @@
       </p:cxnSp>
       <p:sp>
         <p:nvSpPr>
-          <p:cNvPr id="5" name="TextBox 4"/>
-          <p:cNvSpPr txBox="1"/>
-          <p:nvPr/>
-        </p:nvSpPr>
-        <p:spPr>
-          <a:xfrm>
-            <a:off x="777240" y="6382512"/>
-            <a:ext cx="5486400" cy="182880"/>
-          </a:xfrm>
-          <a:prstGeom prst="rect">
-            <a:avLst/>
-          </a:prstGeom>
-          <a:noFill/>
-        </p:spPr>
-        <p:txBody>
-          <a:bodyPr wrap="square" lIns="0" rIns="0" tIns="0" bIns="0" anchor="t">
-            <a:spAutoFit/>
-          </a:bodyPr>
-          <a:lstStyle/>
-          <a:p>
-            <a:pPr algn="l">
-              <a:lnSpc>
-                <a:spcPct val="125000"/>
-              </a:lnSpc>
-              <a:spcBef>
-                <a:spcPts val="0"/>
-              </a:spcBef>
-              <a:spcAft>
-                <a:spcPts val="0"/>
-              </a:spcAft>
-            </a:pPr>
-            <a:r>
-              <a:rPr sz="900" b="0" i="1">
-                <a:solidFill>
-                  <a:srgbClr val="5D6470"/>
-                </a:solidFill>
-                <a:latin typeface="IBM Plex Serif"/>
-              </a:rPr>
-              <a:t>NextFrame · discrete mathematics, semester VII</a:t>
-            </a:r>
-          </a:p>
-        </p:txBody>
-      </p:sp>
-      <p:sp>
-        <p:nvSpPr>
           <p:cNvPr id="6" name="TextBox 5"/>
           <p:cNvSpPr txBox="1"/>
           <p:nvPr/>
@@ -5226,7 +4965,7 @@
           <a:noFill/>
         </p:spPr>
         <p:txBody>
-          <a:bodyPr wrap="square" lIns="0" rIns="0" tIns="0" bIns="0" anchor="t">
+          <a:bodyPr wrap="square" lIns="0" tIns="0" rIns="0" bIns="0" anchor="t">
             <a:spAutoFit/>
           </a:bodyPr>
           <a:lstStyle/>
@@ -5271,7 +5010,7 @@
           <a:noFill/>
         </p:spPr>
         <p:txBody>
-          <a:bodyPr wrap="square" lIns="0" rIns="0" tIns="0" bIns="0" anchor="t">
+          <a:bodyPr wrap="square" lIns="0" tIns="0" rIns="0" bIns="0" anchor="t">
             <a:spAutoFit/>
           </a:bodyPr>
           <a:lstStyle/>
@@ -5316,7 +5055,7 @@
           <a:noFill/>
         </p:spPr>
         <p:txBody>
-          <a:bodyPr wrap="square" lIns="0" rIns="0" tIns="0" bIns="0" anchor="t">
+          <a:bodyPr wrap="square" lIns="0" tIns="0" rIns="0" bIns="0" anchor="t">
             <a:spAutoFit/>
           </a:bodyPr>
           <a:lstStyle/>
@@ -5801,7 +5540,7 @@
           <a:noFill/>
         </p:spPr>
         <p:txBody>
-          <a:bodyPr wrap="square" lIns="0" rIns="0" tIns="0" bIns="0" anchor="t">
+          <a:bodyPr wrap="square" lIns="0" tIns="0" rIns="0" bIns="0" anchor="t">
             <a:spAutoFit/>
           </a:bodyPr>
           <a:lstStyle/>
@@ -5846,7 +5585,7 @@
           <a:noFill/>
         </p:spPr>
         <p:txBody>
-          <a:bodyPr wrap="square" lIns="0" rIns="0" tIns="0" bIns="0" anchor="t">
+          <a:bodyPr wrap="square" lIns="0" tIns="0" rIns="0" bIns="0" anchor="t">
             <a:spAutoFit/>
           </a:bodyPr>
           <a:lstStyle/>
@@ -6331,7 +6070,7 @@
           <a:noFill/>
         </p:spPr>
         <p:txBody>
-          <a:bodyPr wrap="square" lIns="0" rIns="0" tIns="0" bIns="0" anchor="t">
+          <a:bodyPr wrap="square" lIns="0" tIns="0" rIns="0" bIns="0" anchor="t">
             <a:spAutoFit/>
           </a:bodyPr>
           <a:lstStyle/>
@@ -6376,7 +6115,7 @@
           <a:noFill/>
         </p:spPr>
         <p:txBody>
-          <a:bodyPr wrap="square" lIns="0" rIns="0" tIns="0" bIns="0" anchor="t">
+          <a:bodyPr wrap="square" lIns="0" tIns="0" rIns="0" bIns="0" anchor="t">
             <a:spAutoFit/>
           </a:bodyPr>
           <a:lstStyle/>
@@ -6861,7 +6600,7 @@
           <a:noFill/>
         </p:spPr>
         <p:txBody>
-          <a:bodyPr wrap="square" lIns="0" rIns="0" tIns="0" bIns="0" anchor="t">
+          <a:bodyPr wrap="square" lIns="0" tIns="0" rIns="0" bIns="0" anchor="t">
             <a:spAutoFit/>
           </a:bodyPr>
           <a:lstStyle/>
@@ -6906,7 +6645,7 @@
           <a:noFill/>
         </p:spPr>
         <p:txBody>
-          <a:bodyPr wrap="square" lIns="0" rIns="0" tIns="0" bIns="0" anchor="t">
+          <a:bodyPr wrap="square" lIns="0" tIns="0" rIns="0" bIns="0" anchor="t">
             <a:spAutoFit/>
           </a:bodyPr>
           <a:lstStyle/>
@@ -7391,7 +7130,7 @@
           <a:noFill/>
         </p:spPr>
         <p:txBody>
-          <a:bodyPr wrap="square" lIns="0" rIns="0" tIns="0" bIns="0" anchor="t">
+          <a:bodyPr wrap="square" lIns="0" tIns="0" rIns="0" bIns="0" anchor="t">
             <a:spAutoFit/>
           </a:bodyPr>
           <a:lstStyle/>
@@ -7436,7 +7175,7 @@
           <a:noFill/>
         </p:spPr>
         <p:txBody>
-          <a:bodyPr wrap="square" lIns="0" rIns="0" tIns="0" bIns="0" anchor="t">
+          <a:bodyPr wrap="square" lIns="0" tIns="0" rIns="0" bIns="0" anchor="t">
             <a:spAutoFit/>
           </a:bodyPr>
           <a:lstStyle/>
@@ -7921,7 +7660,7 @@
           <a:noFill/>
         </p:spPr>
         <p:txBody>
-          <a:bodyPr wrap="square" lIns="0" rIns="0" tIns="0" bIns="0" anchor="t">
+          <a:bodyPr wrap="square" lIns="0" tIns="0" rIns="0" bIns="0" anchor="t">
             <a:spAutoFit/>
           </a:bodyPr>
           <a:lstStyle/>
@@ -7966,7 +7705,7 @@
           <a:noFill/>
         </p:spPr>
         <p:txBody>
-          <a:bodyPr wrap="square" lIns="0" rIns="0" tIns="0" bIns="0" anchor="t">
+          <a:bodyPr wrap="square" lIns="0" tIns="0" rIns="0" bIns="0" anchor="t">
             <a:spAutoFit/>
           </a:bodyPr>
           <a:lstStyle/>
@@ -8451,7 +8190,7 @@
           <a:noFill/>
         </p:spPr>
         <p:txBody>
-          <a:bodyPr wrap="square" lIns="0" rIns="0" tIns="0" bIns="0" anchor="t">
+          <a:bodyPr wrap="square" lIns="0" tIns="0" rIns="0" bIns="0" anchor="t">
             <a:spAutoFit/>
           </a:bodyPr>
           <a:lstStyle/>
@@ -8496,7 +8235,7 @@
           <a:noFill/>
         </p:spPr>
         <p:txBody>
-          <a:bodyPr wrap="square" lIns="0" rIns="0" tIns="0" bIns="0" anchor="t">
+          <a:bodyPr wrap="square" lIns="0" tIns="0" rIns="0" bIns="0" anchor="t">
             <a:spAutoFit/>
           </a:bodyPr>
           <a:lstStyle/>
@@ -8981,7 +8720,7 @@
           <a:noFill/>
         </p:spPr>
         <p:txBody>
-          <a:bodyPr wrap="square" lIns="0" rIns="0" tIns="0" bIns="0" anchor="t">
+          <a:bodyPr wrap="square" lIns="0" tIns="0" rIns="0" bIns="0" anchor="t">
             <a:spAutoFit/>
           </a:bodyPr>
           <a:lstStyle/>
@@ -9026,7 +8765,7 @@
           <a:noFill/>
         </p:spPr>
         <p:txBody>
-          <a:bodyPr wrap="square" lIns="0" rIns="0" tIns="0" bIns="0" anchor="t">
+          <a:bodyPr wrap="square" lIns="0" tIns="0" rIns="0" bIns="0" anchor="t">
             <a:spAutoFit/>
           </a:bodyPr>
           <a:lstStyle/>
@@ -9511,7 +9250,7 @@
           <a:noFill/>
         </p:spPr>
         <p:txBody>
-          <a:bodyPr wrap="square" lIns="0" rIns="0" tIns="0" bIns="0" anchor="t">
+          <a:bodyPr wrap="square" lIns="0" tIns="0" rIns="0" bIns="0" anchor="t">
             <a:spAutoFit/>
           </a:bodyPr>
           <a:lstStyle/>
@@ -9556,7 +9295,7 @@
           <a:noFill/>
         </p:spPr>
         <p:txBody>
-          <a:bodyPr wrap="square" lIns="0" rIns="0" tIns="0" bIns="0" anchor="t">
+          <a:bodyPr wrap="square" lIns="0" tIns="0" rIns="0" bIns="0" anchor="t">
             <a:spAutoFit/>
           </a:bodyPr>
           <a:lstStyle/>
@@ -10041,7 +9780,7 @@
           <a:noFill/>
         </p:spPr>
         <p:txBody>
-          <a:bodyPr wrap="square" lIns="0" rIns="0" tIns="0" bIns="0" anchor="t">
+          <a:bodyPr wrap="square" lIns="0" tIns="0" rIns="0" bIns="0" anchor="t">
             <a:spAutoFit/>
           </a:bodyPr>
           <a:lstStyle/>
@@ -10086,7 +9825,7 @@
           <a:noFill/>
         </p:spPr>
         <p:txBody>
-          <a:bodyPr wrap="square" lIns="0" rIns="0" tIns="0" bIns="0" anchor="t">
+          <a:bodyPr wrap="square" lIns="0" tIns="0" rIns="0" bIns="0" anchor="t">
             <a:spAutoFit/>
           </a:bodyPr>
           <a:lstStyle/>
@@ -10571,7 +10310,7 @@
           <a:noFill/>
         </p:spPr>
         <p:txBody>
-          <a:bodyPr wrap="square" lIns="0" rIns="0" tIns="0" bIns="0" anchor="t">
+          <a:bodyPr wrap="square" lIns="0" tIns="0" rIns="0" bIns="0" anchor="t">
             <a:spAutoFit/>
           </a:bodyPr>
           <a:lstStyle/>
@@ -10616,7 +10355,7 @@
           <a:noFill/>
         </p:spPr>
         <p:txBody>
-          <a:bodyPr wrap="square" lIns="0" rIns="0" tIns="0" bIns="0" anchor="t">
+          <a:bodyPr wrap="square" lIns="0" tIns="0" rIns="0" bIns="0" anchor="t">
             <a:spAutoFit/>
           </a:bodyPr>
           <a:lstStyle/>
@@ -10661,7 +10400,7 @@
           <a:noFill/>
         </p:spPr>
         <p:txBody>
-          <a:bodyPr wrap="square" lIns="0" rIns="0" tIns="0" bIns="0" anchor="t">
+          <a:bodyPr wrap="square" lIns="0" tIns="0" rIns="0" bIns="0" anchor="t">
             <a:spAutoFit/>
           </a:bodyPr>
           <a:lstStyle/>
@@ -10706,7 +10445,7 @@
           <a:noFill/>
         </p:spPr>
         <p:txBody>
-          <a:bodyPr wrap="square" lIns="0" rIns="0" tIns="0" bIns="0" anchor="t">
+          <a:bodyPr wrap="square" lIns="0" tIns="0" rIns="0" bIns="0" anchor="t">
             <a:spAutoFit/>
           </a:bodyPr>
           <a:lstStyle/>
@@ -10751,7 +10490,7 @@
           <a:noFill/>
         </p:spPr>
         <p:txBody>
-          <a:bodyPr wrap="square" lIns="0" rIns="0" tIns="0" bIns="0" anchor="t">
+          <a:bodyPr wrap="square" lIns="0" tIns="0" rIns="0" bIns="0" anchor="t">
             <a:spAutoFit/>
           </a:bodyPr>
           <a:lstStyle/>
@@ -10796,7 +10535,7 @@
           <a:noFill/>
         </p:spPr>
         <p:txBody>
-          <a:bodyPr wrap="square" lIns="0" rIns="0" tIns="0" bIns="0" anchor="t">
+          <a:bodyPr wrap="square" lIns="0" tIns="0" rIns="0" bIns="0" anchor="t">
             <a:spAutoFit/>
           </a:bodyPr>
           <a:lstStyle/>
@@ -10841,7 +10580,7 @@
           <a:noFill/>
         </p:spPr>
         <p:txBody>
-          <a:bodyPr wrap="square" lIns="0" rIns="0" tIns="0" bIns="0" anchor="t">
+          <a:bodyPr wrap="square" lIns="0" tIns="0" rIns="0" bIns="0" anchor="t">
             <a:spAutoFit/>
           </a:bodyPr>
           <a:lstStyle/>
@@ -10886,7 +10625,7 @@
           <a:noFill/>
         </p:spPr>
         <p:txBody>
-          <a:bodyPr wrap="square" lIns="0" rIns="0" tIns="0" bIns="0" anchor="t">
+          <a:bodyPr wrap="square" lIns="0" tIns="0" rIns="0" bIns="0" anchor="t">
             <a:spAutoFit/>
           </a:bodyPr>
           <a:lstStyle/>
@@ -10931,7 +10670,7 @@
           <a:noFill/>
         </p:spPr>
         <p:txBody>
-          <a:bodyPr wrap="square" lIns="0" rIns="0" tIns="0" bIns="0" anchor="t">
+          <a:bodyPr wrap="square" lIns="0" tIns="0" rIns="0" bIns="0" anchor="t">
             <a:spAutoFit/>
           </a:bodyPr>
           <a:lstStyle/>
@@ -10976,7 +10715,7 @@
           <a:noFill/>
         </p:spPr>
         <p:txBody>
-          <a:bodyPr wrap="square" lIns="0" rIns="0" tIns="0" bIns="0" anchor="t">
+          <a:bodyPr wrap="square" lIns="0" tIns="0" rIns="0" bIns="0" anchor="t">
             <a:spAutoFit/>
           </a:bodyPr>
           <a:lstStyle/>
@@ -11021,7 +10760,7 @@
           <a:noFill/>
         </p:spPr>
         <p:txBody>
-          <a:bodyPr wrap="square" lIns="0" rIns="0" tIns="0" bIns="0" anchor="t">
+          <a:bodyPr wrap="square" lIns="0" tIns="0" rIns="0" bIns="0" anchor="t">
             <a:spAutoFit/>
           </a:bodyPr>
           <a:lstStyle/>
@@ -11066,7 +10805,7 @@
           <a:noFill/>
         </p:spPr>
         <p:txBody>
-          <a:bodyPr wrap="square" lIns="0" rIns="0" tIns="0" bIns="0" anchor="t">
+          <a:bodyPr wrap="square" lIns="0" tIns="0" rIns="0" bIns="0" anchor="t">
             <a:spAutoFit/>
           </a:bodyPr>
           <a:lstStyle/>
@@ -11111,7 +10850,7 @@
           <a:noFill/>
         </p:spPr>
         <p:txBody>
-          <a:bodyPr wrap="square" lIns="0" rIns="0" tIns="0" bIns="0" anchor="t">
+          <a:bodyPr wrap="square" lIns="0" tIns="0" rIns="0" bIns="0" anchor="t">
             <a:spAutoFit/>
           </a:bodyPr>
           <a:lstStyle/>
@@ -11156,7 +10895,7 @@
           <a:noFill/>
         </p:spPr>
         <p:txBody>
-          <a:bodyPr wrap="square" lIns="0" rIns="0" tIns="0" bIns="0" anchor="t">
+          <a:bodyPr wrap="square" lIns="0" tIns="0" rIns="0" bIns="0" anchor="t">
             <a:spAutoFit/>
           </a:bodyPr>
           <a:lstStyle/>
@@ -11201,7 +10940,7 @@
           <a:noFill/>
         </p:spPr>
         <p:txBody>
-          <a:bodyPr wrap="square" lIns="0" rIns="0" tIns="0" bIns="0" anchor="t">
+          <a:bodyPr wrap="square" lIns="0" tIns="0" rIns="0" bIns="0" anchor="t">
             <a:spAutoFit/>
           </a:bodyPr>
           <a:lstStyle/>
@@ -11246,7 +10985,7 @@
           <a:noFill/>
         </p:spPr>
         <p:txBody>
-          <a:bodyPr wrap="square" lIns="0" rIns="0" tIns="0" bIns="0" anchor="t">
+          <a:bodyPr wrap="square" lIns="0" tIns="0" rIns="0" bIns="0" anchor="t">
             <a:spAutoFit/>
           </a:bodyPr>
           <a:lstStyle/>
@@ -11291,7 +11030,7 @@
           <a:noFill/>
         </p:spPr>
         <p:txBody>
-          <a:bodyPr wrap="square" lIns="0" rIns="0" tIns="0" bIns="0" anchor="t">
+          <a:bodyPr wrap="square" lIns="0" tIns="0" rIns="0" bIns="0" anchor="t">
             <a:spAutoFit/>
           </a:bodyPr>
           <a:lstStyle/>
@@ -11336,7 +11075,7 @@
           <a:noFill/>
         </p:spPr>
         <p:txBody>
-          <a:bodyPr wrap="square" lIns="0" rIns="0" tIns="0" bIns="0" anchor="t">
+          <a:bodyPr wrap="square" lIns="0" tIns="0" rIns="0" bIns="0" anchor="t">
             <a:spAutoFit/>
           </a:bodyPr>
           <a:lstStyle/>
@@ -11381,7 +11120,7 @@
           <a:noFill/>
         </p:spPr>
         <p:txBody>
-          <a:bodyPr wrap="square" lIns="0" rIns="0" tIns="0" bIns="0" anchor="t">
+          <a:bodyPr wrap="square" lIns="0" tIns="0" rIns="0" bIns="0" anchor="t">
             <a:spAutoFit/>
           </a:bodyPr>
           <a:lstStyle/>
@@ -11426,7 +11165,7 @@
           <a:noFill/>
         </p:spPr>
         <p:txBody>
-          <a:bodyPr wrap="square" lIns="0" rIns="0" tIns="0" bIns="0" anchor="t">
+          <a:bodyPr wrap="square" lIns="0" tIns="0" rIns="0" bIns="0" anchor="t">
             <a:spAutoFit/>
           </a:bodyPr>
           <a:lstStyle/>
@@ -11471,7 +11210,7 @@
           <a:noFill/>
         </p:spPr>
         <p:txBody>
-          <a:bodyPr wrap="square" lIns="0" rIns="0" tIns="0" bIns="0" anchor="t">
+          <a:bodyPr wrap="square" lIns="0" tIns="0" rIns="0" bIns="0" anchor="t">
             <a:spAutoFit/>
           </a:bodyPr>
           <a:lstStyle/>
@@ -11516,7 +11255,7 @@
           <a:noFill/>
         </p:spPr>
         <p:txBody>
-          <a:bodyPr wrap="square" lIns="0" rIns="0" tIns="0" bIns="0" anchor="t">
+          <a:bodyPr wrap="square" lIns="0" tIns="0" rIns="0" bIns="0" anchor="t">
             <a:spAutoFit/>
           </a:bodyPr>
           <a:lstStyle/>
@@ -11561,7 +11300,7 @@
           <a:noFill/>
         </p:spPr>
         <p:txBody>
-          <a:bodyPr wrap="square" lIns="0" rIns="0" tIns="0" bIns="0" anchor="t">
+          <a:bodyPr wrap="square" lIns="0" tIns="0" rIns="0" bIns="0" anchor="t">
             <a:spAutoFit/>
           </a:bodyPr>
           <a:lstStyle/>
@@ -11606,7 +11345,7 @@
           <a:noFill/>
         </p:spPr>
         <p:txBody>
-          <a:bodyPr wrap="square" lIns="0" rIns="0" tIns="0" bIns="0" anchor="t">
+          <a:bodyPr wrap="square" lIns="0" tIns="0" rIns="0" bIns="0" anchor="t">
             <a:spAutoFit/>
           </a:bodyPr>
           <a:lstStyle/>
@@ -11651,7 +11390,7 @@
           <a:noFill/>
         </p:spPr>
         <p:txBody>
-          <a:bodyPr wrap="square" lIns="0" rIns="0" tIns="0" bIns="0" anchor="t">
+          <a:bodyPr wrap="square" lIns="0" tIns="0" rIns="0" bIns="0" anchor="t">
             <a:spAutoFit/>
           </a:bodyPr>
           <a:lstStyle/>
@@ -11731,7 +11470,7 @@
           <a:noFill/>
         </p:spPr>
         <p:txBody>
-          <a:bodyPr wrap="square" lIns="0" rIns="0" tIns="0" bIns="0" anchor="t">
+          <a:bodyPr wrap="square" lIns="0" tIns="0" rIns="0" bIns="0" anchor="t">
             <a:spAutoFit/>
           </a:bodyPr>
           <a:lstStyle/>
@@ -11776,7 +11515,7 @@
           <a:noFill/>
         </p:spPr>
         <p:txBody>
-          <a:bodyPr wrap="square" lIns="0" rIns="0" tIns="0" bIns="0" anchor="t">
+          <a:bodyPr wrap="square" lIns="0" tIns="0" rIns="0" bIns="0" anchor="t">
             <a:spAutoFit/>
           </a:bodyPr>
           <a:lstStyle/>
@@ -11856,7 +11595,7 @@
           <a:noFill/>
         </p:spPr>
         <p:txBody>
-          <a:bodyPr wrap="square" lIns="0" rIns="0" tIns="0" bIns="0" anchor="t">
+          <a:bodyPr wrap="square" lIns="0" tIns="0" rIns="0" bIns="0" anchor="t">
             <a:spAutoFit/>
           </a:bodyPr>
           <a:lstStyle/>
@@ -11901,7 +11640,7 @@
           <a:noFill/>
         </p:spPr>
         <p:txBody>
-          <a:bodyPr wrap="square" lIns="0" rIns="0" tIns="0" bIns="0" anchor="t">
+          <a:bodyPr wrap="square" lIns="0" tIns="0" rIns="0" bIns="0" anchor="t">
             <a:spAutoFit/>
           </a:bodyPr>
           <a:lstStyle/>
@@ -11981,7 +11720,7 @@
           <a:noFill/>
         </p:spPr>
         <p:txBody>
-          <a:bodyPr wrap="square" lIns="0" rIns="0" tIns="0" bIns="0" anchor="t">
+          <a:bodyPr wrap="square" lIns="0" tIns="0" rIns="0" bIns="0" anchor="t">
             <a:spAutoFit/>
           </a:bodyPr>
           <a:lstStyle/>
@@ -12026,7 +11765,7 @@
           <a:noFill/>
         </p:spPr>
         <p:txBody>
-          <a:bodyPr wrap="square" lIns="0" rIns="0" tIns="0" bIns="0" anchor="t">
+          <a:bodyPr wrap="square" lIns="0" tIns="0" rIns="0" bIns="0" anchor="t">
             <a:spAutoFit/>
           </a:bodyPr>
           <a:lstStyle/>
@@ -12106,7 +11845,7 @@
           <a:noFill/>
         </p:spPr>
         <p:txBody>
-          <a:bodyPr wrap="square" lIns="0" rIns="0" tIns="0" bIns="0" anchor="t">
+          <a:bodyPr wrap="square" lIns="0" tIns="0" rIns="0" bIns="0" anchor="t">
             <a:spAutoFit/>
           </a:bodyPr>
           <a:lstStyle/>
@@ -12151,7 +11890,7 @@
           <a:noFill/>
         </p:spPr>
         <p:txBody>
-          <a:bodyPr wrap="square" lIns="0" rIns="0" tIns="0" bIns="0" anchor="t">
+          <a:bodyPr wrap="square" lIns="0" tIns="0" rIns="0" bIns="0" anchor="t">
             <a:spAutoFit/>
           </a:bodyPr>
           <a:lstStyle/>
@@ -12196,7 +11935,7 @@
           <a:noFill/>
         </p:spPr>
         <p:txBody>
-          <a:bodyPr wrap="square" lIns="0" rIns="0" tIns="0" bIns="0" anchor="t">
+          <a:bodyPr wrap="square" lIns="0" tIns="0" rIns="0" bIns="0" anchor="t">
             <a:spAutoFit/>
           </a:bodyPr>
           <a:lstStyle/>
@@ -12241,7 +11980,7 @@
           <a:noFill/>
         </p:spPr>
         <p:txBody>
-          <a:bodyPr wrap="square" lIns="0" rIns="0" tIns="0" bIns="0" anchor="t">
+          <a:bodyPr wrap="square" lIns="0" tIns="0" rIns="0" bIns="0" anchor="t">
             <a:spAutoFit/>
           </a:bodyPr>
           <a:lstStyle/>
@@ -12278,7 +12017,7 @@
 </file>
 
 <file path=ppt/slides/slide11.xml><?xml version="1.0" encoding="utf-8"?>
-<p:sld xmlns:a="http://schemas.openxmlformats.org/drawingml/2006/main" xmlns:p="http://schemas.openxmlformats.org/presentationml/2006/main" xmlns:r="http://schemas.openxmlformats.org/officeDocument/2006/relationships">
+<p:sld xmlns:a="http://schemas.openxmlformats.org/drawingml/2006/main" xmlns:r="http://schemas.openxmlformats.org/officeDocument/2006/relationships" xmlns:p="http://schemas.openxmlformats.org/presentationml/2006/main">
   <p:cSld>
     <p:bg>
       <p:bgPr>
@@ -12294,7 +12033,14 @@
         <p:cNvGrpSpPr/>
         <p:nvPr/>
       </p:nvGrpSpPr>
-      <p:grpSpPr/>
+      <p:grpSpPr>
+        <a:xfrm>
+          <a:off x="0" y="0"/>
+          <a:ext cx="0" cy="0"/>
+          <a:chOff x="0" y="0"/>
+          <a:chExt cx="0" cy="0"/>
+        </a:xfrm>
+      </p:grpSpPr>
       <p:sp>
         <p:nvSpPr>
           <p:cNvPr id="2" name="TextBox 1"/>
@@ -12312,7 +12058,7 @@
           <a:noFill/>
         </p:spPr>
         <p:txBody>
-          <a:bodyPr wrap="square" lIns="0" rIns="0" tIns="0" bIns="0" anchor="t">
+          <a:bodyPr wrap="square" lIns="0" tIns="0" rIns="0" bIns="0" anchor="t">
             <a:spAutoFit/>
           </a:bodyPr>
           <a:lstStyle/>
@@ -12357,7 +12103,7 @@
           <a:noFill/>
         </p:spPr>
         <p:txBody>
-          <a:bodyPr wrap="square" lIns="0" rIns="0" tIns="0" bIns="0" anchor="t">
+          <a:bodyPr wrap="square" lIns="0" tIns="0" rIns="0" bIns="0" anchor="t">
             <a:spAutoFit/>
           </a:bodyPr>
           <a:lstStyle/>
@@ -12422,51 +12168,6 @@
       </p:cxnSp>
       <p:sp>
         <p:nvSpPr>
-          <p:cNvPr id="5" name="TextBox 4"/>
-          <p:cNvSpPr txBox="1"/>
-          <p:nvPr/>
-        </p:nvSpPr>
-        <p:spPr>
-          <a:xfrm>
-            <a:off x="777240" y="6382512"/>
-            <a:ext cx="5486400" cy="182880"/>
-          </a:xfrm>
-          <a:prstGeom prst="rect">
-            <a:avLst/>
-          </a:prstGeom>
-          <a:noFill/>
-        </p:spPr>
-        <p:txBody>
-          <a:bodyPr wrap="square" lIns="0" rIns="0" tIns="0" bIns="0" anchor="t">
-            <a:spAutoFit/>
-          </a:bodyPr>
-          <a:lstStyle/>
-          <a:p>
-            <a:pPr algn="l">
-              <a:lnSpc>
-                <a:spcPct val="125000"/>
-              </a:lnSpc>
-              <a:spcBef>
-                <a:spcPts val="0"/>
-              </a:spcBef>
-              <a:spcAft>
-                <a:spcPts val="0"/>
-              </a:spcAft>
-            </a:pPr>
-            <a:r>
-              <a:rPr sz="900" b="0" i="1">
-                <a:solidFill>
-                  <a:srgbClr val="5D6470"/>
-                </a:solidFill>
-                <a:latin typeface="IBM Plex Serif"/>
-              </a:rPr>
-              <a:t>NextFrame · discrete mathematics, semester VII</a:t>
-            </a:r>
-          </a:p>
-        </p:txBody>
-      </p:sp>
-      <p:sp>
-        <p:nvSpPr>
           <p:cNvPr id="6" name="TextBox 5"/>
           <p:cNvSpPr txBox="1"/>
           <p:nvPr/>
@@ -12482,7 +12183,7 @@
           <a:noFill/>
         </p:spPr>
         <p:txBody>
-          <a:bodyPr wrap="square" lIns="0" rIns="0" tIns="0" bIns="0" anchor="t">
+          <a:bodyPr wrap="square" lIns="0" tIns="0" rIns="0" bIns="0" anchor="t">
             <a:spAutoFit/>
           </a:bodyPr>
           <a:lstStyle/>
@@ -12527,7 +12228,7 @@
           <a:noFill/>
         </p:spPr>
         <p:txBody>
-          <a:bodyPr wrap="square" lIns="0" rIns="0" tIns="0" bIns="0" anchor="t">
+          <a:bodyPr wrap="square" lIns="0" tIns="0" rIns="0" bIns="0" anchor="t">
             <a:spAutoFit/>
           </a:bodyPr>
           <a:lstStyle/>
@@ -12572,7 +12273,7 @@
           <a:noFill/>
         </p:spPr>
         <p:txBody>
-          <a:bodyPr wrap="square" lIns="0" rIns="0" tIns="0" bIns="0" anchor="t">
+          <a:bodyPr wrap="square" lIns="0" tIns="0" rIns="0" bIns="0" anchor="t">
             <a:spAutoFit/>
           </a:bodyPr>
           <a:lstStyle/>
@@ -12639,7 +12340,7 @@
           <a:noFill/>
         </p:spPr>
         <p:txBody>
-          <a:bodyPr wrap="square" lIns="0" rIns="0" tIns="0" bIns="0" anchor="t">
+          <a:bodyPr wrap="square" lIns="0" tIns="0" rIns="0" bIns="0" anchor="t">
             <a:spAutoFit/>
           </a:bodyPr>
           <a:lstStyle/>
@@ -12684,7 +12385,7 @@
           <a:noFill/>
         </p:spPr>
         <p:txBody>
-          <a:bodyPr wrap="square" lIns="0" rIns="0" tIns="0" bIns="0" anchor="t">
+          <a:bodyPr wrap="square" lIns="0" tIns="0" rIns="0" bIns="0" anchor="t">
             <a:spAutoFit/>
           </a:bodyPr>
           <a:lstStyle/>
@@ -12729,7 +12430,7 @@
           <a:noFill/>
         </p:spPr>
         <p:txBody>
-          <a:bodyPr wrap="square" lIns="0" rIns="0" tIns="0" bIns="0" anchor="t">
+          <a:bodyPr wrap="square" lIns="0" tIns="0" rIns="0" bIns="0" anchor="t">
             <a:spAutoFit/>
           </a:bodyPr>
           <a:lstStyle/>
@@ -12809,7 +12510,7 @@
           <a:noFill/>
         </p:spPr>
         <p:txBody>
-          <a:bodyPr wrap="square" lIns="0" rIns="0" tIns="0" bIns="0" anchor="t">
+          <a:bodyPr wrap="square" lIns="0" tIns="0" rIns="0" bIns="0" anchor="t">
             <a:spAutoFit/>
           </a:bodyPr>
           <a:lstStyle/>
@@ -12854,7 +12555,7 @@
           <a:noFill/>
         </p:spPr>
         <p:txBody>
-          <a:bodyPr wrap="square" lIns="0" rIns="0" tIns="0" bIns="0" anchor="t">
+          <a:bodyPr wrap="square" lIns="0" tIns="0" rIns="0" bIns="0" anchor="t">
             <a:spAutoFit/>
           </a:bodyPr>
           <a:lstStyle/>
@@ -12934,7 +12635,7 @@
           <a:noFill/>
         </p:spPr>
         <p:txBody>
-          <a:bodyPr wrap="square" lIns="0" rIns="0" tIns="0" bIns="0" anchor="t">
+          <a:bodyPr wrap="square" lIns="0" tIns="0" rIns="0" bIns="0" anchor="t">
             <a:spAutoFit/>
           </a:bodyPr>
           <a:lstStyle/>
@@ -12979,7 +12680,7 @@
           <a:noFill/>
         </p:spPr>
         <p:txBody>
-          <a:bodyPr wrap="square" lIns="0" rIns="0" tIns="0" bIns="0" anchor="t">
+          <a:bodyPr wrap="square" lIns="0" tIns="0" rIns="0" bIns="0" anchor="t">
             <a:spAutoFit/>
           </a:bodyPr>
           <a:lstStyle/>
@@ -13059,7 +12760,7 @@
           <a:noFill/>
         </p:spPr>
         <p:txBody>
-          <a:bodyPr wrap="square" lIns="0" rIns="0" tIns="0" bIns="0" anchor="t">
+          <a:bodyPr wrap="square" lIns="0" tIns="0" rIns="0" bIns="0" anchor="t">
             <a:spAutoFit/>
           </a:bodyPr>
           <a:lstStyle/>
@@ -13104,7 +12805,7 @@
           <a:noFill/>
         </p:spPr>
         <p:txBody>
-          <a:bodyPr wrap="square" lIns="0" rIns="0" tIns="0" bIns="0" anchor="t">
+          <a:bodyPr wrap="square" lIns="0" tIns="0" rIns="0" bIns="0" anchor="t">
             <a:spAutoFit/>
           </a:bodyPr>
           <a:lstStyle/>
@@ -13184,7 +12885,7 @@
           <a:noFill/>
         </p:spPr>
         <p:txBody>
-          <a:bodyPr wrap="square" lIns="0" rIns="0" tIns="0" bIns="0" anchor="t">
+          <a:bodyPr wrap="square" lIns="0" tIns="0" rIns="0" bIns="0" anchor="t">
             <a:spAutoFit/>
           </a:bodyPr>
           <a:lstStyle/>
@@ -13229,7 +12930,7 @@
           <a:noFill/>
         </p:spPr>
         <p:txBody>
-          <a:bodyPr wrap="square" lIns="0" rIns="0" tIns="0" bIns="0" anchor="t">
+          <a:bodyPr wrap="square" lIns="0" tIns="0" rIns="0" bIns="0" anchor="t">
             <a:spAutoFit/>
           </a:bodyPr>
           <a:lstStyle/>
@@ -13309,7 +13010,7 @@
           <a:noFill/>
         </p:spPr>
         <p:txBody>
-          <a:bodyPr wrap="square" lIns="0" rIns="0" tIns="0" bIns="0" anchor="t">
+          <a:bodyPr wrap="square" lIns="0" tIns="0" rIns="0" bIns="0" anchor="t">
             <a:spAutoFit/>
           </a:bodyPr>
           <a:lstStyle/>
@@ -13750,7 +13451,7 @@
           <a:noFill/>
         </p:spPr>
         <p:txBody>
-          <a:bodyPr wrap="square" lIns="0" rIns="0" tIns="0" bIns="0" anchor="t">
+          <a:bodyPr wrap="square" lIns="0" tIns="0" rIns="0" bIns="0" anchor="t">
             <a:spAutoFit/>
           </a:bodyPr>
           <a:lstStyle/>
@@ -13841,7 +13542,7 @@
           <a:noFill/>
         </p:spPr>
         <p:txBody>
-          <a:bodyPr wrap="square" lIns="0" rIns="0" tIns="0" bIns="0" anchor="t">
+          <a:bodyPr wrap="square" lIns="0" tIns="0" rIns="0" bIns="0" anchor="t">
             <a:spAutoFit/>
           </a:bodyPr>
           <a:lstStyle/>
@@ -13932,7 +13633,7 @@
           <a:noFill/>
         </p:spPr>
         <p:txBody>
-          <a:bodyPr wrap="square" lIns="0" rIns="0" tIns="0" bIns="0" anchor="t">
+          <a:bodyPr wrap="square" lIns="0" tIns="0" rIns="0" bIns="0" anchor="t">
             <a:spAutoFit/>
           </a:bodyPr>
           <a:lstStyle/>
@@ -14023,7 +13724,7 @@
           <a:noFill/>
         </p:spPr>
         <p:txBody>
-          <a:bodyPr wrap="square" lIns="0" rIns="0" tIns="0" bIns="0" anchor="t">
+          <a:bodyPr wrap="square" lIns="0" tIns="0" rIns="0" bIns="0" anchor="t">
             <a:spAutoFit/>
           </a:bodyPr>
           <a:lstStyle/>
@@ -14114,7 +13815,7 @@
           <a:noFill/>
         </p:spPr>
         <p:txBody>
-          <a:bodyPr wrap="square" lIns="0" rIns="0" tIns="0" bIns="0" anchor="t">
+          <a:bodyPr wrap="square" lIns="0" tIns="0" rIns="0" bIns="0" anchor="t">
             <a:spAutoFit/>
           </a:bodyPr>
           <a:lstStyle/>
@@ -14151,7 +13852,7 @@
 </file>
 
 <file path=ppt/slides/slide12.xml><?xml version="1.0" encoding="utf-8"?>
-<p:sld xmlns:a="http://schemas.openxmlformats.org/drawingml/2006/main" xmlns:p="http://schemas.openxmlformats.org/presentationml/2006/main" xmlns:r="http://schemas.openxmlformats.org/officeDocument/2006/relationships">
+<p:sld xmlns:a="http://schemas.openxmlformats.org/drawingml/2006/main" xmlns:r="http://schemas.openxmlformats.org/officeDocument/2006/relationships" xmlns:p="http://schemas.openxmlformats.org/presentationml/2006/main">
   <p:cSld>
     <p:bg>
       <p:bgPr>
@@ -14167,7 +13868,14 @@
         <p:cNvGrpSpPr/>
         <p:nvPr/>
       </p:nvGrpSpPr>
-      <p:grpSpPr/>
+      <p:grpSpPr>
+        <a:xfrm>
+          <a:off x="0" y="0"/>
+          <a:ext cx="0" cy="0"/>
+          <a:chOff x="0" y="0"/>
+          <a:chExt cx="0" cy="0"/>
+        </a:xfrm>
+      </p:grpSpPr>
       <p:sp>
         <p:nvSpPr>
           <p:cNvPr id="2" name="TextBox 1"/>
@@ -14185,7 +13893,7 @@
           <a:noFill/>
         </p:spPr>
         <p:txBody>
-          <a:bodyPr wrap="square" lIns="0" rIns="0" tIns="0" bIns="0" anchor="t">
+          <a:bodyPr wrap="square" lIns="0" tIns="0" rIns="0" bIns="0" anchor="t">
             <a:spAutoFit/>
           </a:bodyPr>
           <a:lstStyle/>
@@ -14230,7 +13938,7 @@
           <a:noFill/>
         </p:spPr>
         <p:txBody>
-          <a:bodyPr wrap="square" lIns="0" rIns="0" tIns="0" bIns="0" anchor="t">
+          <a:bodyPr wrap="square" lIns="0" tIns="0" rIns="0" bIns="0" anchor="t">
             <a:spAutoFit/>
           </a:bodyPr>
           <a:lstStyle/>
@@ -14295,51 +14003,6 @@
       </p:cxnSp>
       <p:sp>
         <p:nvSpPr>
-          <p:cNvPr id="5" name="TextBox 4"/>
-          <p:cNvSpPr txBox="1"/>
-          <p:nvPr/>
-        </p:nvSpPr>
-        <p:spPr>
-          <a:xfrm>
-            <a:off x="777240" y="6382512"/>
-            <a:ext cx="5486400" cy="182880"/>
-          </a:xfrm>
-          <a:prstGeom prst="rect">
-            <a:avLst/>
-          </a:prstGeom>
-          <a:noFill/>
-        </p:spPr>
-        <p:txBody>
-          <a:bodyPr wrap="square" lIns="0" rIns="0" tIns="0" bIns="0" anchor="t">
-            <a:spAutoFit/>
-          </a:bodyPr>
-          <a:lstStyle/>
-          <a:p>
-            <a:pPr algn="l">
-              <a:lnSpc>
-                <a:spcPct val="125000"/>
-              </a:lnSpc>
-              <a:spcBef>
-                <a:spcPts val="0"/>
-              </a:spcBef>
-              <a:spcAft>
-                <a:spcPts val="0"/>
-              </a:spcAft>
-            </a:pPr>
-            <a:r>
-              <a:rPr sz="900" b="0" i="1">
-                <a:solidFill>
-                  <a:srgbClr val="5D6470"/>
-                </a:solidFill>
-                <a:latin typeface="IBM Plex Serif"/>
-              </a:rPr>
-              <a:t>NextFrame · discrete mathematics, semester VII</a:t>
-            </a:r>
-          </a:p>
-        </p:txBody>
-      </p:sp>
-      <p:sp>
-        <p:nvSpPr>
           <p:cNvPr id="6" name="TextBox 5"/>
           <p:cNvSpPr txBox="1"/>
           <p:nvPr/>
@@ -14355,7 +14018,7 @@
           <a:noFill/>
         </p:spPr>
         <p:txBody>
-          <a:bodyPr wrap="square" lIns="0" rIns="0" tIns="0" bIns="0" anchor="t">
+          <a:bodyPr wrap="square" lIns="0" tIns="0" rIns="0" bIns="0" anchor="t">
             <a:spAutoFit/>
           </a:bodyPr>
           <a:lstStyle/>
@@ -14400,7 +14063,7 @@
           <a:noFill/>
         </p:spPr>
         <p:txBody>
-          <a:bodyPr wrap="square" lIns="0" rIns="0" tIns="0" bIns="0" anchor="t">
+          <a:bodyPr wrap="square" lIns="0" tIns="0" rIns="0" bIns="0" anchor="t">
             <a:spAutoFit/>
           </a:bodyPr>
           <a:lstStyle/>
@@ -14445,7 +14108,7 @@
           <a:noFill/>
         </p:spPr>
         <p:txBody>
-          <a:bodyPr wrap="square" lIns="0" rIns="0" tIns="0" bIns="0" anchor="t">
+          <a:bodyPr wrap="square" lIns="0" tIns="0" rIns="0" bIns="0" anchor="t">
             <a:spAutoFit/>
           </a:bodyPr>
           <a:lstStyle/>
@@ -14490,7 +14153,7 @@
           <a:noFill/>
         </p:spPr>
         <p:txBody>
-          <a:bodyPr wrap="square" lIns="0" rIns="0" tIns="0" bIns="0" anchor="t">
+          <a:bodyPr wrap="square" lIns="0" tIns="0" rIns="0" bIns="0" anchor="t">
             <a:spAutoFit/>
           </a:bodyPr>
           <a:lstStyle/>
@@ -14570,7 +14233,7 @@
           <a:noFill/>
         </p:spPr>
         <p:txBody>
-          <a:bodyPr wrap="square" lIns="0" rIns="0" tIns="0" bIns="0" anchor="t">
+          <a:bodyPr wrap="square" lIns="0" tIns="0" rIns="0" bIns="0" anchor="t">
             <a:spAutoFit/>
           </a:bodyPr>
           <a:lstStyle/>
@@ -14615,7 +14278,7 @@
           <a:noFill/>
         </p:spPr>
         <p:txBody>
-          <a:bodyPr wrap="square" lIns="0" rIns="0" tIns="0" bIns="0" anchor="t">
+          <a:bodyPr wrap="square" lIns="0" tIns="0" rIns="0" bIns="0" anchor="t">
             <a:spAutoFit/>
           </a:bodyPr>
           <a:lstStyle/>
@@ -14695,7 +14358,7 @@
           <a:noFill/>
         </p:spPr>
         <p:txBody>
-          <a:bodyPr wrap="square" lIns="0" rIns="0" tIns="0" bIns="0" anchor="t">
+          <a:bodyPr wrap="square" lIns="0" tIns="0" rIns="0" bIns="0" anchor="t">
             <a:spAutoFit/>
           </a:bodyPr>
           <a:lstStyle/>
@@ -14740,7 +14403,7 @@
           <a:noFill/>
         </p:spPr>
         <p:txBody>
-          <a:bodyPr wrap="square" lIns="0" rIns="0" tIns="0" bIns="0" anchor="t">
+          <a:bodyPr wrap="square" lIns="0" tIns="0" rIns="0" bIns="0" anchor="t">
             <a:spAutoFit/>
           </a:bodyPr>
           <a:lstStyle/>
@@ -14820,7 +14483,7 @@
           <a:noFill/>
         </p:spPr>
         <p:txBody>
-          <a:bodyPr wrap="square" lIns="0" rIns="0" tIns="0" bIns="0" anchor="t">
+          <a:bodyPr wrap="square" lIns="0" tIns="0" rIns="0" bIns="0" anchor="t">
             <a:spAutoFit/>
           </a:bodyPr>
           <a:lstStyle/>
@@ -14865,7 +14528,7 @@
           <a:noFill/>
         </p:spPr>
         <p:txBody>
-          <a:bodyPr wrap="square" lIns="0" rIns="0" tIns="0" bIns="0" anchor="t">
+          <a:bodyPr wrap="square" lIns="0" tIns="0" rIns="0" bIns="0" anchor="t">
             <a:spAutoFit/>
           </a:bodyPr>
           <a:lstStyle/>
@@ -14945,7 +14608,7 @@
           <a:noFill/>
         </p:spPr>
         <p:txBody>
-          <a:bodyPr wrap="square" lIns="0" rIns="0" tIns="0" bIns="0" anchor="t">
+          <a:bodyPr wrap="square" lIns="0" tIns="0" rIns="0" bIns="0" anchor="t">
             <a:spAutoFit/>
           </a:bodyPr>
           <a:lstStyle/>
@@ -14990,7 +14653,7 @@
           <a:noFill/>
         </p:spPr>
         <p:txBody>
-          <a:bodyPr wrap="square" lIns="0" rIns="0" tIns="0" bIns="0" anchor="t">
+          <a:bodyPr wrap="square" lIns="0" tIns="0" rIns="0" bIns="0" anchor="t">
             <a:spAutoFit/>
           </a:bodyPr>
           <a:lstStyle/>
@@ -15070,7 +14733,7 @@
           <a:noFill/>
         </p:spPr>
         <p:txBody>
-          <a:bodyPr wrap="square" lIns="0" rIns="0" tIns="0" bIns="0" anchor="t">
+          <a:bodyPr wrap="square" lIns="0" tIns="0" rIns="0" bIns="0" anchor="t">
             <a:spAutoFit/>
           </a:bodyPr>
           <a:lstStyle/>
@@ -15115,7 +14778,7 @@
           <a:noFill/>
         </p:spPr>
         <p:txBody>
-          <a:bodyPr wrap="square" lIns="0" rIns="0" tIns="0" bIns="0" anchor="t">
+          <a:bodyPr wrap="square" lIns="0" tIns="0" rIns="0" bIns="0" anchor="t">
             <a:spAutoFit/>
           </a:bodyPr>
           <a:lstStyle/>
@@ -16886,7 +16549,7 @@
           <a:noFill/>
         </p:spPr>
         <p:txBody>
-          <a:bodyPr wrap="square" lIns="0" rIns="0" tIns="0" bIns="0" anchor="t">
+          <a:bodyPr wrap="square" lIns="0" tIns="0" rIns="0" bIns="0" anchor="t">
             <a:spAutoFit/>
           </a:bodyPr>
           <a:lstStyle/>
@@ -17069,7 +16732,7 @@
           <a:noFill/>
         </p:spPr>
         <p:txBody>
-          <a:bodyPr wrap="square" lIns="0" rIns="0" tIns="0" bIns="0" anchor="t">
+          <a:bodyPr wrap="square" lIns="0" tIns="0" rIns="0" bIns="0" anchor="t">
             <a:spAutoFit/>
           </a:bodyPr>
           <a:lstStyle/>
@@ -17252,7 +16915,7 @@
           <a:noFill/>
         </p:spPr>
         <p:txBody>
-          <a:bodyPr wrap="square" lIns="0" rIns="0" tIns="0" bIns="0" anchor="t">
+          <a:bodyPr wrap="square" lIns="0" tIns="0" rIns="0" bIns="0" anchor="t">
             <a:spAutoFit/>
           </a:bodyPr>
           <a:lstStyle/>
@@ -17757,7 +17420,7 @@
           <a:noFill/>
         </p:spPr>
         <p:txBody>
-          <a:bodyPr wrap="square" lIns="0" rIns="0" tIns="0" bIns="0" anchor="t">
+          <a:bodyPr wrap="square" lIns="0" tIns="0" rIns="0" bIns="0" anchor="t">
             <a:spAutoFit/>
           </a:bodyPr>
           <a:lstStyle/>
@@ -17894,7 +17557,7 @@
           <a:noFill/>
         </p:spPr>
         <p:txBody>
-          <a:bodyPr wrap="square" lIns="0" rIns="0" tIns="0" bIns="0" anchor="t">
+          <a:bodyPr wrap="square" lIns="0" tIns="0" rIns="0" bIns="0" anchor="t">
             <a:spAutoFit/>
           </a:bodyPr>
           <a:lstStyle/>
@@ -17939,7 +17602,7 @@
           <a:noFill/>
         </p:spPr>
         <p:txBody>
-          <a:bodyPr wrap="square" lIns="0" rIns="0" tIns="0" bIns="0" anchor="t">
+          <a:bodyPr wrap="square" lIns="0" tIns="0" rIns="0" bIns="0" anchor="t">
             <a:spAutoFit/>
           </a:bodyPr>
           <a:lstStyle/>
@@ -17976,7 +17639,7 @@
 </file>
 
 <file path=ppt/slides/slide13.xml><?xml version="1.0" encoding="utf-8"?>
-<p:sld xmlns:a="http://schemas.openxmlformats.org/drawingml/2006/main" xmlns:p="http://schemas.openxmlformats.org/presentationml/2006/main" xmlns:r="http://schemas.openxmlformats.org/officeDocument/2006/relationships">
+<p:sld xmlns:a="http://schemas.openxmlformats.org/drawingml/2006/main" xmlns:r="http://schemas.openxmlformats.org/officeDocument/2006/relationships" xmlns:p="http://schemas.openxmlformats.org/presentationml/2006/main">
   <p:cSld>
     <p:bg>
       <p:bgPr>
@@ -17992,7 +17655,14 @@
         <p:cNvGrpSpPr/>
         <p:nvPr/>
       </p:nvGrpSpPr>
-      <p:grpSpPr/>
+      <p:grpSpPr>
+        <a:xfrm>
+          <a:off x="0" y="0"/>
+          <a:ext cx="0" cy="0"/>
+          <a:chOff x="0" y="0"/>
+          <a:chExt cx="0" cy="0"/>
+        </a:xfrm>
+      </p:grpSpPr>
       <p:sp>
         <p:nvSpPr>
           <p:cNvPr id="2" name="TextBox 1"/>
@@ -18010,7 +17680,7 @@
           <a:noFill/>
         </p:spPr>
         <p:txBody>
-          <a:bodyPr wrap="square" lIns="0" rIns="0" tIns="0" bIns="0" anchor="t">
+          <a:bodyPr wrap="square" lIns="0" tIns="0" rIns="0" bIns="0" anchor="t">
             <a:spAutoFit/>
           </a:bodyPr>
           <a:lstStyle/>
@@ -18055,7 +17725,7 @@
           <a:noFill/>
         </p:spPr>
         <p:txBody>
-          <a:bodyPr wrap="square" lIns="0" rIns="0" tIns="0" bIns="0" anchor="t">
+          <a:bodyPr wrap="square" lIns="0" tIns="0" rIns="0" bIns="0" anchor="t">
             <a:spAutoFit/>
           </a:bodyPr>
           <a:lstStyle/>
@@ -18120,51 +17790,6 @@
       </p:cxnSp>
       <p:sp>
         <p:nvSpPr>
-          <p:cNvPr id="5" name="TextBox 4"/>
-          <p:cNvSpPr txBox="1"/>
-          <p:nvPr/>
-        </p:nvSpPr>
-        <p:spPr>
-          <a:xfrm>
-            <a:off x="777240" y="6382512"/>
-            <a:ext cx="5486400" cy="182880"/>
-          </a:xfrm>
-          <a:prstGeom prst="rect">
-            <a:avLst/>
-          </a:prstGeom>
-          <a:noFill/>
-        </p:spPr>
-        <p:txBody>
-          <a:bodyPr wrap="square" lIns="0" rIns="0" tIns="0" bIns="0" anchor="t">
-            <a:spAutoFit/>
-          </a:bodyPr>
-          <a:lstStyle/>
-          <a:p>
-            <a:pPr algn="l">
-              <a:lnSpc>
-                <a:spcPct val="125000"/>
-              </a:lnSpc>
-              <a:spcBef>
-                <a:spcPts val="0"/>
-              </a:spcBef>
-              <a:spcAft>
-                <a:spcPts val="0"/>
-              </a:spcAft>
-            </a:pPr>
-            <a:r>
-              <a:rPr sz="900" b="0" i="1">
-                <a:solidFill>
-                  <a:srgbClr val="5D6470"/>
-                </a:solidFill>
-                <a:latin typeface="IBM Plex Serif"/>
-              </a:rPr>
-              <a:t>NextFrame · discrete mathematics, semester VII</a:t>
-            </a:r>
-          </a:p>
-        </p:txBody>
-      </p:sp>
-      <p:sp>
-        <p:nvSpPr>
           <p:cNvPr id="6" name="TextBox 5"/>
           <p:cNvSpPr txBox="1"/>
           <p:nvPr/>
@@ -18180,7 +17805,7 @@
           <a:noFill/>
         </p:spPr>
         <p:txBody>
-          <a:bodyPr wrap="square" lIns="0" rIns="0" tIns="0" bIns="0" anchor="t">
+          <a:bodyPr wrap="square" lIns="0" tIns="0" rIns="0" bIns="0" anchor="t">
             <a:spAutoFit/>
           </a:bodyPr>
           <a:lstStyle/>
@@ -18225,7 +17850,7 @@
           <a:noFill/>
         </p:spPr>
         <p:txBody>
-          <a:bodyPr wrap="square" lIns="0" rIns="0" tIns="0" bIns="0" anchor="t">
+          <a:bodyPr wrap="square" lIns="0" tIns="0" rIns="0" bIns="0" anchor="t">
             <a:spAutoFit/>
           </a:bodyPr>
           <a:lstStyle/>
@@ -18270,7 +17895,7 @@
           <a:noFill/>
         </p:spPr>
         <p:txBody>
-          <a:bodyPr wrap="square" lIns="0" rIns="0" tIns="0" bIns="0" anchor="t">
+          <a:bodyPr wrap="square" lIns="0" tIns="0" rIns="0" bIns="0" anchor="t">
             <a:spAutoFit/>
           </a:bodyPr>
           <a:lstStyle/>
@@ -18315,7 +17940,7 @@
           <a:noFill/>
         </p:spPr>
         <p:txBody>
-          <a:bodyPr wrap="square" lIns="0" rIns="0" tIns="0" bIns="0" anchor="t">
+          <a:bodyPr wrap="square" lIns="0" tIns="0" rIns="0" bIns="0" anchor="t">
             <a:spAutoFit/>
           </a:bodyPr>
           <a:lstStyle/>
@@ -18395,7 +18020,7 @@
           <a:noFill/>
         </p:spPr>
         <p:txBody>
-          <a:bodyPr wrap="square" lIns="0" rIns="0" tIns="0" bIns="0" anchor="t">
+          <a:bodyPr wrap="square" lIns="0" tIns="0" rIns="0" bIns="0" anchor="t">
             <a:spAutoFit/>
           </a:bodyPr>
           <a:lstStyle/>
@@ -18440,7 +18065,7 @@
           <a:noFill/>
         </p:spPr>
         <p:txBody>
-          <a:bodyPr wrap="square" lIns="0" rIns="0" tIns="0" bIns="0" anchor="t">
+          <a:bodyPr wrap="square" lIns="0" tIns="0" rIns="0" bIns="0" anchor="t">
             <a:spAutoFit/>
           </a:bodyPr>
           <a:lstStyle/>
@@ -18520,7 +18145,7 @@
           <a:noFill/>
         </p:spPr>
         <p:txBody>
-          <a:bodyPr wrap="square" lIns="0" rIns="0" tIns="0" bIns="0" anchor="t">
+          <a:bodyPr wrap="square" lIns="0" tIns="0" rIns="0" bIns="0" anchor="t">
             <a:spAutoFit/>
           </a:bodyPr>
           <a:lstStyle/>
@@ -18565,7 +18190,7 @@
           <a:noFill/>
         </p:spPr>
         <p:txBody>
-          <a:bodyPr wrap="square" lIns="0" rIns="0" tIns="0" bIns="0" anchor="t">
+          <a:bodyPr wrap="square" lIns="0" tIns="0" rIns="0" bIns="0" anchor="t">
             <a:spAutoFit/>
           </a:bodyPr>
           <a:lstStyle/>
@@ -18645,7 +18270,7 @@
           <a:noFill/>
         </p:spPr>
         <p:txBody>
-          <a:bodyPr wrap="square" lIns="0" rIns="0" tIns="0" bIns="0" anchor="t">
+          <a:bodyPr wrap="square" lIns="0" tIns="0" rIns="0" bIns="0" anchor="t">
             <a:spAutoFit/>
           </a:bodyPr>
           <a:lstStyle/>
@@ -18690,7 +18315,7 @@
           <a:noFill/>
         </p:spPr>
         <p:txBody>
-          <a:bodyPr wrap="square" lIns="0" rIns="0" tIns="0" bIns="0" anchor="t">
+          <a:bodyPr wrap="square" lIns="0" tIns="0" rIns="0" bIns="0" anchor="t">
             <a:spAutoFit/>
           </a:bodyPr>
           <a:lstStyle/>
@@ -18770,7 +18395,7 @@
           <a:noFill/>
         </p:spPr>
         <p:txBody>
-          <a:bodyPr wrap="square" lIns="0" rIns="0" tIns="0" bIns="0" anchor="t">
+          <a:bodyPr wrap="square" lIns="0" tIns="0" rIns="0" bIns="0" anchor="t">
             <a:spAutoFit/>
           </a:bodyPr>
           <a:lstStyle/>
@@ -18815,7 +18440,7 @@
           <a:noFill/>
         </p:spPr>
         <p:txBody>
-          <a:bodyPr wrap="square" lIns="0" rIns="0" tIns="0" bIns="0" anchor="t">
+          <a:bodyPr wrap="square" lIns="0" tIns="0" rIns="0" bIns="0" anchor="t">
             <a:spAutoFit/>
           </a:bodyPr>
           <a:lstStyle/>
@@ -18895,7 +18520,7 @@
           <a:noFill/>
         </p:spPr>
         <p:txBody>
-          <a:bodyPr wrap="square" lIns="0" rIns="0" tIns="0" bIns="0" anchor="t">
+          <a:bodyPr wrap="square" lIns="0" tIns="0" rIns="0" bIns="0" anchor="t">
             <a:spAutoFit/>
           </a:bodyPr>
           <a:lstStyle/>
@@ -18940,7 +18565,7 @@
           <a:noFill/>
         </p:spPr>
         <p:txBody>
-          <a:bodyPr wrap="square" lIns="0" rIns="0" tIns="0" bIns="0" anchor="t">
+          <a:bodyPr wrap="square" lIns="0" tIns="0" rIns="0" bIns="0" anchor="t">
             <a:spAutoFit/>
           </a:bodyPr>
           <a:lstStyle/>
@@ -19020,7 +18645,7 @@
           <a:noFill/>
         </p:spPr>
         <p:txBody>
-          <a:bodyPr wrap="square" lIns="0" rIns="0" tIns="0" bIns="0" anchor="t">
+          <a:bodyPr wrap="square" lIns="0" tIns="0" rIns="0" bIns="0" anchor="t">
             <a:spAutoFit/>
           </a:bodyPr>
           <a:lstStyle/>
@@ -19065,7 +18690,7 @@
           <a:noFill/>
         </p:spPr>
         <p:txBody>
-          <a:bodyPr wrap="square" lIns="0" rIns="0" tIns="0" bIns="0" anchor="t">
+          <a:bodyPr wrap="square" lIns="0" tIns="0" rIns="0" bIns="0" anchor="t">
             <a:spAutoFit/>
           </a:bodyPr>
           <a:lstStyle/>
@@ -19145,7 +18770,7 @@
           <a:noFill/>
         </p:spPr>
         <p:txBody>
-          <a:bodyPr wrap="square" lIns="0" rIns="0" tIns="0" bIns="0" anchor="t">
+          <a:bodyPr wrap="square" lIns="0" tIns="0" rIns="0" bIns="0" anchor="t">
             <a:spAutoFit/>
           </a:bodyPr>
           <a:lstStyle/>
@@ -19190,7 +18815,7 @@
           <a:noFill/>
         </p:spPr>
         <p:txBody>
-          <a:bodyPr wrap="square" lIns="0" rIns="0" tIns="0" bIns="0" anchor="t">
+          <a:bodyPr wrap="square" lIns="0" tIns="0" rIns="0" bIns="0" anchor="t">
             <a:spAutoFit/>
           </a:bodyPr>
           <a:lstStyle/>
@@ -19270,7 +18895,7 @@
           <a:noFill/>
         </p:spPr>
         <p:txBody>
-          <a:bodyPr wrap="square" lIns="0" rIns="0" tIns="0" bIns="0" anchor="t">
+          <a:bodyPr wrap="square" lIns="0" tIns="0" rIns="0" bIns="0" anchor="t">
             <a:spAutoFit/>
           </a:bodyPr>
           <a:lstStyle/>
@@ -19359,7 +18984,7 @@
           <a:noFill/>
         </p:spPr>
         <p:txBody>
-          <a:bodyPr wrap="square" lIns="0" rIns="0" tIns="0" bIns="0" anchor="t">
+          <a:bodyPr wrap="square" lIns="0" tIns="0" rIns="0" bIns="0" anchor="t">
             <a:spAutoFit/>
           </a:bodyPr>
           <a:lstStyle/>
@@ -19404,7 +19029,7 @@
           <a:noFill/>
         </p:spPr>
         <p:txBody>
-          <a:bodyPr wrap="square" lIns="0" rIns="0" tIns="0" bIns="0" anchor="ctr">
+          <a:bodyPr wrap="square" lIns="0" tIns="0" rIns="0" bIns="0" anchor="ctr">
             <a:spAutoFit/>
           </a:bodyPr>
           <a:lstStyle/>
@@ -19449,7 +19074,7 @@
           <a:noFill/>
         </p:spPr>
         <p:txBody>
-          <a:bodyPr wrap="square" lIns="0" rIns="0" tIns="0" bIns="0" anchor="ctr">
+          <a:bodyPr wrap="square" lIns="0" tIns="0" rIns="0" bIns="0" anchor="ctr">
             <a:spAutoFit/>
           </a:bodyPr>
           <a:lstStyle/>
@@ -19573,7 +19198,7 @@
           <a:noFill/>
         </p:spPr>
         <p:txBody>
-          <a:bodyPr wrap="square" lIns="0" rIns="0" tIns="0" bIns="0" anchor="t">
+          <a:bodyPr wrap="square" lIns="0" tIns="0" rIns="0" bIns="0" anchor="t">
             <a:spAutoFit/>
           </a:bodyPr>
           <a:lstStyle/>
@@ -19618,7 +19243,7 @@
           <a:noFill/>
         </p:spPr>
         <p:txBody>
-          <a:bodyPr wrap="square" lIns="0" rIns="0" tIns="0" bIns="0" anchor="ctr">
+          <a:bodyPr wrap="square" lIns="0" tIns="0" rIns="0" bIns="0" anchor="ctr">
             <a:spAutoFit/>
           </a:bodyPr>
           <a:lstStyle/>
@@ -19663,7 +19288,7 @@
           <a:noFill/>
         </p:spPr>
         <p:txBody>
-          <a:bodyPr wrap="square" lIns="0" rIns="0" tIns="0" bIns="0" anchor="ctr">
+          <a:bodyPr wrap="square" lIns="0" tIns="0" rIns="0" bIns="0" anchor="ctr">
             <a:spAutoFit/>
           </a:bodyPr>
           <a:lstStyle/>
@@ -19787,7 +19412,7 @@
           <a:noFill/>
         </p:spPr>
         <p:txBody>
-          <a:bodyPr wrap="square" lIns="0" rIns="0" tIns="0" bIns="0" anchor="t">
+          <a:bodyPr wrap="square" lIns="0" tIns="0" rIns="0" bIns="0" anchor="t">
             <a:spAutoFit/>
           </a:bodyPr>
           <a:lstStyle/>
@@ -19832,7 +19457,7 @@
           <a:noFill/>
         </p:spPr>
         <p:txBody>
-          <a:bodyPr wrap="square" lIns="0" rIns="0" tIns="0" bIns="0" anchor="ctr">
+          <a:bodyPr wrap="square" lIns="0" tIns="0" rIns="0" bIns="0" anchor="ctr">
             <a:spAutoFit/>
           </a:bodyPr>
           <a:lstStyle/>
@@ -19877,7 +19502,7 @@
           <a:noFill/>
         </p:spPr>
         <p:txBody>
-          <a:bodyPr wrap="square" lIns="0" rIns="0" tIns="0" bIns="0" anchor="ctr">
+          <a:bodyPr wrap="square" lIns="0" tIns="0" rIns="0" bIns="0" anchor="ctr">
             <a:spAutoFit/>
           </a:bodyPr>
           <a:lstStyle/>
@@ -20001,7 +19626,7 @@
           <a:noFill/>
         </p:spPr>
         <p:txBody>
-          <a:bodyPr wrap="square" lIns="0" rIns="0" tIns="0" bIns="0" anchor="t">
+          <a:bodyPr wrap="square" lIns="0" tIns="0" rIns="0" bIns="0" anchor="t">
             <a:spAutoFit/>
           </a:bodyPr>
           <a:lstStyle/>
@@ -20046,7 +19671,7 @@
           <a:noFill/>
         </p:spPr>
         <p:txBody>
-          <a:bodyPr wrap="square" lIns="0" rIns="0" tIns="0" bIns="0" anchor="ctr">
+          <a:bodyPr wrap="square" lIns="0" tIns="0" rIns="0" bIns="0" anchor="ctr">
             <a:spAutoFit/>
           </a:bodyPr>
           <a:lstStyle/>
@@ -20091,7 +19716,7 @@
           <a:noFill/>
         </p:spPr>
         <p:txBody>
-          <a:bodyPr wrap="square" lIns="0" rIns="0" tIns="0" bIns="0" anchor="ctr">
+          <a:bodyPr wrap="square" lIns="0" tIns="0" rIns="0" bIns="0" anchor="ctr">
             <a:spAutoFit/>
           </a:bodyPr>
           <a:lstStyle/>
@@ -20215,7 +19840,7 @@
           <a:noFill/>
         </p:spPr>
         <p:txBody>
-          <a:bodyPr wrap="square" lIns="0" rIns="0" tIns="0" bIns="0" anchor="t">
+          <a:bodyPr wrap="square" lIns="0" tIns="0" rIns="0" bIns="0" anchor="t">
             <a:spAutoFit/>
           </a:bodyPr>
           <a:lstStyle/>
@@ -20260,7 +19885,7 @@
           <a:noFill/>
         </p:spPr>
         <p:txBody>
-          <a:bodyPr wrap="square" lIns="0" rIns="0" tIns="0" bIns="0" anchor="ctr">
+          <a:bodyPr wrap="square" lIns="0" tIns="0" rIns="0" bIns="0" anchor="ctr">
             <a:spAutoFit/>
           </a:bodyPr>
           <a:lstStyle/>
@@ -20305,7 +19930,7 @@
           <a:noFill/>
         </p:spPr>
         <p:txBody>
-          <a:bodyPr wrap="square" lIns="0" rIns="0" tIns="0" bIns="0" anchor="ctr">
+          <a:bodyPr wrap="square" lIns="0" tIns="0" rIns="0" bIns="0" anchor="ctr">
             <a:spAutoFit/>
           </a:bodyPr>
           <a:lstStyle/>
@@ -20429,7 +20054,7 @@
           <a:noFill/>
         </p:spPr>
         <p:txBody>
-          <a:bodyPr wrap="square" lIns="0" rIns="0" tIns="0" bIns="0" anchor="t">
+          <a:bodyPr wrap="square" lIns="0" tIns="0" rIns="0" bIns="0" anchor="t">
             <a:spAutoFit/>
           </a:bodyPr>
           <a:lstStyle/>
@@ -20474,7 +20099,7 @@
           <a:noFill/>
         </p:spPr>
         <p:txBody>
-          <a:bodyPr wrap="square" lIns="0" rIns="0" tIns="0" bIns="0" anchor="ctr">
+          <a:bodyPr wrap="square" lIns="0" tIns="0" rIns="0" bIns="0" anchor="ctr">
             <a:spAutoFit/>
           </a:bodyPr>
           <a:lstStyle/>
@@ -20519,7 +20144,7 @@
           <a:noFill/>
         </p:spPr>
         <p:txBody>
-          <a:bodyPr wrap="square" lIns="0" rIns="0" tIns="0" bIns="0" anchor="ctr">
+          <a:bodyPr wrap="square" lIns="0" tIns="0" rIns="0" bIns="0" anchor="ctr">
             <a:spAutoFit/>
           </a:bodyPr>
           <a:lstStyle/>
@@ -20643,7 +20268,7 @@
           <a:noFill/>
         </p:spPr>
         <p:txBody>
-          <a:bodyPr wrap="square" lIns="0" rIns="0" tIns="0" bIns="0" anchor="t">
+          <a:bodyPr wrap="square" lIns="0" tIns="0" rIns="0" bIns="0" anchor="t">
             <a:spAutoFit/>
           </a:bodyPr>
           <a:lstStyle/>
@@ -20688,7 +20313,7 @@
           <a:noFill/>
         </p:spPr>
         <p:txBody>
-          <a:bodyPr wrap="square" lIns="0" rIns="0" tIns="0" bIns="0" anchor="ctr">
+          <a:bodyPr wrap="square" lIns="0" tIns="0" rIns="0" bIns="0" anchor="ctr">
             <a:spAutoFit/>
           </a:bodyPr>
           <a:lstStyle/>
@@ -20733,7 +20358,7 @@
           <a:noFill/>
         </p:spPr>
         <p:txBody>
-          <a:bodyPr wrap="square" lIns="0" rIns="0" tIns="0" bIns="0" anchor="ctr">
+          <a:bodyPr wrap="square" lIns="0" tIns="0" rIns="0" bIns="0" anchor="ctr">
             <a:spAutoFit/>
           </a:bodyPr>
           <a:lstStyle/>
@@ -20857,7 +20482,7 @@
           <a:noFill/>
         </p:spPr>
         <p:txBody>
-          <a:bodyPr wrap="square" lIns="0" rIns="0" tIns="0" bIns="0" anchor="t">
+          <a:bodyPr wrap="square" lIns="0" tIns="0" rIns="0" bIns="0" anchor="t">
             <a:spAutoFit/>
           </a:bodyPr>
           <a:lstStyle/>
@@ -20902,7 +20527,7 @@
           <a:noFill/>
         </p:spPr>
         <p:txBody>
-          <a:bodyPr wrap="square" lIns="0" rIns="0" tIns="0" bIns="0" anchor="ctr">
+          <a:bodyPr wrap="square" lIns="0" tIns="0" rIns="0" bIns="0" anchor="ctr">
             <a:spAutoFit/>
           </a:bodyPr>
           <a:lstStyle/>
@@ -20947,7 +20572,7 @@
           <a:noFill/>
         </p:spPr>
         <p:txBody>
-          <a:bodyPr wrap="square" lIns="0" rIns="0" tIns="0" bIns="0" anchor="ctr">
+          <a:bodyPr wrap="square" lIns="0" tIns="0" rIns="0" bIns="0" anchor="ctr">
             <a:spAutoFit/>
           </a:bodyPr>
           <a:lstStyle/>
@@ -21071,7 +20696,7 @@
           <a:noFill/>
         </p:spPr>
         <p:txBody>
-          <a:bodyPr wrap="square" lIns="0" rIns="0" tIns="0" bIns="0" anchor="t">
+          <a:bodyPr wrap="square" lIns="0" tIns="0" rIns="0" bIns="0" anchor="t">
             <a:spAutoFit/>
           </a:bodyPr>
           <a:lstStyle/>
@@ -21116,7 +20741,7 @@
           <a:noFill/>
         </p:spPr>
         <p:txBody>
-          <a:bodyPr wrap="square" lIns="0" rIns="0" tIns="0" bIns="0" anchor="ctr">
+          <a:bodyPr wrap="square" lIns="0" tIns="0" rIns="0" bIns="0" anchor="ctr">
             <a:spAutoFit/>
           </a:bodyPr>
           <a:lstStyle/>
@@ -21161,7 +20786,7 @@
           <a:noFill/>
         </p:spPr>
         <p:txBody>
-          <a:bodyPr wrap="square" lIns="0" rIns="0" tIns="0" bIns="0" anchor="ctr">
+          <a:bodyPr wrap="square" lIns="0" tIns="0" rIns="0" bIns="0" anchor="ctr">
             <a:spAutoFit/>
           </a:bodyPr>
           <a:lstStyle/>
@@ -21285,7 +20910,7 @@
           <a:noFill/>
         </p:spPr>
         <p:txBody>
-          <a:bodyPr wrap="square" lIns="0" rIns="0" tIns="0" bIns="0" anchor="t">
+          <a:bodyPr wrap="square" lIns="0" tIns="0" rIns="0" bIns="0" anchor="t">
             <a:spAutoFit/>
           </a:bodyPr>
           <a:lstStyle/>
@@ -21330,7 +20955,7 @@
           <a:noFill/>
         </p:spPr>
         <p:txBody>
-          <a:bodyPr wrap="square" lIns="0" rIns="0" tIns="0" bIns="0" anchor="ctr">
+          <a:bodyPr wrap="square" lIns="0" tIns="0" rIns="0" bIns="0" anchor="ctr">
             <a:spAutoFit/>
           </a:bodyPr>
           <a:lstStyle/>
@@ -21375,7 +21000,7 @@
           <a:noFill/>
         </p:spPr>
         <p:txBody>
-          <a:bodyPr wrap="square" lIns="0" rIns="0" tIns="0" bIns="0" anchor="ctr">
+          <a:bodyPr wrap="square" lIns="0" tIns="0" rIns="0" bIns="0" anchor="ctr">
             <a:spAutoFit/>
           </a:bodyPr>
           <a:lstStyle/>
@@ -21455,7 +21080,7 @@
           <a:noFill/>
         </p:spPr>
         <p:txBody>
-          <a:bodyPr wrap="square" lIns="0" rIns="0" tIns="0" bIns="0" anchor="t">
+          <a:bodyPr wrap="square" lIns="0" tIns="0" rIns="0" bIns="0" anchor="t">
             <a:spAutoFit/>
           </a:bodyPr>
           <a:lstStyle/>
@@ -21500,7 +21125,7 @@
           <a:noFill/>
         </p:spPr>
         <p:txBody>
-          <a:bodyPr wrap="square" lIns="0" rIns="0" tIns="0" bIns="0" anchor="t">
+          <a:bodyPr wrap="square" lIns="0" tIns="0" rIns="0" bIns="0" anchor="t">
             <a:spAutoFit/>
           </a:bodyPr>
           <a:lstStyle/>
@@ -21545,7 +21170,7 @@
           <a:noFill/>
         </p:spPr>
         <p:txBody>
-          <a:bodyPr wrap="square" lIns="0" rIns="0" tIns="0" bIns="0" anchor="t">
+          <a:bodyPr wrap="square" lIns="0" tIns="0" rIns="0" bIns="0" anchor="t">
             <a:spAutoFit/>
           </a:bodyPr>
           <a:lstStyle/>
@@ -21582,7 +21207,7 @@
 </file>
 
 <file path=ppt/slides/slide14.xml><?xml version="1.0" encoding="utf-8"?>
-<p:sld xmlns:a="http://schemas.openxmlformats.org/drawingml/2006/main" xmlns:p="http://schemas.openxmlformats.org/presentationml/2006/main" xmlns:r="http://schemas.openxmlformats.org/officeDocument/2006/relationships">
+<p:sld xmlns:a="http://schemas.openxmlformats.org/drawingml/2006/main" xmlns:r="http://schemas.openxmlformats.org/officeDocument/2006/relationships" xmlns:p="http://schemas.openxmlformats.org/presentationml/2006/main">
   <p:cSld>
     <p:bg>
       <p:bgPr>
@@ -21598,7 +21223,14 @@
         <p:cNvGrpSpPr/>
         <p:nvPr/>
       </p:nvGrpSpPr>
-      <p:grpSpPr/>
+      <p:grpSpPr>
+        <a:xfrm>
+          <a:off x="0" y="0"/>
+          <a:ext cx="0" cy="0"/>
+          <a:chOff x="0" y="0"/>
+          <a:chExt cx="0" cy="0"/>
+        </a:xfrm>
+      </p:grpSpPr>
       <p:sp>
         <p:nvSpPr>
           <p:cNvPr id="2" name="TextBox 1"/>
@@ -21616,7 +21248,7 @@
           <a:noFill/>
         </p:spPr>
         <p:txBody>
-          <a:bodyPr wrap="square" lIns="0" rIns="0" tIns="0" bIns="0" anchor="t">
+          <a:bodyPr wrap="square" lIns="0" tIns="0" rIns="0" bIns="0" anchor="t">
             <a:spAutoFit/>
           </a:bodyPr>
           <a:lstStyle/>
@@ -21661,7 +21293,7 @@
           <a:noFill/>
         </p:spPr>
         <p:txBody>
-          <a:bodyPr wrap="square" lIns="0" rIns="0" tIns="0" bIns="0" anchor="t">
+          <a:bodyPr wrap="square" lIns="0" tIns="0" rIns="0" bIns="0" anchor="t">
             <a:spAutoFit/>
           </a:bodyPr>
           <a:lstStyle/>
@@ -21726,51 +21358,6 @@
       </p:cxnSp>
       <p:sp>
         <p:nvSpPr>
-          <p:cNvPr id="5" name="TextBox 4"/>
-          <p:cNvSpPr txBox="1"/>
-          <p:nvPr/>
-        </p:nvSpPr>
-        <p:spPr>
-          <a:xfrm>
-            <a:off x="777240" y="6382512"/>
-            <a:ext cx="5486400" cy="182880"/>
-          </a:xfrm>
-          <a:prstGeom prst="rect">
-            <a:avLst/>
-          </a:prstGeom>
-          <a:noFill/>
-        </p:spPr>
-        <p:txBody>
-          <a:bodyPr wrap="square" lIns="0" rIns="0" tIns="0" bIns="0" anchor="t">
-            <a:spAutoFit/>
-          </a:bodyPr>
-          <a:lstStyle/>
-          <a:p>
-            <a:pPr algn="l">
-              <a:lnSpc>
-                <a:spcPct val="125000"/>
-              </a:lnSpc>
-              <a:spcBef>
-                <a:spcPts val="0"/>
-              </a:spcBef>
-              <a:spcAft>
-                <a:spcPts val="0"/>
-              </a:spcAft>
-            </a:pPr>
-            <a:r>
-              <a:rPr sz="900" b="0" i="1">
-                <a:solidFill>
-                  <a:srgbClr val="5D6470"/>
-                </a:solidFill>
-                <a:latin typeface="IBM Plex Serif"/>
-              </a:rPr>
-              <a:t>NextFrame · discrete mathematics, semester VII</a:t>
-            </a:r>
-          </a:p>
-        </p:txBody>
-      </p:sp>
-      <p:sp>
-        <p:nvSpPr>
           <p:cNvPr id="6" name="TextBox 5"/>
           <p:cNvSpPr txBox="1"/>
           <p:nvPr/>
@@ -21786,7 +21373,7 @@
           <a:noFill/>
         </p:spPr>
         <p:txBody>
-          <a:bodyPr wrap="square" lIns="0" rIns="0" tIns="0" bIns="0" anchor="t">
+          <a:bodyPr wrap="square" lIns="0" tIns="0" rIns="0" bIns="0" anchor="t">
             <a:spAutoFit/>
           </a:bodyPr>
           <a:lstStyle/>
@@ -21831,7 +21418,7 @@
           <a:noFill/>
         </p:spPr>
         <p:txBody>
-          <a:bodyPr wrap="square" lIns="0" rIns="0" tIns="0" bIns="0" anchor="t">
+          <a:bodyPr wrap="square" lIns="0" tIns="0" rIns="0" bIns="0" anchor="t">
             <a:spAutoFit/>
           </a:bodyPr>
           <a:lstStyle/>
@@ -21876,7 +21463,7 @@
           <a:noFill/>
         </p:spPr>
         <p:txBody>
-          <a:bodyPr wrap="square" lIns="0" rIns="0" tIns="0" bIns="0" anchor="t">
+          <a:bodyPr wrap="square" lIns="0" tIns="0" rIns="0" bIns="0" anchor="t">
             <a:spAutoFit/>
           </a:bodyPr>
           <a:lstStyle/>
@@ -21921,7 +21508,7 @@
           <a:noFill/>
         </p:spPr>
         <p:txBody>
-          <a:bodyPr wrap="square" lIns="0" rIns="0" tIns="0" bIns="0" anchor="t">
+          <a:bodyPr wrap="square" lIns="0" tIns="0" rIns="0" bIns="0" anchor="t">
             <a:spAutoFit/>
           </a:bodyPr>
           <a:lstStyle/>
@@ -21966,7 +21553,7 @@
           <a:noFill/>
         </p:spPr>
         <p:txBody>
-          <a:bodyPr wrap="square" lIns="0" rIns="0" tIns="0" bIns="0" anchor="t">
+          <a:bodyPr wrap="square" lIns="0" tIns="0" rIns="0" bIns="0" anchor="t">
             <a:spAutoFit/>
           </a:bodyPr>
           <a:lstStyle/>
@@ -22046,7 +21633,7 @@
           <a:noFill/>
         </p:spPr>
         <p:txBody>
-          <a:bodyPr wrap="square" lIns="0" rIns="0" tIns="0" bIns="0" anchor="t">
+          <a:bodyPr wrap="square" lIns="0" tIns="0" rIns="0" bIns="0" anchor="t">
             <a:spAutoFit/>
           </a:bodyPr>
           <a:lstStyle/>
@@ -22091,7 +21678,7 @@
           <a:noFill/>
         </p:spPr>
         <p:txBody>
-          <a:bodyPr wrap="square" lIns="0" rIns="0" tIns="0" bIns="0" anchor="t">
+          <a:bodyPr wrap="square" lIns="0" tIns="0" rIns="0" bIns="0" anchor="t">
             <a:spAutoFit/>
           </a:bodyPr>
           <a:lstStyle/>
@@ -22136,7 +21723,7 @@
           <a:noFill/>
         </p:spPr>
         <p:txBody>
-          <a:bodyPr wrap="square" lIns="0" rIns="0" tIns="0" bIns="0" anchor="t">
+          <a:bodyPr wrap="square" lIns="0" tIns="0" rIns="0" bIns="0" anchor="t">
             <a:spAutoFit/>
           </a:bodyPr>
           <a:lstStyle/>
@@ -22216,7 +21803,7 @@
           <a:noFill/>
         </p:spPr>
         <p:txBody>
-          <a:bodyPr wrap="square" lIns="0" rIns="0" tIns="0" bIns="0" anchor="t">
+          <a:bodyPr wrap="square" lIns="0" tIns="0" rIns="0" bIns="0" anchor="t">
             <a:spAutoFit/>
           </a:bodyPr>
           <a:lstStyle/>
@@ -22261,7 +21848,7 @@
           <a:noFill/>
         </p:spPr>
         <p:txBody>
-          <a:bodyPr wrap="square" lIns="0" rIns="0" tIns="0" bIns="0" anchor="t">
+          <a:bodyPr wrap="square" lIns="0" tIns="0" rIns="0" bIns="0" anchor="t">
             <a:spAutoFit/>
           </a:bodyPr>
           <a:lstStyle/>
@@ -22306,7 +21893,7 @@
           <a:noFill/>
         </p:spPr>
         <p:txBody>
-          <a:bodyPr wrap="square" lIns="0" rIns="0" tIns="0" bIns="0" anchor="t">
+          <a:bodyPr wrap="square" lIns="0" tIns="0" rIns="0" bIns="0" anchor="t">
             <a:spAutoFit/>
           </a:bodyPr>
           <a:lstStyle/>
@@ -22386,7 +21973,7 @@
           <a:noFill/>
         </p:spPr>
         <p:txBody>
-          <a:bodyPr wrap="square" lIns="0" rIns="0" tIns="0" bIns="0" anchor="t">
+          <a:bodyPr wrap="square" lIns="0" tIns="0" rIns="0" bIns="0" anchor="t">
             <a:spAutoFit/>
           </a:bodyPr>
           <a:lstStyle/>
@@ -22431,7 +22018,7 @@
           <a:noFill/>
         </p:spPr>
         <p:txBody>
-          <a:bodyPr wrap="square" lIns="0" rIns="0" tIns="0" bIns="0" anchor="t">
+          <a:bodyPr wrap="square" lIns="0" tIns="0" rIns="0" bIns="0" anchor="t">
             <a:spAutoFit/>
           </a:bodyPr>
           <a:lstStyle/>
@@ -22476,7 +22063,7 @@
           <a:noFill/>
         </p:spPr>
         <p:txBody>
-          <a:bodyPr wrap="square" lIns="0" rIns="0" tIns="0" bIns="0" anchor="t">
+          <a:bodyPr wrap="square" lIns="0" tIns="0" rIns="0" bIns="0" anchor="t">
             <a:spAutoFit/>
           </a:bodyPr>
           <a:lstStyle/>
@@ -22556,7 +22143,7 @@
           <a:noFill/>
         </p:spPr>
         <p:txBody>
-          <a:bodyPr wrap="square" lIns="0" rIns="0" tIns="0" bIns="0" anchor="t">
+          <a:bodyPr wrap="square" lIns="0" tIns="0" rIns="0" bIns="0" anchor="t">
             <a:spAutoFit/>
           </a:bodyPr>
           <a:lstStyle/>
@@ -22601,7 +22188,7 @@
           <a:noFill/>
         </p:spPr>
         <p:txBody>
-          <a:bodyPr wrap="square" lIns="0" rIns="0" tIns="0" bIns="0" anchor="t">
+          <a:bodyPr wrap="square" lIns="0" tIns="0" rIns="0" bIns="0" anchor="t">
             <a:spAutoFit/>
           </a:bodyPr>
           <a:lstStyle/>
@@ -22646,7 +22233,7 @@
           <a:noFill/>
         </p:spPr>
         <p:txBody>
-          <a:bodyPr wrap="square" lIns="0" rIns="0" tIns="0" bIns="0" anchor="t">
+          <a:bodyPr wrap="square" lIns="0" tIns="0" rIns="0" bIns="0" anchor="t">
             <a:spAutoFit/>
           </a:bodyPr>
           <a:lstStyle/>
@@ -22726,7 +22313,7 @@
           <a:noFill/>
         </p:spPr>
         <p:txBody>
-          <a:bodyPr wrap="square" lIns="0" rIns="0" tIns="0" bIns="0" anchor="t">
+          <a:bodyPr wrap="square" lIns="0" tIns="0" rIns="0" bIns="0" anchor="t">
             <a:spAutoFit/>
           </a:bodyPr>
           <a:lstStyle/>
@@ -22771,7 +22358,7 @@
           <a:noFill/>
         </p:spPr>
         <p:txBody>
-          <a:bodyPr wrap="square" lIns="0" rIns="0" tIns="0" bIns="0" anchor="t">
+          <a:bodyPr wrap="square" lIns="0" tIns="0" rIns="0" bIns="0" anchor="t">
             <a:spAutoFit/>
           </a:bodyPr>
           <a:lstStyle/>
@@ -22816,7 +22403,7 @@
           <a:noFill/>
         </p:spPr>
         <p:txBody>
-          <a:bodyPr wrap="square" lIns="0" rIns="0" tIns="0" bIns="0" anchor="t">
+          <a:bodyPr wrap="square" lIns="0" tIns="0" rIns="0" bIns="0" anchor="t">
             <a:spAutoFit/>
           </a:bodyPr>
           <a:lstStyle/>
@@ -22896,7 +22483,7 @@
           <a:noFill/>
         </p:spPr>
         <p:txBody>
-          <a:bodyPr wrap="square" lIns="0" rIns="0" tIns="0" bIns="0" anchor="t">
+          <a:bodyPr wrap="square" lIns="0" tIns="0" rIns="0" bIns="0" anchor="t">
             <a:spAutoFit/>
           </a:bodyPr>
           <a:lstStyle/>
@@ -22941,7 +22528,7 @@
           <a:noFill/>
         </p:spPr>
         <p:txBody>
-          <a:bodyPr wrap="square" lIns="0" rIns="0" tIns="0" bIns="0" anchor="t">
+          <a:bodyPr wrap="square" lIns="0" tIns="0" rIns="0" bIns="0" anchor="t">
             <a:spAutoFit/>
           </a:bodyPr>
           <a:lstStyle/>
@@ -22986,7 +22573,7 @@
           <a:noFill/>
         </p:spPr>
         <p:txBody>
-          <a:bodyPr wrap="square" lIns="0" rIns="0" tIns="0" bIns="0" anchor="t">
+          <a:bodyPr wrap="square" lIns="0" tIns="0" rIns="0" bIns="0" anchor="t">
             <a:spAutoFit/>
           </a:bodyPr>
           <a:lstStyle/>
@@ -23066,7 +22653,7 @@
           <a:noFill/>
         </p:spPr>
         <p:txBody>
-          <a:bodyPr wrap="square" lIns="0" rIns="0" tIns="0" bIns="0" anchor="t">
+          <a:bodyPr wrap="square" lIns="0" tIns="0" rIns="0" bIns="0" anchor="t">
             <a:spAutoFit/>
           </a:bodyPr>
           <a:lstStyle/>
@@ -23111,7 +22698,7 @@
           <a:noFill/>
         </p:spPr>
         <p:txBody>
-          <a:bodyPr wrap="square" lIns="0" rIns="0" tIns="0" bIns="0" anchor="t">
+          <a:bodyPr wrap="square" lIns="0" tIns="0" rIns="0" bIns="0" anchor="t">
             <a:spAutoFit/>
           </a:bodyPr>
           <a:lstStyle/>
@@ -23200,7 +22787,7 @@
           <a:noFill/>
         </p:spPr>
         <p:txBody>
-          <a:bodyPr wrap="square" lIns="0" rIns="0" tIns="0" bIns="0" anchor="t">
+          <a:bodyPr wrap="square" lIns="0" tIns="0" rIns="0" bIns="0" anchor="t">
             <a:spAutoFit/>
           </a:bodyPr>
           <a:lstStyle/>
@@ -23280,7 +22867,7 @@
           <a:noFill/>
         </p:spPr>
         <p:txBody>
-          <a:bodyPr wrap="square" lIns="0" rIns="0" tIns="0" bIns="0" anchor="t">
+          <a:bodyPr wrap="square" lIns="0" tIns="0" rIns="0" bIns="0" anchor="t">
             <a:spAutoFit/>
           </a:bodyPr>
           <a:lstStyle/>
@@ -23317,7 +22904,7 @@
 </file>
 
 <file path=ppt/slides/slide2.xml><?xml version="1.0" encoding="utf-8"?>
-<p:sld xmlns:a="http://schemas.openxmlformats.org/drawingml/2006/main" xmlns:p="http://schemas.openxmlformats.org/presentationml/2006/main" xmlns:r="http://schemas.openxmlformats.org/officeDocument/2006/relationships">
+<p:sld xmlns:a="http://schemas.openxmlformats.org/drawingml/2006/main" xmlns:r="http://schemas.openxmlformats.org/officeDocument/2006/relationships" xmlns:p="http://schemas.openxmlformats.org/presentationml/2006/main">
   <p:cSld>
     <p:bg>
       <p:bgPr>
@@ -23333,7 +22920,14 @@
         <p:cNvGrpSpPr/>
         <p:nvPr/>
       </p:nvGrpSpPr>
-      <p:grpSpPr/>
+      <p:grpSpPr>
+        <a:xfrm>
+          <a:off x="0" y="0"/>
+          <a:ext cx="0" cy="0"/>
+          <a:chOff x="0" y="0"/>
+          <a:chExt cx="0" cy="0"/>
+        </a:xfrm>
+      </p:grpSpPr>
       <p:sp>
         <p:nvSpPr>
           <p:cNvPr id="2" name="TextBox 1"/>
@@ -23351,7 +22945,7 @@
           <a:noFill/>
         </p:spPr>
         <p:txBody>
-          <a:bodyPr wrap="square" lIns="0" rIns="0" tIns="0" bIns="0" anchor="t">
+          <a:bodyPr wrap="square" lIns="0" tIns="0" rIns="0" bIns="0" anchor="t">
             <a:spAutoFit/>
           </a:bodyPr>
           <a:lstStyle/>
@@ -23396,7 +22990,7 @@
           <a:noFill/>
         </p:spPr>
         <p:txBody>
-          <a:bodyPr wrap="square" lIns="0" rIns="0" tIns="0" bIns="0" anchor="t">
+          <a:bodyPr wrap="square" lIns="0" tIns="0" rIns="0" bIns="0" anchor="t">
             <a:spAutoFit/>
           </a:bodyPr>
           <a:lstStyle/>
@@ -23461,51 +23055,6 @@
       </p:cxnSp>
       <p:sp>
         <p:nvSpPr>
-          <p:cNvPr id="5" name="TextBox 4"/>
-          <p:cNvSpPr txBox="1"/>
-          <p:nvPr/>
-        </p:nvSpPr>
-        <p:spPr>
-          <a:xfrm>
-            <a:off x="777240" y="6382512"/>
-            <a:ext cx="5486400" cy="182880"/>
-          </a:xfrm>
-          <a:prstGeom prst="rect">
-            <a:avLst/>
-          </a:prstGeom>
-          <a:noFill/>
-        </p:spPr>
-        <p:txBody>
-          <a:bodyPr wrap="square" lIns="0" rIns="0" tIns="0" bIns="0" anchor="t">
-            <a:spAutoFit/>
-          </a:bodyPr>
-          <a:lstStyle/>
-          <a:p>
-            <a:pPr algn="l">
-              <a:lnSpc>
-                <a:spcPct val="125000"/>
-              </a:lnSpc>
-              <a:spcBef>
-                <a:spcPts val="0"/>
-              </a:spcBef>
-              <a:spcAft>
-                <a:spcPts val="0"/>
-              </a:spcAft>
-            </a:pPr>
-            <a:r>
-              <a:rPr sz="900" b="0" i="1">
-                <a:solidFill>
-                  <a:srgbClr val="5D6470"/>
-                </a:solidFill>
-                <a:latin typeface="IBM Plex Serif"/>
-              </a:rPr>
-              <a:t>NextFrame · discrete mathematics, semester VII</a:t>
-            </a:r>
-          </a:p>
-        </p:txBody>
-      </p:sp>
-      <p:sp>
-        <p:nvSpPr>
           <p:cNvPr id="6" name="TextBox 5"/>
           <p:cNvSpPr txBox="1"/>
           <p:nvPr/>
@@ -23521,7 +23070,7 @@
           <a:noFill/>
         </p:spPr>
         <p:txBody>
-          <a:bodyPr wrap="square" lIns="0" rIns="0" tIns="0" bIns="0" anchor="t">
+          <a:bodyPr wrap="square" lIns="0" tIns="0" rIns="0" bIns="0" anchor="t">
             <a:spAutoFit/>
           </a:bodyPr>
           <a:lstStyle/>
@@ -23566,7 +23115,7 @@
           <a:noFill/>
         </p:spPr>
         <p:txBody>
-          <a:bodyPr wrap="square" lIns="0" rIns="0" tIns="0" bIns="0" anchor="t">
+          <a:bodyPr wrap="square" lIns="0" tIns="0" rIns="0" bIns="0" anchor="t">
             <a:spAutoFit/>
           </a:bodyPr>
           <a:lstStyle/>
@@ -24129,7 +23678,7 @@
           <a:noFill/>
         </p:spPr>
         <p:txBody>
-          <a:bodyPr wrap="square" lIns="0" rIns="0" tIns="0" bIns="0" anchor="t">
+          <a:bodyPr wrap="square" lIns="0" tIns="0" rIns="0" bIns="0" anchor="t">
             <a:spAutoFit/>
           </a:bodyPr>
           <a:lstStyle/>
@@ -24209,7 +23758,7 @@
           <a:noFill/>
         </p:spPr>
         <p:txBody>
-          <a:bodyPr wrap="square" lIns="0" rIns="0" tIns="0" bIns="0" anchor="t">
+          <a:bodyPr wrap="square" lIns="0" tIns="0" rIns="0" bIns="0" anchor="t">
             <a:spAutoFit/>
           </a:bodyPr>
           <a:lstStyle/>
@@ -24613,7 +24162,7 @@
           <a:noFill/>
         </p:spPr>
         <p:txBody>
-          <a:bodyPr wrap="square" lIns="0" rIns="0" tIns="0" bIns="0" anchor="t">
+          <a:bodyPr wrap="square" lIns="0" tIns="0" rIns="0" bIns="0" anchor="t">
             <a:spAutoFit/>
           </a:bodyPr>
           <a:lstStyle/>
@@ -24658,7 +24207,7 @@
           <a:noFill/>
         </p:spPr>
         <p:txBody>
-          <a:bodyPr wrap="square" lIns="0" rIns="0" tIns="0" bIns="0" anchor="t">
+          <a:bodyPr wrap="square" lIns="0" tIns="0" rIns="0" bIns="0" anchor="t">
             <a:spAutoFit/>
           </a:bodyPr>
           <a:lstStyle/>
@@ -24703,7 +24252,7 @@
           <a:noFill/>
         </p:spPr>
         <p:txBody>
-          <a:bodyPr wrap="square" lIns="0" rIns="0" tIns="0" bIns="0" anchor="t">
+          <a:bodyPr wrap="square" lIns="0" tIns="0" rIns="0" bIns="0" anchor="t">
             <a:spAutoFit/>
           </a:bodyPr>
           <a:lstStyle/>
@@ -24783,7 +24332,7 @@
           <a:noFill/>
         </p:spPr>
         <p:txBody>
-          <a:bodyPr wrap="square" lIns="0" rIns="0" tIns="0" bIns="0" anchor="t">
+          <a:bodyPr wrap="square" lIns="0" tIns="0" rIns="0" bIns="0" anchor="t">
             <a:spAutoFit/>
           </a:bodyPr>
           <a:lstStyle/>
@@ -24828,7 +24377,7 @@
           <a:noFill/>
         </p:spPr>
         <p:txBody>
-          <a:bodyPr wrap="square" lIns="0" rIns="0" tIns="0" bIns="0" anchor="t">
+          <a:bodyPr wrap="square" lIns="0" tIns="0" rIns="0" bIns="0" anchor="t">
             <a:spAutoFit/>
           </a:bodyPr>
           <a:lstStyle/>
@@ -24908,7 +24457,7 @@
           <a:noFill/>
         </p:spPr>
         <p:txBody>
-          <a:bodyPr wrap="square" lIns="0" rIns="0" tIns="0" bIns="0" anchor="t">
+          <a:bodyPr wrap="square" lIns="0" tIns="0" rIns="0" bIns="0" anchor="t">
             <a:spAutoFit/>
           </a:bodyPr>
           <a:lstStyle/>
@@ -24953,7 +24502,7 @@
           <a:noFill/>
         </p:spPr>
         <p:txBody>
-          <a:bodyPr wrap="square" lIns="0" rIns="0" tIns="0" bIns="0" anchor="t">
+          <a:bodyPr wrap="square" lIns="0" tIns="0" rIns="0" bIns="0" anchor="t">
             <a:spAutoFit/>
           </a:bodyPr>
           <a:lstStyle/>
@@ -25033,7 +24582,7 @@
           <a:noFill/>
         </p:spPr>
         <p:txBody>
-          <a:bodyPr wrap="square" lIns="0" rIns="0" tIns="0" bIns="0" anchor="t">
+          <a:bodyPr wrap="square" lIns="0" tIns="0" rIns="0" bIns="0" anchor="t">
             <a:spAutoFit/>
           </a:bodyPr>
           <a:lstStyle/>
@@ -25078,7 +24627,7 @@
           <a:noFill/>
         </p:spPr>
         <p:txBody>
-          <a:bodyPr wrap="square" lIns="0" rIns="0" tIns="0" bIns="0" anchor="t">
+          <a:bodyPr wrap="square" lIns="0" tIns="0" rIns="0" bIns="0" anchor="t">
             <a:spAutoFit/>
           </a:bodyPr>
           <a:lstStyle/>
@@ -25158,7 +24707,7 @@
           <a:noFill/>
         </p:spPr>
         <p:txBody>
-          <a:bodyPr wrap="square" lIns="0" rIns="0" tIns="0" bIns="0" anchor="t">
+          <a:bodyPr wrap="square" lIns="0" tIns="0" rIns="0" bIns="0" anchor="t">
             <a:spAutoFit/>
           </a:bodyPr>
           <a:lstStyle/>
@@ -25203,7 +24752,7 @@
           <a:noFill/>
         </p:spPr>
         <p:txBody>
-          <a:bodyPr wrap="square" lIns="0" rIns="0" tIns="0" bIns="0" anchor="t">
+          <a:bodyPr wrap="square" lIns="0" tIns="0" rIns="0" bIns="0" anchor="t">
             <a:spAutoFit/>
           </a:bodyPr>
           <a:lstStyle/>
@@ -25283,7 +24832,7 @@
           <a:noFill/>
         </p:spPr>
         <p:txBody>
-          <a:bodyPr wrap="square" lIns="0" rIns="0" tIns="0" bIns="0" anchor="t">
+          <a:bodyPr wrap="square" lIns="0" tIns="0" rIns="0" bIns="0" anchor="t">
             <a:spAutoFit/>
           </a:bodyPr>
           <a:lstStyle/>
@@ -25328,7 +24877,7 @@
           <a:noFill/>
         </p:spPr>
         <p:txBody>
-          <a:bodyPr wrap="square" lIns="0" rIns="0" tIns="0" bIns="0" anchor="t">
+          <a:bodyPr wrap="square" lIns="0" tIns="0" rIns="0" bIns="0" anchor="t">
             <a:spAutoFit/>
           </a:bodyPr>
           <a:lstStyle/>
@@ -25408,7 +24957,7 @@
           <a:noFill/>
         </p:spPr>
         <p:txBody>
-          <a:bodyPr wrap="square" lIns="0" rIns="0" tIns="0" bIns="0" anchor="t">
+          <a:bodyPr wrap="square" lIns="0" tIns="0" rIns="0" bIns="0" anchor="t">
             <a:spAutoFit/>
           </a:bodyPr>
           <a:lstStyle/>
@@ -25453,7 +25002,7 @@
           <a:noFill/>
         </p:spPr>
         <p:txBody>
-          <a:bodyPr wrap="square" lIns="0" rIns="0" tIns="0" bIns="0" anchor="t">
+          <a:bodyPr wrap="square" lIns="0" tIns="0" rIns="0" bIns="0" anchor="t">
             <a:spAutoFit/>
           </a:bodyPr>
           <a:lstStyle/>
@@ -25490,7 +25039,7 @@
 </file>
 
 <file path=ppt/slides/slide3.xml><?xml version="1.0" encoding="utf-8"?>
-<p:sld xmlns:a="http://schemas.openxmlformats.org/drawingml/2006/main" xmlns:p="http://schemas.openxmlformats.org/presentationml/2006/main" xmlns:r="http://schemas.openxmlformats.org/officeDocument/2006/relationships">
+<p:sld xmlns:a="http://schemas.openxmlformats.org/drawingml/2006/main" xmlns:r="http://schemas.openxmlformats.org/officeDocument/2006/relationships" xmlns:p="http://schemas.openxmlformats.org/presentationml/2006/main">
   <p:cSld>
     <p:bg>
       <p:bgPr>
@@ -25506,7 +25055,14 @@
         <p:cNvGrpSpPr/>
         <p:nvPr/>
       </p:nvGrpSpPr>
-      <p:grpSpPr/>
+      <p:grpSpPr>
+        <a:xfrm>
+          <a:off x="0" y="0"/>
+          <a:ext cx="0" cy="0"/>
+          <a:chOff x="0" y="0"/>
+          <a:chExt cx="0" cy="0"/>
+        </a:xfrm>
+      </p:grpSpPr>
       <p:sp>
         <p:nvSpPr>
           <p:cNvPr id="2" name="TextBox 1"/>
@@ -25524,7 +25080,7 @@
           <a:noFill/>
         </p:spPr>
         <p:txBody>
-          <a:bodyPr wrap="square" lIns="0" rIns="0" tIns="0" bIns="0" anchor="t">
+          <a:bodyPr wrap="square" lIns="0" tIns="0" rIns="0" bIns="0" anchor="t">
             <a:spAutoFit/>
           </a:bodyPr>
           <a:lstStyle/>
@@ -25569,7 +25125,7 @@
           <a:noFill/>
         </p:spPr>
         <p:txBody>
-          <a:bodyPr wrap="square" lIns="0" rIns="0" tIns="0" bIns="0" anchor="t">
+          <a:bodyPr wrap="square" lIns="0" tIns="0" rIns="0" bIns="0" anchor="t">
             <a:spAutoFit/>
           </a:bodyPr>
           <a:lstStyle/>
@@ -25634,51 +25190,6 @@
       </p:cxnSp>
       <p:sp>
         <p:nvSpPr>
-          <p:cNvPr id="5" name="TextBox 4"/>
-          <p:cNvSpPr txBox="1"/>
-          <p:nvPr/>
-        </p:nvSpPr>
-        <p:spPr>
-          <a:xfrm>
-            <a:off x="777240" y="6382512"/>
-            <a:ext cx="5486400" cy="182880"/>
-          </a:xfrm>
-          <a:prstGeom prst="rect">
-            <a:avLst/>
-          </a:prstGeom>
-          <a:noFill/>
-        </p:spPr>
-        <p:txBody>
-          <a:bodyPr wrap="square" lIns="0" rIns="0" tIns="0" bIns="0" anchor="t">
-            <a:spAutoFit/>
-          </a:bodyPr>
-          <a:lstStyle/>
-          <a:p>
-            <a:pPr algn="l">
-              <a:lnSpc>
-                <a:spcPct val="125000"/>
-              </a:lnSpc>
-              <a:spcBef>
-                <a:spcPts val="0"/>
-              </a:spcBef>
-              <a:spcAft>
-                <a:spcPts val="0"/>
-              </a:spcAft>
-            </a:pPr>
-            <a:r>
-              <a:rPr sz="900" b="0" i="1">
-                <a:solidFill>
-                  <a:srgbClr val="5D6470"/>
-                </a:solidFill>
-                <a:latin typeface="IBM Plex Serif"/>
-              </a:rPr>
-              <a:t>NextFrame · discrete mathematics, semester VII</a:t>
-            </a:r>
-          </a:p>
-        </p:txBody>
-      </p:sp>
-      <p:sp>
-        <p:nvSpPr>
           <p:cNvPr id="6" name="TextBox 5"/>
           <p:cNvSpPr txBox="1"/>
           <p:nvPr/>
@@ -25694,7 +25205,7 @@
           <a:noFill/>
         </p:spPr>
         <p:txBody>
-          <a:bodyPr wrap="square" lIns="0" rIns="0" tIns="0" bIns="0" anchor="t">
+          <a:bodyPr wrap="square" lIns="0" tIns="0" rIns="0" bIns="0" anchor="t">
             <a:spAutoFit/>
           </a:bodyPr>
           <a:lstStyle/>
@@ -25739,7 +25250,7 @@
           <a:noFill/>
         </p:spPr>
         <p:txBody>
-          <a:bodyPr wrap="square" lIns="0" rIns="0" tIns="0" bIns="0" anchor="t">
+          <a:bodyPr wrap="square" lIns="0" tIns="0" rIns="0" bIns="0" anchor="t">
             <a:spAutoFit/>
           </a:bodyPr>
           <a:lstStyle/>
@@ -25784,7 +25295,7 @@
           <a:noFill/>
         </p:spPr>
         <p:txBody>
-          <a:bodyPr wrap="square" lIns="0" rIns="0" tIns="0" bIns="0" anchor="t">
+          <a:bodyPr wrap="square" lIns="0" tIns="0" rIns="0" bIns="0" anchor="t">
             <a:spAutoFit/>
           </a:bodyPr>
           <a:lstStyle/>
@@ -25829,7 +25340,7 @@
           <a:noFill/>
         </p:spPr>
         <p:txBody>
-          <a:bodyPr wrap="square" lIns="0" rIns="0" tIns="0" bIns="0" anchor="t">
+          <a:bodyPr wrap="square" lIns="0" tIns="0" rIns="0" bIns="0" anchor="t">
             <a:spAutoFit/>
           </a:bodyPr>
           <a:lstStyle/>
@@ -25909,7 +25420,7 @@
           <a:noFill/>
         </p:spPr>
         <p:txBody>
-          <a:bodyPr wrap="square" lIns="0" rIns="0" tIns="0" bIns="0" anchor="t">
+          <a:bodyPr wrap="square" lIns="0" tIns="0" rIns="0" bIns="0" anchor="t">
             <a:spAutoFit/>
           </a:bodyPr>
           <a:lstStyle/>
@@ -25954,7 +25465,7 @@
           <a:noFill/>
         </p:spPr>
         <p:txBody>
-          <a:bodyPr wrap="square" lIns="0" rIns="0" tIns="0" bIns="0" anchor="t">
+          <a:bodyPr wrap="square" lIns="0" tIns="0" rIns="0" bIns="0" anchor="t">
             <a:spAutoFit/>
           </a:bodyPr>
           <a:lstStyle/>
@@ -26034,7 +25545,7 @@
           <a:noFill/>
         </p:spPr>
         <p:txBody>
-          <a:bodyPr wrap="square" lIns="0" rIns="0" tIns="0" bIns="0" anchor="t">
+          <a:bodyPr wrap="square" lIns="0" tIns="0" rIns="0" bIns="0" anchor="t">
             <a:spAutoFit/>
           </a:bodyPr>
           <a:lstStyle/>
@@ -26079,7 +25590,7 @@
           <a:noFill/>
         </p:spPr>
         <p:txBody>
-          <a:bodyPr wrap="square" lIns="0" rIns="0" tIns="0" bIns="0" anchor="t">
+          <a:bodyPr wrap="square" lIns="0" tIns="0" rIns="0" bIns="0" anchor="t">
             <a:spAutoFit/>
           </a:bodyPr>
           <a:lstStyle/>
@@ -26159,7 +25670,7 @@
           <a:noFill/>
         </p:spPr>
         <p:txBody>
-          <a:bodyPr wrap="square" lIns="0" rIns="0" tIns="0" bIns="0" anchor="t">
+          <a:bodyPr wrap="square" lIns="0" tIns="0" rIns="0" bIns="0" anchor="t">
             <a:spAutoFit/>
           </a:bodyPr>
           <a:lstStyle/>
@@ -26204,7 +25715,7 @@
           <a:noFill/>
         </p:spPr>
         <p:txBody>
-          <a:bodyPr wrap="square" lIns="0" rIns="0" tIns="0" bIns="0" anchor="t">
+          <a:bodyPr wrap="square" lIns="0" tIns="0" rIns="0" bIns="0" anchor="t">
             <a:spAutoFit/>
           </a:bodyPr>
           <a:lstStyle/>
@@ -26284,7 +25795,7 @@
           <a:noFill/>
         </p:spPr>
         <p:txBody>
-          <a:bodyPr wrap="square" lIns="0" rIns="0" tIns="0" bIns="0" anchor="t">
+          <a:bodyPr wrap="square" lIns="0" tIns="0" rIns="0" bIns="0" anchor="t">
             <a:spAutoFit/>
           </a:bodyPr>
           <a:lstStyle/>
@@ -26329,7 +25840,7 @@
           <a:noFill/>
         </p:spPr>
         <p:txBody>
-          <a:bodyPr wrap="square" lIns="0" rIns="0" tIns="0" bIns="0" anchor="t">
+          <a:bodyPr wrap="square" lIns="0" tIns="0" rIns="0" bIns="0" anchor="t">
             <a:spAutoFit/>
           </a:bodyPr>
           <a:lstStyle/>
@@ -26409,7 +25920,7 @@
           <a:noFill/>
         </p:spPr>
         <p:txBody>
-          <a:bodyPr wrap="square" lIns="0" rIns="0" tIns="0" bIns="0" anchor="t">
+          <a:bodyPr wrap="square" lIns="0" tIns="0" rIns="0" bIns="0" anchor="t">
             <a:spAutoFit/>
           </a:bodyPr>
           <a:lstStyle/>
@@ -26454,7 +25965,7 @@
           <a:noFill/>
         </p:spPr>
         <p:txBody>
-          <a:bodyPr wrap="square" lIns="0" rIns="0" tIns="0" bIns="0" anchor="t">
+          <a:bodyPr wrap="square" lIns="0" tIns="0" rIns="0" bIns="0" anchor="t">
             <a:spAutoFit/>
           </a:bodyPr>
           <a:lstStyle/>
@@ -26534,7 +26045,7 @@
           <a:noFill/>
         </p:spPr>
         <p:txBody>
-          <a:bodyPr wrap="square" lIns="0" rIns="0" tIns="0" bIns="0" anchor="t">
+          <a:bodyPr wrap="square" lIns="0" tIns="0" rIns="0" bIns="0" anchor="t">
             <a:spAutoFit/>
           </a:bodyPr>
           <a:lstStyle/>
@@ -26623,7 +26134,7 @@
           <a:noFill/>
         </p:spPr>
         <p:txBody>
-          <a:bodyPr wrap="square" lIns="0" rIns="0" tIns="0" bIns="0" anchor="t">
+          <a:bodyPr wrap="square" lIns="0" tIns="0" rIns="0" bIns="0" anchor="t">
             <a:spAutoFit/>
           </a:bodyPr>
           <a:lstStyle/>
@@ -26844,7 +26355,7 @@
           <a:noFill/>
         </p:spPr>
         <p:txBody>
-          <a:bodyPr wrap="square" lIns="0" rIns="0" tIns="0" bIns="0" anchor="t">
+          <a:bodyPr wrap="square" lIns="0" tIns="0" rIns="0" bIns="0" anchor="t">
             <a:spAutoFit/>
           </a:bodyPr>
           <a:lstStyle/>
@@ -27065,7 +26576,7 @@
           <a:noFill/>
         </p:spPr>
         <p:txBody>
-          <a:bodyPr wrap="square" lIns="0" rIns="0" tIns="0" bIns="0" anchor="t">
+          <a:bodyPr wrap="square" lIns="0" tIns="0" rIns="0" bIns="0" anchor="t">
             <a:spAutoFit/>
           </a:bodyPr>
           <a:lstStyle/>
@@ -27286,7 +26797,7 @@
           <a:noFill/>
         </p:spPr>
         <p:txBody>
-          <a:bodyPr wrap="square" lIns="0" rIns="0" tIns="0" bIns="0" anchor="t">
+          <a:bodyPr wrap="square" lIns="0" tIns="0" rIns="0" bIns="0" anchor="t">
             <a:spAutoFit/>
           </a:bodyPr>
           <a:lstStyle/>
@@ -27507,7 +27018,7 @@
           <a:noFill/>
         </p:spPr>
         <p:txBody>
-          <a:bodyPr wrap="square" lIns="0" rIns="0" tIns="0" bIns="0" anchor="t">
+          <a:bodyPr wrap="square" lIns="0" tIns="0" rIns="0" bIns="0" anchor="t">
             <a:spAutoFit/>
           </a:bodyPr>
           <a:lstStyle/>
@@ -27684,7 +27195,7 @@
           <a:noFill/>
         </p:spPr>
         <p:txBody>
-          <a:bodyPr wrap="square" lIns="0" rIns="0" tIns="0" bIns="0" anchor="t">
+          <a:bodyPr wrap="square" lIns="0" tIns="0" rIns="0" bIns="0" anchor="t">
             <a:spAutoFit/>
           </a:bodyPr>
           <a:lstStyle/>
@@ -27764,7 +27275,7 @@
           <a:noFill/>
         </p:spPr>
         <p:txBody>
-          <a:bodyPr wrap="square" lIns="0" rIns="0" tIns="0" bIns="0" anchor="t">
+          <a:bodyPr wrap="square" lIns="0" tIns="0" rIns="0" bIns="0" anchor="t">
             <a:spAutoFit/>
           </a:bodyPr>
           <a:lstStyle/>
@@ -27809,7 +27320,7 @@
           <a:noFill/>
         </p:spPr>
         <p:txBody>
-          <a:bodyPr wrap="square" lIns="0" rIns="0" tIns="0" bIns="0" anchor="t">
+          <a:bodyPr wrap="square" lIns="0" tIns="0" rIns="0" bIns="0" anchor="t">
             <a:spAutoFit/>
           </a:bodyPr>
           <a:lstStyle/>
@@ -27854,7 +27365,7 @@
           <a:noFill/>
         </p:spPr>
         <p:txBody>
-          <a:bodyPr wrap="square" lIns="0" rIns="0" tIns="0" bIns="0" anchor="t">
+          <a:bodyPr wrap="square" lIns="0" tIns="0" rIns="0" bIns="0" anchor="t">
             <a:spAutoFit/>
           </a:bodyPr>
           <a:lstStyle/>
@@ -27899,7 +27410,7 @@
           <a:noFill/>
         </p:spPr>
         <p:txBody>
-          <a:bodyPr wrap="square" lIns="0" rIns="0" tIns="0" bIns="0" anchor="t">
+          <a:bodyPr wrap="square" lIns="0" tIns="0" rIns="0" bIns="0" anchor="t">
             <a:spAutoFit/>
           </a:bodyPr>
           <a:lstStyle/>
@@ -27944,7 +27455,7 @@
           <a:noFill/>
         </p:spPr>
         <p:txBody>
-          <a:bodyPr wrap="square" lIns="0" rIns="0" tIns="0" bIns="0" anchor="t">
+          <a:bodyPr wrap="square" lIns="0" tIns="0" rIns="0" bIns="0" anchor="t">
             <a:spAutoFit/>
           </a:bodyPr>
           <a:lstStyle/>
@@ -27981,7 +27492,7 @@
 </file>
 
 <file path=ppt/slides/slide4.xml><?xml version="1.0" encoding="utf-8"?>
-<p:sld xmlns:a="http://schemas.openxmlformats.org/drawingml/2006/main" xmlns:p="http://schemas.openxmlformats.org/presentationml/2006/main" xmlns:r="http://schemas.openxmlformats.org/officeDocument/2006/relationships">
+<p:sld xmlns:a="http://schemas.openxmlformats.org/drawingml/2006/main" xmlns:r="http://schemas.openxmlformats.org/officeDocument/2006/relationships" xmlns:p="http://schemas.openxmlformats.org/presentationml/2006/main">
   <p:cSld>
     <p:bg>
       <p:bgPr>
@@ -27997,7 +27508,14 @@
         <p:cNvGrpSpPr/>
         <p:nvPr/>
       </p:nvGrpSpPr>
-      <p:grpSpPr/>
+      <p:grpSpPr>
+        <a:xfrm>
+          <a:off x="0" y="0"/>
+          <a:ext cx="0" cy="0"/>
+          <a:chOff x="0" y="0"/>
+          <a:chExt cx="0" cy="0"/>
+        </a:xfrm>
+      </p:grpSpPr>
       <p:sp>
         <p:nvSpPr>
           <p:cNvPr id="2" name="TextBox 1"/>
@@ -28015,7 +27533,7 @@
           <a:noFill/>
         </p:spPr>
         <p:txBody>
-          <a:bodyPr wrap="square" lIns="0" rIns="0" tIns="0" bIns="0" anchor="t">
+          <a:bodyPr wrap="square" lIns="0" tIns="0" rIns="0" bIns="0" anchor="t">
             <a:spAutoFit/>
           </a:bodyPr>
           <a:lstStyle/>
@@ -28060,7 +27578,7 @@
           <a:noFill/>
         </p:spPr>
         <p:txBody>
-          <a:bodyPr wrap="square" lIns="0" rIns="0" tIns="0" bIns="0" anchor="t">
+          <a:bodyPr wrap="square" lIns="0" tIns="0" rIns="0" bIns="0" anchor="t">
             <a:spAutoFit/>
           </a:bodyPr>
           <a:lstStyle/>
@@ -28125,51 +27643,6 @@
       </p:cxnSp>
       <p:sp>
         <p:nvSpPr>
-          <p:cNvPr id="5" name="TextBox 4"/>
-          <p:cNvSpPr txBox="1"/>
-          <p:nvPr/>
-        </p:nvSpPr>
-        <p:spPr>
-          <a:xfrm>
-            <a:off x="777240" y="6382512"/>
-            <a:ext cx="5486400" cy="182880"/>
-          </a:xfrm>
-          <a:prstGeom prst="rect">
-            <a:avLst/>
-          </a:prstGeom>
-          <a:noFill/>
-        </p:spPr>
-        <p:txBody>
-          <a:bodyPr wrap="square" lIns="0" rIns="0" tIns="0" bIns="0" anchor="t">
-            <a:spAutoFit/>
-          </a:bodyPr>
-          <a:lstStyle/>
-          <a:p>
-            <a:pPr algn="l">
-              <a:lnSpc>
-                <a:spcPct val="125000"/>
-              </a:lnSpc>
-              <a:spcBef>
-                <a:spcPts val="0"/>
-              </a:spcBef>
-              <a:spcAft>
-                <a:spcPts val="0"/>
-              </a:spcAft>
-            </a:pPr>
-            <a:r>
-              <a:rPr sz="900" b="0" i="1">
-                <a:solidFill>
-                  <a:srgbClr val="5D6470"/>
-                </a:solidFill>
-                <a:latin typeface="IBM Plex Serif"/>
-              </a:rPr>
-              <a:t>NextFrame · discrete mathematics, semester VII</a:t>
-            </a:r>
-          </a:p>
-        </p:txBody>
-      </p:sp>
-      <p:sp>
-        <p:nvSpPr>
           <p:cNvPr id="6" name="TextBox 5"/>
           <p:cNvSpPr txBox="1"/>
           <p:nvPr/>
@@ -28185,7 +27658,7 @@
           <a:noFill/>
         </p:spPr>
         <p:txBody>
-          <a:bodyPr wrap="square" lIns="0" rIns="0" tIns="0" bIns="0" anchor="t">
+          <a:bodyPr wrap="square" lIns="0" tIns="0" rIns="0" bIns="0" anchor="t">
             <a:spAutoFit/>
           </a:bodyPr>
           <a:lstStyle/>
@@ -28230,7 +27703,7 @@
           <a:noFill/>
         </p:spPr>
         <p:txBody>
-          <a:bodyPr wrap="square" lIns="0" rIns="0" tIns="0" bIns="0" anchor="t">
+          <a:bodyPr wrap="square" lIns="0" tIns="0" rIns="0" bIns="0" anchor="t">
             <a:spAutoFit/>
           </a:bodyPr>
           <a:lstStyle/>
@@ -28275,7 +27748,7 @@
           <a:noFill/>
         </p:spPr>
         <p:txBody>
-          <a:bodyPr wrap="square" lIns="0" rIns="0" tIns="0" bIns="0" anchor="t">
+          <a:bodyPr wrap="square" lIns="0" tIns="0" rIns="0" bIns="0" anchor="t">
             <a:spAutoFit/>
           </a:bodyPr>
           <a:lstStyle/>
@@ -28320,7 +27793,7 @@
           <a:noFill/>
         </p:spPr>
         <p:txBody>
-          <a:bodyPr wrap="square" lIns="0" rIns="0" tIns="0" bIns="0" anchor="t">
+          <a:bodyPr wrap="square" lIns="0" tIns="0" rIns="0" bIns="0" anchor="t">
             <a:spAutoFit/>
           </a:bodyPr>
           <a:lstStyle/>
@@ -28400,7 +27873,7 @@
           <a:noFill/>
         </p:spPr>
         <p:txBody>
-          <a:bodyPr wrap="square" lIns="0" rIns="0" tIns="0" bIns="0" anchor="t">
+          <a:bodyPr wrap="square" lIns="0" tIns="0" rIns="0" bIns="0" anchor="t">
             <a:spAutoFit/>
           </a:bodyPr>
           <a:lstStyle/>
@@ -28445,7 +27918,7 @@
           <a:noFill/>
         </p:spPr>
         <p:txBody>
-          <a:bodyPr wrap="square" lIns="0" rIns="0" tIns="0" bIns="0" anchor="t">
+          <a:bodyPr wrap="square" lIns="0" tIns="0" rIns="0" bIns="0" anchor="t">
             <a:spAutoFit/>
           </a:bodyPr>
           <a:lstStyle/>
@@ -28525,7 +27998,7 @@
           <a:noFill/>
         </p:spPr>
         <p:txBody>
-          <a:bodyPr wrap="square" lIns="0" rIns="0" tIns="0" bIns="0" anchor="t">
+          <a:bodyPr wrap="square" lIns="0" tIns="0" rIns="0" bIns="0" anchor="t">
             <a:spAutoFit/>
           </a:bodyPr>
           <a:lstStyle/>
@@ -28570,7 +28043,7 @@
           <a:noFill/>
         </p:spPr>
         <p:txBody>
-          <a:bodyPr wrap="square" lIns="0" rIns="0" tIns="0" bIns="0" anchor="t">
+          <a:bodyPr wrap="square" lIns="0" tIns="0" rIns="0" bIns="0" anchor="t">
             <a:spAutoFit/>
           </a:bodyPr>
           <a:lstStyle/>
@@ -28650,7 +28123,7 @@
           <a:noFill/>
         </p:spPr>
         <p:txBody>
-          <a:bodyPr wrap="square" lIns="0" rIns="0" tIns="0" bIns="0" anchor="t">
+          <a:bodyPr wrap="square" lIns="0" tIns="0" rIns="0" bIns="0" anchor="t">
             <a:spAutoFit/>
           </a:bodyPr>
           <a:lstStyle/>
@@ -28695,7 +28168,7 @@
           <a:noFill/>
         </p:spPr>
         <p:txBody>
-          <a:bodyPr wrap="square" lIns="0" rIns="0" tIns="0" bIns="0" anchor="t">
+          <a:bodyPr wrap="square" lIns="0" tIns="0" rIns="0" bIns="0" anchor="t">
             <a:spAutoFit/>
           </a:bodyPr>
           <a:lstStyle/>
@@ -28775,7 +28248,7 @@
           <a:noFill/>
         </p:spPr>
         <p:txBody>
-          <a:bodyPr wrap="square" lIns="0" rIns="0" tIns="0" bIns="0" anchor="t">
+          <a:bodyPr wrap="square" lIns="0" tIns="0" rIns="0" bIns="0" anchor="t">
             <a:spAutoFit/>
           </a:bodyPr>
           <a:lstStyle/>
@@ -28820,7 +28293,7 @@
           <a:noFill/>
         </p:spPr>
         <p:txBody>
-          <a:bodyPr wrap="square" lIns="0" rIns="0" tIns="0" bIns="0" anchor="t">
+          <a:bodyPr wrap="square" lIns="0" tIns="0" rIns="0" bIns="0" anchor="t">
             <a:spAutoFit/>
           </a:bodyPr>
           <a:lstStyle/>
@@ -28900,7 +28373,7 @@
           <a:noFill/>
         </p:spPr>
         <p:txBody>
-          <a:bodyPr wrap="square" lIns="0" rIns="0" tIns="0" bIns="0" anchor="t">
+          <a:bodyPr wrap="square" lIns="0" tIns="0" rIns="0" bIns="0" anchor="t">
             <a:spAutoFit/>
           </a:bodyPr>
           <a:lstStyle/>
@@ -28945,7 +28418,7 @@
           <a:noFill/>
         </p:spPr>
         <p:txBody>
-          <a:bodyPr wrap="square" lIns="0" rIns="0" tIns="0" bIns="0" anchor="t">
+          <a:bodyPr wrap="square" lIns="0" tIns="0" rIns="0" bIns="0" anchor="t">
             <a:spAutoFit/>
           </a:bodyPr>
           <a:lstStyle/>
@@ -29025,7 +28498,7 @@
           <a:noFill/>
         </p:spPr>
         <p:txBody>
-          <a:bodyPr wrap="square" lIns="0" rIns="0" tIns="0" bIns="0" anchor="t">
+          <a:bodyPr wrap="square" lIns="0" tIns="0" rIns="0" bIns="0" anchor="t">
             <a:spAutoFit/>
           </a:bodyPr>
           <a:lstStyle/>
@@ -29070,7 +28543,7 @@
           <a:noFill/>
         </p:spPr>
         <p:txBody>
-          <a:bodyPr wrap="square" lIns="0" rIns="0" tIns="0" bIns="0" anchor="t">
+          <a:bodyPr wrap="square" lIns="0" tIns="0" rIns="0" bIns="0" anchor="t">
             <a:spAutoFit/>
           </a:bodyPr>
           <a:lstStyle/>
@@ -29150,7 +28623,7 @@
           <a:noFill/>
         </p:spPr>
         <p:txBody>
-          <a:bodyPr wrap="square" lIns="0" rIns="0" tIns="0" bIns="0" anchor="t">
+          <a:bodyPr wrap="square" lIns="0" tIns="0" rIns="0" bIns="0" anchor="t">
             <a:spAutoFit/>
           </a:bodyPr>
           <a:lstStyle/>
@@ -29461,7 +28934,7 @@
           <a:noFill/>
         </p:spPr>
         <p:txBody>
-          <a:bodyPr wrap="square" lIns="0" rIns="0" tIns="0" bIns="0" anchor="t">
+          <a:bodyPr wrap="square" lIns="0" tIns="0" rIns="0" bIns="0" anchor="t">
             <a:spAutoFit/>
           </a:bodyPr>
           <a:lstStyle/>
@@ -29506,7 +28979,7 @@
           <a:noFill/>
         </p:spPr>
         <p:txBody>
-          <a:bodyPr wrap="square" lIns="0" rIns="0" tIns="0" bIns="0" anchor="t">
+          <a:bodyPr wrap="square" lIns="0" tIns="0" rIns="0" bIns="0" anchor="t">
             <a:spAutoFit/>
           </a:bodyPr>
           <a:lstStyle/>
@@ -29551,7 +29024,7 @@
           <a:noFill/>
         </p:spPr>
         <p:txBody>
-          <a:bodyPr wrap="square" lIns="0" rIns="0" tIns="0" bIns="0" anchor="t">
+          <a:bodyPr wrap="square" lIns="0" tIns="0" rIns="0" bIns="0" anchor="t">
             <a:spAutoFit/>
           </a:bodyPr>
           <a:lstStyle/>
@@ -29642,7 +29115,7 @@
           <a:noFill/>
         </p:spPr>
         <p:txBody>
-          <a:bodyPr wrap="square" lIns="0" rIns="0" tIns="0" bIns="0" anchor="t">
+          <a:bodyPr wrap="square" lIns="0" tIns="0" rIns="0" bIns="0" anchor="t">
             <a:spAutoFit/>
           </a:bodyPr>
           <a:lstStyle/>
@@ -29687,7 +29160,7 @@
           <a:noFill/>
         </p:spPr>
         <p:txBody>
-          <a:bodyPr wrap="square" lIns="0" rIns="0" tIns="0" bIns="0" anchor="t">
+          <a:bodyPr wrap="square" lIns="0" tIns="0" rIns="0" bIns="0" anchor="t">
             <a:spAutoFit/>
           </a:bodyPr>
           <a:lstStyle/>
@@ -29732,7 +29205,7 @@
           <a:noFill/>
         </p:spPr>
         <p:txBody>
-          <a:bodyPr wrap="square" lIns="0" rIns="0" tIns="0" bIns="0" anchor="t">
+          <a:bodyPr wrap="square" lIns="0" tIns="0" rIns="0" bIns="0" anchor="t">
             <a:spAutoFit/>
           </a:bodyPr>
           <a:lstStyle/>
@@ -29823,7 +29296,7 @@
           <a:noFill/>
         </p:spPr>
         <p:txBody>
-          <a:bodyPr wrap="square" lIns="0" rIns="0" tIns="0" bIns="0" anchor="t">
+          <a:bodyPr wrap="square" lIns="0" tIns="0" rIns="0" bIns="0" anchor="t">
             <a:spAutoFit/>
           </a:bodyPr>
           <a:lstStyle/>
@@ -29868,7 +29341,7 @@
           <a:noFill/>
         </p:spPr>
         <p:txBody>
-          <a:bodyPr wrap="square" lIns="0" rIns="0" tIns="0" bIns="0" anchor="t">
+          <a:bodyPr wrap="square" lIns="0" tIns="0" rIns="0" bIns="0" anchor="t">
             <a:spAutoFit/>
           </a:bodyPr>
           <a:lstStyle/>
@@ -29913,7 +29386,7 @@
           <a:noFill/>
         </p:spPr>
         <p:txBody>
-          <a:bodyPr wrap="square" lIns="0" rIns="0" tIns="0" bIns="0" anchor="t">
+          <a:bodyPr wrap="square" lIns="0" tIns="0" rIns="0" bIns="0" anchor="t">
             <a:spAutoFit/>
           </a:bodyPr>
           <a:lstStyle/>
@@ -30004,7 +29477,7 @@
           <a:noFill/>
         </p:spPr>
         <p:txBody>
-          <a:bodyPr wrap="square" lIns="0" rIns="0" tIns="0" bIns="0" anchor="t">
+          <a:bodyPr wrap="square" lIns="0" tIns="0" rIns="0" bIns="0" anchor="t">
             <a:spAutoFit/>
           </a:bodyPr>
           <a:lstStyle/>
@@ -30049,7 +29522,7 @@
           <a:noFill/>
         </p:spPr>
         <p:txBody>
-          <a:bodyPr wrap="square" lIns="0" rIns="0" tIns="0" bIns="0" anchor="t">
+          <a:bodyPr wrap="square" lIns="0" tIns="0" rIns="0" bIns="0" anchor="t">
             <a:spAutoFit/>
           </a:bodyPr>
           <a:lstStyle/>
@@ -30094,7 +29567,7 @@
           <a:noFill/>
         </p:spPr>
         <p:txBody>
-          <a:bodyPr wrap="square" lIns="0" rIns="0" tIns="0" bIns="0" anchor="t">
+          <a:bodyPr wrap="square" lIns="0" tIns="0" rIns="0" bIns="0" anchor="t">
             <a:spAutoFit/>
           </a:bodyPr>
           <a:lstStyle/>
@@ -30185,7 +29658,7 @@
           <a:noFill/>
         </p:spPr>
         <p:txBody>
-          <a:bodyPr wrap="square" lIns="0" rIns="0" tIns="0" bIns="0" anchor="t">
+          <a:bodyPr wrap="square" lIns="0" tIns="0" rIns="0" bIns="0" anchor="t">
             <a:spAutoFit/>
           </a:bodyPr>
           <a:lstStyle/>
@@ -30230,7 +29703,7 @@
           <a:noFill/>
         </p:spPr>
         <p:txBody>
-          <a:bodyPr wrap="square" lIns="0" rIns="0" tIns="0" bIns="0" anchor="t">
+          <a:bodyPr wrap="square" lIns="0" tIns="0" rIns="0" bIns="0" anchor="t">
             <a:spAutoFit/>
           </a:bodyPr>
           <a:lstStyle/>
@@ -30275,7 +29748,7 @@
           <a:noFill/>
         </p:spPr>
         <p:txBody>
-          <a:bodyPr wrap="square" lIns="0" rIns="0" tIns="0" bIns="0" anchor="t">
+          <a:bodyPr wrap="square" lIns="0" tIns="0" rIns="0" bIns="0" anchor="t">
             <a:spAutoFit/>
           </a:bodyPr>
           <a:lstStyle/>
@@ -30320,7 +29793,7 @@
           <a:noFill/>
         </p:spPr>
         <p:txBody>
-          <a:bodyPr wrap="square" lIns="0" rIns="0" tIns="0" bIns="0" anchor="t">
+          <a:bodyPr wrap="square" lIns="0" tIns="0" rIns="0" bIns="0" anchor="t">
             <a:spAutoFit/>
           </a:bodyPr>
           <a:lstStyle/>
@@ -30365,7 +29838,7 @@
           <a:noFill/>
         </p:spPr>
         <p:txBody>
-          <a:bodyPr wrap="square" lIns="0" rIns="0" tIns="0" bIns="0" anchor="t">
+          <a:bodyPr wrap="square" lIns="0" tIns="0" rIns="0" bIns="0" anchor="t">
             <a:spAutoFit/>
           </a:bodyPr>
           <a:lstStyle/>
@@ -30402,7 +29875,7 @@
 </file>
 
 <file path=ppt/slides/slide5.xml><?xml version="1.0" encoding="utf-8"?>
-<p:sld xmlns:a="http://schemas.openxmlformats.org/drawingml/2006/main" xmlns:p="http://schemas.openxmlformats.org/presentationml/2006/main" xmlns:r="http://schemas.openxmlformats.org/officeDocument/2006/relationships">
+<p:sld xmlns:a="http://schemas.openxmlformats.org/drawingml/2006/main" xmlns:r="http://schemas.openxmlformats.org/officeDocument/2006/relationships" xmlns:p="http://schemas.openxmlformats.org/presentationml/2006/main">
   <p:cSld>
     <p:bg>
       <p:bgPr>
@@ -30418,7 +29891,14 @@
         <p:cNvGrpSpPr/>
         <p:nvPr/>
       </p:nvGrpSpPr>
-      <p:grpSpPr/>
+      <p:grpSpPr>
+        <a:xfrm>
+          <a:off x="0" y="0"/>
+          <a:ext cx="0" cy="0"/>
+          <a:chOff x="0" y="0"/>
+          <a:chExt cx="0" cy="0"/>
+        </a:xfrm>
+      </p:grpSpPr>
       <p:sp>
         <p:nvSpPr>
           <p:cNvPr id="2" name="TextBox 1"/>
@@ -30436,7 +29916,7 @@
           <a:noFill/>
         </p:spPr>
         <p:txBody>
-          <a:bodyPr wrap="square" lIns="0" rIns="0" tIns="0" bIns="0" anchor="t">
+          <a:bodyPr wrap="square" lIns="0" tIns="0" rIns="0" bIns="0" anchor="t">
             <a:spAutoFit/>
           </a:bodyPr>
           <a:lstStyle/>
@@ -30481,7 +29961,7 @@
           <a:noFill/>
         </p:spPr>
         <p:txBody>
-          <a:bodyPr wrap="square" lIns="0" rIns="0" tIns="0" bIns="0" anchor="t">
+          <a:bodyPr wrap="square" lIns="0" tIns="0" rIns="0" bIns="0" anchor="t">
             <a:spAutoFit/>
           </a:bodyPr>
           <a:lstStyle/>
@@ -30546,51 +30026,6 @@
       </p:cxnSp>
       <p:sp>
         <p:nvSpPr>
-          <p:cNvPr id="5" name="TextBox 4"/>
-          <p:cNvSpPr txBox="1"/>
-          <p:nvPr/>
-        </p:nvSpPr>
-        <p:spPr>
-          <a:xfrm>
-            <a:off x="777240" y="6382512"/>
-            <a:ext cx="5486400" cy="182880"/>
-          </a:xfrm>
-          <a:prstGeom prst="rect">
-            <a:avLst/>
-          </a:prstGeom>
-          <a:noFill/>
-        </p:spPr>
-        <p:txBody>
-          <a:bodyPr wrap="square" lIns="0" rIns="0" tIns="0" bIns="0" anchor="t">
-            <a:spAutoFit/>
-          </a:bodyPr>
-          <a:lstStyle/>
-          <a:p>
-            <a:pPr algn="l">
-              <a:lnSpc>
-                <a:spcPct val="125000"/>
-              </a:lnSpc>
-              <a:spcBef>
-                <a:spcPts val="0"/>
-              </a:spcBef>
-              <a:spcAft>
-                <a:spcPts val="0"/>
-              </a:spcAft>
-            </a:pPr>
-            <a:r>
-              <a:rPr sz="900" b="0" i="1">
-                <a:solidFill>
-                  <a:srgbClr val="5D6470"/>
-                </a:solidFill>
-                <a:latin typeface="IBM Plex Serif"/>
-              </a:rPr>
-              <a:t>NextFrame · discrete mathematics, semester VII</a:t>
-            </a:r>
-          </a:p>
-        </p:txBody>
-      </p:sp>
-      <p:sp>
-        <p:nvSpPr>
           <p:cNvPr id="6" name="TextBox 5"/>
           <p:cNvSpPr txBox="1"/>
           <p:nvPr/>
@@ -30606,7 +30041,7 @@
           <a:noFill/>
         </p:spPr>
         <p:txBody>
-          <a:bodyPr wrap="square" lIns="0" rIns="0" tIns="0" bIns="0" anchor="t">
+          <a:bodyPr wrap="square" lIns="0" tIns="0" rIns="0" bIns="0" anchor="t">
             <a:spAutoFit/>
           </a:bodyPr>
           <a:lstStyle/>
@@ -30651,7 +30086,7 @@
           <a:noFill/>
         </p:spPr>
         <p:txBody>
-          <a:bodyPr wrap="square" lIns="0" rIns="0" tIns="0" bIns="0" anchor="t">
+          <a:bodyPr wrap="square" lIns="0" tIns="0" rIns="0" bIns="0" anchor="t">
             <a:spAutoFit/>
           </a:bodyPr>
           <a:lstStyle/>
@@ -30845,7 +30280,7 @@
           <a:noFill/>
         </p:spPr>
         <p:txBody>
-          <a:bodyPr wrap="square" lIns="0" rIns="0" tIns="0" bIns="0" anchor="t">
+          <a:bodyPr wrap="square" lIns="0" tIns="0" rIns="0" bIns="0" anchor="t">
             <a:spAutoFit/>
           </a:bodyPr>
           <a:lstStyle/>
@@ -30890,7 +30325,7 @@
           <a:noFill/>
         </p:spPr>
         <p:txBody>
-          <a:bodyPr wrap="square" lIns="0" rIns="0" tIns="0" bIns="0" anchor="t">
+          <a:bodyPr wrap="square" lIns="0" tIns="0" rIns="0" bIns="0" anchor="t">
             <a:spAutoFit/>
           </a:bodyPr>
           <a:lstStyle/>
@@ -30979,7 +30414,7 @@
           <a:noFill/>
         </p:spPr>
         <p:txBody>
-          <a:bodyPr wrap="square" lIns="0" rIns="0" tIns="0" bIns="0" anchor="t">
+          <a:bodyPr wrap="square" lIns="0" tIns="0" rIns="0" bIns="0" anchor="t">
             <a:spAutoFit/>
           </a:bodyPr>
           <a:lstStyle/>
@@ -31024,7 +30459,7 @@
           <a:noFill/>
         </p:spPr>
         <p:txBody>
-          <a:bodyPr wrap="square" lIns="0" rIns="0" tIns="0" bIns="0" anchor="t">
+          <a:bodyPr wrap="square" lIns="0" tIns="0" rIns="0" bIns="0" anchor="t">
             <a:spAutoFit/>
           </a:bodyPr>
           <a:lstStyle/>
@@ -31113,7 +30548,7 @@
           <a:noFill/>
         </p:spPr>
         <p:txBody>
-          <a:bodyPr wrap="square" lIns="0" rIns="0" tIns="0" bIns="0" anchor="t">
+          <a:bodyPr wrap="square" lIns="0" tIns="0" rIns="0" bIns="0" anchor="t">
             <a:spAutoFit/>
           </a:bodyPr>
           <a:lstStyle/>
@@ -31158,7 +30593,7 @@
           <a:noFill/>
         </p:spPr>
         <p:txBody>
-          <a:bodyPr wrap="square" lIns="0" rIns="0" tIns="0" bIns="0" anchor="t">
+          <a:bodyPr wrap="square" lIns="0" tIns="0" rIns="0" bIns="0" anchor="t">
             <a:spAutoFit/>
           </a:bodyPr>
           <a:lstStyle/>
@@ -31247,7 +30682,7 @@
           <a:noFill/>
         </p:spPr>
         <p:txBody>
-          <a:bodyPr wrap="square" lIns="0" rIns="0" tIns="0" bIns="0" anchor="t">
+          <a:bodyPr wrap="square" lIns="0" tIns="0" rIns="0" bIns="0" anchor="t">
             <a:spAutoFit/>
           </a:bodyPr>
           <a:lstStyle/>
@@ -31292,7 +30727,7 @@
           <a:noFill/>
         </p:spPr>
         <p:txBody>
-          <a:bodyPr wrap="square" lIns="0" rIns="0" tIns="0" bIns="0" anchor="t">
+          <a:bodyPr wrap="square" lIns="0" tIns="0" rIns="0" bIns="0" anchor="t">
             <a:spAutoFit/>
           </a:bodyPr>
           <a:lstStyle/>
@@ -31337,7 +30772,7 @@
           <a:noFill/>
         </p:spPr>
         <p:txBody>
-          <a:bodyPr wrap="square" lIns="0" rIns="0" tIns="0" bIns="0" anchor="t">
+          <a:bodyPr wrap="square" lIns="0" tIns="0" rIns="0" bIns="0" anchor="t">
             <a:spAutoFit/>
           </a:bodyPr>
           <a:lstStyle/>
@@ -31382,7 +30817,7 @@
           <a:noFill/>
         </p:spPr>
         <p:txBody>
-          <a:bodyPr wrap="square" lIns="0" rIns="0" tIns="0" bIns="0" anchor="t">
+          <a:bodyPr wrap="square" lIns="0" tIns="0" rIns="0" bIns="0" anchor="t">
             <a:spAutoFit/>
           </a:bodyPr>
           <a:lstStyle/>
@@ -31427,7 +30862,7 @@
           <a:noFill/>
         </p:spPr>
         <p:txBody>
-          <a:bodyPr wrap="square" lIns="0" rIns="0" tIns="0" bIns="0" anchor="t">
+          <a:bodyPr wrap="square" lIns="0" tIns="0" rIns="0" bIns="0" anchor="t">
             <a:spAutoFit/>
           </a:bodyPr>
           <a:lstStyle/>
@@ -31472,7 +30907,7 @@
           <a:noFill/>
         </p:spPr>
         <p:txBody>
-          <a:bodyPr wrap="square" lIns="0" rIns="0" tIns="0" bIns="0" anchor="t">
+          <a:bodyPr wrap="square" lIns="0" tIns="0" rIns="0" bIns="0" anchor="t">
             <a:spAutoFit/>
           </a:bodyPr>
           <a:lstStyle/>
@@ -31517,7 +30952,7 @@
           <a:noFill/>
         </p:spPr>
         <p:txBody>
-          <a:bodyPr wrap="square" lIns="0" rIns="0" tIns="0" bIns="0" anchor="t">
+          <a:bodyPr wrap="square" lIns="0" tIns="0" rIns="0" bIns="0" anchor="t">
             <a:spAutoFit/>
           </a:bodyPr>
           <a:lstStyle/>
@@ -31597,7 +31032,7 @@
           <a:noFill/>
         </p:spPr>
         <p:txBody>
-          <a:bodyPr wrap="square" lIns="0" rIns="0" tIns="0" bIns="0" anchor="t">
+          <a:bodyPr wrap="square" lIns="0" tIns="0" rIns="0" bIns="0" anchor="t">
             <a:spAutoFit/>
           </a:bodyPr>
           <a:lstStyle/>
@@ -31642,7 +31077,7 @@
           <a:noFill/>
         </p:spPr>
         <p:txBody>
-          <a:bodyPr wrap="square" lIns="0" rIns="0" tIns="0" bIns="0" anchor="t">
+          <a:bodyPr wrap="square" lIns="0" tIns="0" rIns="0" bIns="0" anchor="t">
             <a:spAutoFit/>
           </a:bodyPr>
           <a:lstStyle/>
@@ -31722,7 +31157,7 @@
           <a:noFill/>
         </p:spPr>
         <p:txBody>
-          <a:bodyPr wrap="square" lIns="0" rIns="0" tIns="0" bIns="0" anchor="t">
+          <a:bodyPr wrap="square" lIns="0" tIns="0" rIns="0" bIns="0" anchor="t">
             <a:spAutoFit/>
           </a:bodyPr>
           <a:lstStyle/>
@@ -31767,7 +31202,7 @@
           <a:noFill/>
         </p:spPr>
         <p:txBody>
-          <a:bodyPr wrap="square" lIns="0" rIns="0" tIns="0" bIns="0" anchor="t">
+          <a:bodyPr wrap="square" lIns="0" tIns="0" rIns="0" bIns="0" anchor="t">
             <a:spAutoFit/>
           </a:bodyPr>
           <a:lstStyle/>
@@ -31847,7 +31282,7 @@
           <a:noFill/>
         </p:spPr>
         <p:txBody>
-          <a:bodyPr wrap="square" lIns="0" rIns="0" tIns="0" bIns="0" anchor="t">
+          <a:bodyPr wrap="square" lIns="0" tIns="0" rIns="0" bIns="0" anchor="t">
             <a:spAutoFit/>
           </a:bodyPr>
           <a:lstStyle/>
@@ -31892,7 +31327,7 @@
           <a:noFill/>
         </p:spPr>
         <p:txBody>
-          <a:bodyPr wrap="square" lIns="0" rIns="0" tIns="0" bIns="0" anchor="t">
+          <a:bodyPr wrap="square" lIns="0" tIns="0" rIns="0" bIns="0" anchor="t">
             <a:spAutoFit/>
           </a:bodyPr>
           <a:lstStyle/>
@@ -31972,7 +31407,7 @@
           <a:noFill/>
         </p:spPr>
         <p:txBody>
-          <a:bodyPr wrap="square" lIns="0" rIns="0" tIns="0" bIns="0" anchor="t">
+          <a:bodyPr wrap="square" lIns="0" tIns="0" rIns="0" bIns="0" anchor="t">
             <a:spAutoFit/>
           </a:bodyPr>
           <a:lstStyle/>
@@ -32017,7 +31452,7 @@
           <a:noFill/>
         </p:spPr>
         <p:txBody>
-          <a:bodyPr wrap="square" lIns="0" rIns="0" tIns="0" bIns="0" anchor="t">
+          <a:bodyPr wrap="square" lIns="0" tIns="0" rIns="0" bIns="0" anchor="t">
             <a:spAutoFit/>
           </a:bodyPr>
           <a:lstStyle/>
@@ -32097,7 +31532,7 @@
           <a:noFill/>
         </p:spPr>
         <p:txBody>
-          <a:bodyPr wrap="square" lIns="0" rIns="0" tIns="0" bIns="0" anchor="t">
+          <a:bodyPr wrap="square" lIns="0" tIns="0" rIns="0" bIns="0" anchor="t">
             <a:spAutoFit/>
           </a:bodyPr>
           <a:lstStyle/>
@@ -32142,7 +31577,7 @@
           <a:noFill/>
         </p:spPr>
         <p:txBody>
-          <a:bodyPr wrap="square" lIns="0" rIns="0" tIns="0" bIns="0" anchor="t">
+          <a:bodyPr wrap="square" lIns="0" tIns="0" rIns="0" bIns="0" anchor="t">
             <a:spAutoFit/>
           </a:bodyPr>
           <a:lstStyle/>
@@ -32222,7 +31657,7 @@
           <a:noFill/>
         </p:spPr>
         <p:txBody>
-          <a:bodyPr wrap="square" lIns="0" rIns="0" tIns="0" bIns="0" anchor="t">
+          <a:bodyPr wrap="square" lIns="0" tIns="0" rIns="0" bIns="0" anchor="t">
             <a:spAutoFit/>
           </a:bodyPr>
           <a:lstStyle/>
@@ -32259,7 +31694,7 @@
 </file>
 
 <file path=ppt/slides/slide6.xml><?xml version="1.0" encoding="utf-8"?>
-<p:sld xmlns:a="http://schemas.openxmlformats.org/drawingml/2006/main" xmlns:p="http://schemas.openxmlformats.org/presentationml/2006/main" xmlns:r="http://schemas.openxmlformats.org/officeDocument/2006/relationships">
+<p:sld xmlns:a="http://schemas.openxmlformats.org/drawingml/2006/main" xmlns:r="http://schemas.openxmlformats.org/officeDocument/2006/relationships" xmlns:p="http://schemas.openxmlformats.org/presentationml/2006/main">
   <p:cSld>
     <p:bg>
       <p:bgPr>
@@ -32275,7 +31710,14 @@
         <p:cNvGrpSpPr/>
         <p:nvPr/>
       </p:nvGrpSpPr>
-      <p:grpSpPr/>
+      <p:grpSpPr>
+        <a:xfrm>
+          <a:off x="0" y="0"/>
+          <a:ext cx="0" cy="0"/>
+          <a:chOff x="0" y="0"/>
+          <a:chExt cx="0" cy="0"/>
+        </a:xfrm>
+      </p:grpSpPr>
       <p:sp>
         <p:nvSpPr>
           <p:cNvPr id="2" name="TextBox 1"/>
@@ -32293,7 +31735,7 @@
           <a:noFill/>
         </p:spPr>
         <p:txBody>
-          <a:bodyPr wrap="square" lIns="0" rIns="0" tIns="0" bIns="0" anchor="t">
+          <a:bodyPr wrap="square" lIns="0" tIns="0" rIns="0" bIns="0" anchor="t">
             <a:spAutoFit/>
           </a:bodyPr>
           <a:lstStyle/>
@@ -32338,7 +31780,7 @@
           <a:noFill/>
         </p:spPr>
         <p:txBody>
-          <a:bodyPr wrap="square" lIns="0" rIns="0" tIns="0" bIns="0" anchor="t">
+          <a:bodyPr wrap="square" lIns="0" tIns="0" rIns="0" bIns="0" anchor="t">
             <a:spAutoFit/>
           </a:bodyPr>
           <a:lstStyle/>
@@ -32403,51 +31845,6 @@
       </p:cxnSp>
       <p:sp>
         <p:nvSpPr>
-          <p:cNvPr id="5" name="TextBox 4"/>
-          <p:cNvSpPr txBox="1"/>
-          <p:nvPr/>
-        </p:nvSpPr>
-        <p:spPr>
-          <a:xfrm>
-            <a:off x="777240" y="6382512"/>
-            <a:ext cx="5486400" cy="182880"/>
-          </a:xfrm>
-          <a:prstGeom prst="rect">
-            <a:avLst/>
-          </a:prstGeom>
-          <a:noFill/>
-        </p:spPr>
-        <p:txBody>
-          <a:bodyPr wrap="square" lIns="0" rIns="0" tIns="0" bIns="0" anchor="t">
-            <a:spAutoFit/>
-          </a:bodyPr>
-          <a:lstStyle/>
-          <a:p>
-            <a:pPr algn="l">
-              <a:lnSpc>
-                <a:spcPct val="125000"/>
-              </a:lnSpc>
-              <a:spcBef>
-                <a:spcPts val="0"/>
-              </a:spcBef>
-              <a:spcAft>
-                <a:spcPts val="0"/>
-              </a:spcAft>
-            </a:pPr>
-            <a:r>
-              <a:rPr sz="900" b="0" i="1">
-                <a:solidFill>
-                  <a:srgbClr val="5D6470"/>
-                </a:solidFill>
-                <a:latin typeface="IBM Plex Serif"/>
-              </a:rPr>
-              <a:t>NextFrame · discrete mathematics, semester VII</a:t>
-            </a:r>
-          </a:p>
-        </p:txBody>
-      </p:sp>
-      <p:sp>
-        <p:nvSpPr>
           <p:cNvPr id="6" name="TextBox 5"/>
           <p:cNvSpPr txBox="1"/>
           <p:nvPr/>
@@ -32463,7 +31860,7 @@
           <a:noFill/>
         </p:spPr>
         <p:txBody>
-          <a:bodyPr wrap="square" lIns="0" rIns="0" tIns="0" bIns="0" anchor="t">
+          <a:bodyPr wrap="square" lIns="0" tIns="0" rIns="0" bIns="0" anchor="t">
             <a:spAutoFit/>
           </a:bodyPr>
           <a:lstStyle/>
@@ -32508,7 +31905,7 @@
           <a:noFill/>
         </p:spPr>
         <p:txBody>
-          <a:bodyPr wrap="square" lIns="0" rIns="0" tIns="0" bIns="0" anchor="t">
+          <a:bodyPr wrap="square" lIns="0" tIns="0" rIns="0" bIns="0" anchor="t">
             <a:spAutoFit/>
           </a:bodyPr>
           <a:lstStyle/>
@@ -32641,7 +32038,7 @@
           <a:noFill/>
         </p:spPr>
         <p:txBody>
-          <a:bodyPr wrap="square" lIns="0" rIns="0" tIns="0" bIns="0" anchor="t">
+          <a:bodyPr wrap="square" lIns="0" tIns="0" rIns="0" bIns="0" anchor="t">
             <a:spAutoFit/>
           </a:bodyPr>
           <a:lstStyle/>
@@ -32686,7 +32083,7 @@
           <a:noFill/>
         </p:spPr>
         <p:txBody>
-          <a:bodyPr wrap="square" lIns="0" rIns="0" tIns="0" bIns="0" anchor="t">
+          <a:bodyPr wrap="square" lIns="0" tIns="0" rIns="0" bIns="0" anchor="t">
             <a:spAutoFit/>
           </a:bodyPr>
           <a:lstStyle/>
@@ -32731,7 +32128,7 @@
           <a:noFill/>
         </p:spPr>
         <p:txBody>
-          <a:bodyPr wrap="square" lIns="0" rIns="0" tIns="0" bIns="0" anchor="t">
+          <a:bodyPr wrap="square" lIns="0" tIns="0" rIns="0" bIns="0" anchor="t">
             <a:spAutoFit/>
           </a:bodyPr>
           <a:lstStyle/>
@@ -32776,7 +32173,7 @@
           <a:noFill/>
         </p:spPr>
         <p:txBody>
-          <a:bodyPr wrap="square" lIns="0" rIns="0" tIns="0" bIns="0" anchor="t">
+          <a:bodyPr wrap="square" lIns="0" tIns="0" rIns="0" bIns="0" anchor="t">
             <a:spAutoFit/>
           </a:bodyPr>
           <a:lstStyle/>
@@ -32821,7 +32218,7 @@
           <a:noFill/>
         </p:spPr>
         <p:txBody>
-          <a:bodyPr wrap="square" lIns="0" rIns="0" tIns="0" bIns="0" anchor="t">
+          <a:bodyPr wrap="square" lIns="0" tIns="0" rIns="0" bIns="0" anchor="t">
             <a:spAutoFit/>
           </a:bodyPr>
           <a:lstStyle/>
@@ -32866,7 +32263,7 @@
           <a:noFill/>
         </p:spPr>
         <p:txBody>
-          <a:bodyPr wrap="square" lIns="0" rIns="0" tIns="0" bIns="0" anchor="t">
+          <a:bodyPr wrap="square" lIns="0" tIns="0" rIns="0" bIns="0" anchor="t">
             <a:spAutoFit/>
           </a:bodyPr>
           <a:lstStyle/>
@@ -32946,7 +32343,7 @@
           <a:noFill/>
         </p:spPr>
         <p:txBody>
-          <a:bodyPr wrap="square" lIns="0" rIns="0" tIns="0" bIns="0" anchor="t">
+          <a:bodyPr wrap="square" lIns="0" tIns="0" rIns="0" bIns="0" anchor="t">
             <a:spAutoFit/>
           </a:bodyPr>
           <a:lstStyle/>
@@ -32991,7 +32388,7 @@
           <a:noFill/>
         </p:spPr>
         <p:txBody>
-          <a:bodyPr wrap="square" lIns="0" rIns="0" tIns="0" bIns="0" anchor="t">
+          <a:bodyPr wrap="square" lIns="0" tIns="0" rIns="0" bIns="0" anchor="t">
             <a:spAutoFit/>
           </a:bodyPr>
           <a:lstStyle/>
@@ -33071,7 +32468,7 @@
           <a:noFill/>
         </p:spPr>
         <p:txBody>
-          <a:bodyPr wrap="square" lIns="0" rIns="0" tIns="0" bIns="0" anchor="t">
+          <a:bodyPr wrap="square" lIns="0" tIns="0" rIns="0" bIns="0" anchor="t">
             <a:spAutoFit/>
           </a:bodyPr>
           <a:lstStyle/>
@@ -33116,7 +32513,7 @@
           <a:noFill/>
         </p:spPr>
         <p:txBody>
-          <a:bodyPr wrap="square" lIns="0" rIns="0" tIns="0" bIns="0" anchor="t">
+          <a:bodyPr wrap="square" lIns="0" tIns="0" rIns="0" bIns="0" anchor="t">
             <a:spAutoFit/>
           </a:bodyPr>
           <a:lstStyle/>
@@ -33196,7 +32593,7 @@
           <a:noFill/>
         </p:spPr>
         <p:txBody>
-          <a:bodyPr wrap="square" lIns="0" rIns="0" tIns="0" bIns="0" anchor="t">
+          <a:bodyPr wrap="square" lIns="0" tIns="0" rIns="0" bIns="0" anchor="t">
             <a:spAutoFit/>
           </a:bodyPr>
           <a:lstStyle/>
@@ -33241,7 +32638,7 @@
           <a:noFill/>
         </p:spPr>
         <p:txBody>
-          <a:bodyPr wrap="square" lIns="0" rIns="0" tIns="0" bIns="0" anchor="t">
+          <a:bodyPr wrap="square" lIns="0" tIns="0" rIns="0" bIns="0" anchor="t">
             <a:spAutoFit/>
           </a:bodyPr>
           <a:lstStyle/>
@@ -33321,7 +32718,7 @@
           <a:noFill/>
         </p:spPr>
         <p:txBody>
-          <a:bodyPr wrap="square" lIns="0" rIns="0" tIns="0" bIns="0" anchor="t">
+          <a:bodyPr wrap="square" lIns="0" tIns="0" rIns="0" bIns="0" anchor="t">
             <a:spAutoFit/>
           </a:bodyPr>
           <a:lstStyle/>
@@ -33366,7 +32763,7 @@
           <a:noFill/>
         </p:spPr>
         <p:txBody>
-          <a:bodyPr wrap="square" lIns="0" rIns="0" tIns="0" bIns="0" anchor="t">
+          <a:bodyPr wrap="square" lIns="0" tIns="0" rIns="0" bIns="0" anchor="t">
             <a:spAutoFit/>
           </a:bodyPr>
           <a:lstStyle/>
@@ -33446,7 +32843,7 @@
           <a:noFill/>
         </p:spPr>
         <p:txBody>
-          <a:bodyPr wrap="square" lIns="0" rIns="0" tIns="0" bIns="0" anchor="t">
+          <a:bodyPr wrap="square" lIns="0" tIns="0" rIns="0" bIns="0" anchor="t">
             <a:spAutoFit/>
           </a:bodyPr>
           <a:lstStyle/>
@@ -33491,7 +32888,7 @@
           <a:noFill/>
         </p:spPr>
         <p:txBody>
-          <a:bodyPr wrap="square" lIns="0" rIns="0" tIns="0" bIns="0" anchor="t">
+          <a:bodyPr wrap="square" lIns="0" tIns="0" rIns="0" bIns="0" anchor="t">
             <a:spAutoFit/>
           </a:bodyPr>
           <a:lstStyle/>
@@ -33571,7 +32968,7 @@
           <a:noFill/>
         </p:spPr>
         <p:txBody>
-          <a:bodyPr wrap="square" lIns="0" rIns="0" tIns="0" bIns="0" anchor="t">
+          <a:bodyPr wrap="square" lIns="0" tIns="0" rIns="0" bIns="0" anchor="t">
             <a:spAutoFit/>
           </a:bodyPr>
           <a:lstStyle/>
@@ -33616,7 +33013,7 @@
           <a:noFill/>
         </p:spPr>
         <p:txBody>
-          <a:bodyPr wrap="square" lIns="0" rIns="0" tIns="0" bIns="0" anchor="t">
+          <a:bodyPr wrap="square" lIns="0" tIns="0" rIns="0" bIns="0" anchor="t">
             <a:spAutoFit/>
           </a:bodyPr>
           <a:lstStyle/>
@@ -33696,7 +33093,7 @@
           <a:noFill/>
         </p:spPr>
         <p:txBody>
-          <a:bodyPr wrap="square" lIns="0" rIns="0" tIns="0" bIns="0" anchor="t">
+          <a:bodyPr wrap="square" lIns="0" tIns="0" rIns="0" bIns="0" anchor="t">
             <a:spAutoFit/>
           </a:bodyPr>
           <a:lstStyle/>
@@ -33741,7 +33138,7 @@
           <a:noFill/>
         </p:spPr>
         <p:txBody>
-          <a:bodyPr wrap="square" lIns="0" rIns="0" tIns="0" bIns="0" anchor="t">
+          <a:bodyPr wrap="square" lIns="0" tIns="0" rIns="0" bIns="0" anchor="t">
             <a:spAutoFit/>
           </a:bodyPr>
           <a:lstStyle/>
@@ -33821,7 +33218,7 @@
           <a:noFill/>
         </p:spPr>
         <p:txBody>
-          <a:bodyPr wrap="square" lIns="0" rIns="0" tIns="0" bIns="0" anchor="t">
+          <a:bodyPr wrap="square" lIns="0" tIns="0" rIns="0" bIns="0" anchor="t">
             <a:spAutoFit/>
           </a:bodyPr>
           <a:lstStyle/>
@@ -33866,7 +33263,7 @@
           <a:noFill/>
         </p:spPr>
         <p:txBody>
-          <a:bodyPr wrap="square" lIns="0" rIns="0" tIns="0" bIns="0" anchor="t">
+          <a:bodyPr wrap="square" lIns="0" tIns="0" rIns="0" bIns="0" anchor="t">
             <a:spAutoFit/>
           </a:bodyPr>
           <a:lstStyle/>
@@ -33903,7 +33300,7 @@
 </file>
 
 <file path=ppt/slides/slide7.xml><?xml version="1.0" encoding="utf-8"?>
-<p:sld xmlns:a="http://schemas.openxmlformats.org/drawingml/2006/main" xmlns:p="http://schemas.openxmlformats.org/presentationml/2006/main" xmlns:r="http://schemas.openxmlformats.org/officeDocument/2006/relationships">
+<p:sld xmlns:a="http://schemas.openxmlformats.org/drawingml/2006/main" xmlns:r="http://schemas.openxmlformats.org/officeDocument/2006/relationships" xmlns:p="http://schemas.openxmlformats.org/presentationml/2006/main">
   <p:cSld>
     <p:bg>
       <p:bgPr>
@@ -33919,7 +33316,14 @@
         <p:cNvGrpSpPr/>
         <p:nvPr/>
       </p:nvGrpSpPr>
-      <p:grpSpPr/>
+      <p:grpSpPr>
+        <a:xfrm>
+          <a:off x="0" y="0"/>
+          <a:ext cx="0" cy="0"/>
+          <a:chOff x="0" y="0"/>
+          <a:chExt cx="0" cy="0"/>
+        </a:xfrm>
+      </p:grpSpPr>
       <p:sp>
         <p:nvSpPr>
           <p:cNvPr id="2" name="TextBox 1"/>
@@ -33937,7 +33341,7 @@
           <a:noFill/>
         </p:spPr>
         <p:txBody>
-          <a:bodyPr wrap="square" lIns="0" rIns="0" tIns="0" bIns="0" anchor="t">
+          <a:bodyPr wrap="square" lIns="0" tIns="0" rIns="0" bIns="0" anchor="t">
             <a:spAutoFit/>
           </a:bodyPr>
           <a:lstStyle/>
@@ -33982,7 +33386,7 @@
           <a:noFill/>
         </p:spPr>
         <p:txBody>
-          <a:bodyPr wrap="square" lIns="0" rIns="0" tIns="0" bIns="0" anchor="t">
+          <a:bodyPr wrap="square" lIns="0" tIns="0" rIns="0" bIns="0" anchor="t">
             <a:spAutoFit/>
           </a:bodyPr>
           <a:lstStyle/>
@@ -34047,51 +33451,6 @@
       </p:cxnSp>
       <p:sp>
         <p:nvSpPr>
-          <p:cNvPr id="5" name="TextBox 4"/>
-          <p:cNvSpPr txBox="1"/>
-          <p:nvPr/>
-        </p:nvSpPr>
-        <p:spPr>
-          <a:xfrm>
-            <a:off x="777240" y="6382512"/>
-            <a:ext cx="5486400" cy="182880"/>
-          </a:xfrm>
-          <a:prstGeom prst="rect">
-            <a:avLst/>
-          </a:prstGeom>
-          <a:noFill/>
-        </p:spPr>
-        <p:txBody>
-          <a:bodyPr wrap="square" lIns="0" rIns="0" tIns="0" bIns="0" anchor="t">
-            <a:spAutoFit/>
-          </a:bodyPr>
-          <a:lstStyle/>
-          <a:p>
-            <a:pPr algn="l">
-              <a:lnSpc>
-                <a:spcPct val="125000"/>
-              </a:lnSpc>
-              <a:spcBef>
-                <a:spcPts val="0"/>
-              </a:spcBef>
-              <a:spcAft>
-                <a:spcPts val="0"/>
-              </a:spcAft>
-            </a:pPr>
-            <a:r>
-              <a:rPr sz="900" b="0" i="1">
-                <a:solidFill>
-                  <a:srgbClr val="5D6470"/>
-                </a:solidFill>
-                <a:latin typeface="IBM Plex Serif"/>
-              </a:rPr>
-              <a:t>NextFrame · discrete mathematics, semester VII</a:t>
-            </a:r>
-          </a:p>
-        </p:txBody>
-      </p:sp>
-      <p:sp>
-        <p:nvSpPr>
           <p:cNvPr id="6" name="TextBox 5"/>
           <p:cNvSpPr txBox="1"/>
           <p:nvPr/>
@@ -34107,7 +33466,7 @@
           <a:noFill/>
         </p:spPr>
         <p:txBody>
-          <a:bodyPr wrap="square" lIns="0" rIns="0" tIns="0" bIns="0" anchor="t">
+          <a:bodyPr wrap="square" lIns="0" tIns="0" rIns="0" bIns="0" anchor="t">
             <a:spAutoFit/>
           </a:bodyPr>
           <a:lstStyle/>
@@ -34152,7 +33511,7 @@
           <a:noFill/>
         </p:spPr>
         <p:txBody>
-          <a:bodyPr wrap="square" lIns="0" rIns="0" tIns="0" bIns="0" anchor="t">
+          <a:bodyPr wrap="square" lIns="0" tIns="0" rIns="0" bIns="0" anchor="t">
             <a:spAutoFit/>
           </a:bodyPr>
           <a:lstStyle/>
@@ -34286,7 +33645,7 @@
           <a:noFill/>
         </p:spPr>
         <p:txBody>
-          <a:bodyPr wrap="square" lIns="0" rIns="0" tIns="0" bIns="0" anchor="t">
+          <a:bodyPr wrap="square" lIns="0" tIns="0" rIns="0" bIns="0" anchor="t">
             <a:spAutoFit/>
           </a:bodyPr>
           <a:lstStyle/>
@@ -34331,7 +33690,7 @@
           <a:noFill/>
         </p:spPr>
         <p:txBody>
-          <a:bodyPr wrap="square" lIns="0" rIns="0" tIns="0" bIns="0" anchor="t">
+          <a:bodyPr wrap="square" lIns="0" tIns="0" rIns="0" bIns="0" anchor="t">
             <a:spAutoFit/>
           </a:bodyPr>
           <a:lstStyle/>
@@ -34376,7 +33735,7 @@
           <a:noFill/>
         </p:spPr>
         <p:txBody>
-          <a:bodyPr wrap="square" lIns="0" rIns="0" tIns="0" bIns="0" anchor="t">
+          <a:bodyPr wrap="square" lIns="0" tIns="0" rIns="0" bIns="0" anchor="t">
             <a:spAutoFit/>
           </a:bodyPr>
           <a:lstStyle/>
@@ -34421,7 +33780,7 @@
           <a:noFill/>
         </p:spPr>
         <p:txBody>
-          <a:bodyPr wrap="square" lIns="0" rIns="0" tIns="0" bIns="0" anchor="t">
+          <a:bodyPr wrap="square" lIns="0" tIns="0" rIns="0" bIns="0" anchor="t">
             <a:spAutoFit/>
           </a:bodyPr>
           <a:lstStyle/>
@@ -34466,7 +33825,7 @@
           <a:noFill/>
         </p:spPr>
         <p:txBody>
-          <a:bodyPr wrap="square" lIns="0" rIns="0" tIns="0" bIns="0" anchor="t">
+          <a:bodyPr wrap="square" lIns="0" tIns="0" rIns="0" bIns="0" anchor="t">
             <a:spAutoFit/>
           </a:bodyPr>
           <a:lstStyle/>
@@ -34511,7 +33870,7 @@
           <a:noFill/>
         </p:spPr>
         <p:txBody>
-          <a:bodyPr wrap="square" lIns="0" rIns="0" tIns="0" bIns="0" anchor="t">
+          <a:bodyPr wrap="square" lIns="0" tIns="0" rIns="0" bIns="0" anchor="t">
             <a:spAutoFit/>
           </a:bodyPr>
           <a:lstStyle/>
@@ -34556,7 +33915,7 @@
           <a:noFill/>
         </p:spPr>
         <p:txBody>
-          <a:bodyPr wrap="square" lIns="0" rIns="0" tIns="0" bIns="0" anchor="t">
+          <a:bodyPr wrap="square" lIns="0" tIns="0" rIns="0" bIns="0" anchor="t">
             <a:spAutoFit/>
           </a:bodyPr>
           <a:lstStyle/>
@@ -34601,7 +33960,7 @@
           <a:noFill/>
         </p:spPr>
         <p:txBody>
-          <a:bodyPr wrap="square" lIns="0" rIns="0" tIns="0" bIns="0" anchor="t">
+          <a:bodyPr wrap="square" lIns="0" tIns="0" rIns="0" bIns="0" anchor="t">
             <a:spAutoFit/>
           </a:bodyPr>
           <a:lstStyle/>
@@ -34646,7 +34005,7 @@
           <a:noFill/>
         </p:spPr>
         <p:txBody>
-          <a:bodyPr wrap="square" lIns="0" rIns="0" tIns="0" bIns="0" anchor="t">
+          <a:bodyPr wrap="square" lIns="0" tIns="0" rIns="0" bIns="0" anchor="t">
             <a:spAutoFit/>
           </a:bodyPr>
           <a:lstStyle/>
@@ -34726,7 +34085,7 @@
           <a:noFill/>
         </p:spPr>
         <p:txBody>
-          <a:bodyPr wrap="square" lIns="0" rIns="0" tIns="0" bIns="0" anchor="t">
+          <a:bodyPr wrap="square" lIns="0" tIns="0" rIns="0" bIns="0" anchor="t">
             <a:spAutoFit/>
           </a:bodyPr>
           <a:lstStyle/>
@@ -34771,7 +34130,7 @@
           <a:noFill/>
         </p:spPr>
         <p:txBody>
-          <a:bodyPr wrap="square" lIns="0" rIns="0" tIns="0" bIns="0" anchor="t">
+          <a:bodyPr wrap="square" lIns="0" tIns="0" rIns="0" bIns="0" anchor="t">
             <a:spAutoFit/>
           </a:bodyPr>
           <a:lstStyle/>
@@ -34851,7 +34210,7 @@
           <a:noFill/>
         </p:spPr>
         <p:txBody>
-          <a:bodyPr wrap="square" lIns="0" rIns="0" tIns="0" bIns="0" anchor="t">
+          <a:bodyPr wrap="square" lIns="0" tIns="0" rIns="0" bIns="0" anchor="t">
             <a:spAutoFit/>
           </a:bodyPr>
           <a:lstStyle/>
@@ -34896,7 +34255,7 @@
           <a:noFill/>
         </p:spPr>
         <p:txBody>
-          <a:bodyPr wrap="square" lIns="0" rIns="0" tIns="0" bIns="0" anchor="t">
+          <a:bodyPr wrap="square" lIns="0" tIns="0" rIns="0" bIns="0" anchor="t">
             <a:spAutoFit/>
           </a:bodyPr>
           <a:lstStyle/>
@@ -34976,7 +34335,7 @@
           <a:noFill/>
         </p:spPr>
         <p:txBody>
-          <a:bodyPr wrap="square" lIns="0" rIns="0" tIns="0" bIns="0" anchor="t">
+          <a:bodyPr wrap="square" lIns="0" tIns="0" rIns="0" bIns="0" anchor="t">
             <a:spAutoFit/>
           </a:bodyPr>
           <a:lstStyle/>
@@ -35021,7 +34380,7 @@
           <a:noFill/>
         </p:spPr>
         <p:txBody>
-          <a:bodyPr wrap="square" lIns="0" rIns="0" tIns="0" bIns="0" anchor="t">
+          <a:bodyPr wrap="square" lIns="0" tIns="0" rIns="0" bIns="0" anchor="t">
             <a:spAutoFit/>
           </a:bodyPr>
           <a:lstStyle/>
@@ -35101,7 +34460,7 @@
           <a:noFill/>
         </p:spPr>
         <p:txBody>
-          <a:bodyPr wrap="square" lIns="0" rIns="0" tIns="0" bIns="0" anchor="t">
+          <a:bodyPr wrap="square" lIns="0" tIns="0" rIns="0" bIns="0" anchor="t">
             <a:spAutoFit/>
           </a:bodyPr>
           <a:lstStyle/>
@@ -35146,7 +34505,7 @@
           <a:noFill/>
         </p:spPr>
         <p:txBody>
-          <a:bodyPr wrap="square" lIns="0" rIns="0" tIns="0" bIns="0" anchor="t">
+          <a:bodyPr wrap="square" lIns="0" tIns="0" rIns="0" bIns="0" anchor="t">
             <a:spAutoFit/>
           </a:bodyPr>
           <a:lstStyle/>
@@ -35226,7 +34585,7 @@
           <a:noFill/>
         </p:spPr>
         <p:txBody>
-          <a:bodyPr wrap="square" lIns="0" rIns="0" tIns="0" bIns="0" anchor="t">
+          <a:bodyPr wrap="square" lIns="0" tIns="0" rIns="0" bIns="0" anchor="t">
             <a:spAutoFit/>
           </a:bodyPr>
           <a:lstStyle/>
@@ -35271,7 +34630,7 @@
           <a:noFill/>
         </p:spPr>
         <p:txBody>
-          <a:bodyPr wrap="square" lIns="0" rIns="0" tIns="0" bIns="0" anchor="t">
+          <a:bodyPr wrap="square" lIns="0" tIns="0" rIns="0" bIns="0" anchor="t">
             <a:spAutoFit/>
           </a:bodyPr>
           <a:lstStyle/>
@@ -35351,7 +34710,7 @@
           <a:noFill/>
         </p:spPr>
         <p:txBody>
-          <a:bodyPr wrap="square" lIns="0" rIns="0" tIns="0" bIns="0" anchor="t">
+          <a:bodyPr wrap="square" lIns="0" tIns="0" rIns="0" bIns="0" anchor="t">
             <a:spAutoFit/>
           </a:bodyPr>
           <a:lstStyle/>
@@ -35396,7 +34755,7 @@
           <a:noFill/>
         </p:spPr>
         <p:txBody>
-          <a:bodyPr wrap="square" lIns="0" rIns="0" tIns="0" bIns="0" anchor="t">
+          <a:bodyPr wrap="square" lIns="0" tIns="0" rIns="0" bIns="0" anchor="t">
             <a:spAutoFit/>
           </a:bodyPr>
           <a:lstStyle/>
@@ -35476,7 +34835,7 @@
           <a:noFill/>
         </p:spPr>
         <p:txBody>
-          <a:bodyPr wrap="square" lIns="0" rIns="0" tIns="0" bIns="0" anchor="t">
+          <a:bodyPr wrap="square" lIns="0" tIns="0" rIns="0" bIns="0" anchor="t">
             <a:spAutoFit/>
           </a:bodyPr>
           <a:lstStyle/>
@@ -35521,7 +34880,7 @@
           <a:noFill/>
         </p:spPr>
         <p:txBody>
-          <a:bodyPr wrap="square" lIns="0" rIns="0" tIns="0" bIns="0" anchor="t">
+          <a:bodyPr wrap="square" lIns="0" tIns="0" rIns="0" bIns="0" anchor="t">
             <a:spAutoFit/>
           </a:bodyPr>
           <a:lstStyle/>
@@ -35566,7 +34925,7 @@
           <a:noFill/>
         </p:spPr>
         <p:txBody>
-          <a:bodyPr wrap="square" lIns="0" rIns="0" tIns="0" bIns="0" anchor="t">
+          <a:bodyPr wrap="square" lIns="0" tIns="0" rIns="0" bIns="0" anchor="t">
             <a:spAutoFit/>
           </a:bodyPr>
           <a:lstStyle/>
@@ -35611,7 +34970,7 @@
           <a:noFill/>
         </p:spPr>
         <p:txBody>
-          <a:bodyPr wrap="square" lIns="0" rIns="0" tIns="0" bIns="0" anchor="t">
+          <a:bodyPr wrap="square" lIns="0" tIns="0" rIns="0" bIns="0" anchor="t">
             <a:spAutoFit/>
           </a:bodyPr>
           <a:lstStyle/>
@@ -35656,7 +35015,7 @@
           <a:noFill/>
         </p:spPr>
         <p:txBody>
-          <a:bodyPr wrap="square" lIns="0" rIns="0" tIns="0" bIns="0" anchor="t">
+          <a:bodyPr wrap="square" lIns="0" tIns="0" rIns="0" bIns="0" anchor="t">
             <a:spAutoFit/>
           </a:bodyPr>
           <a:lstStyle/>
@@ -35701,7 +35060,7 @@
           <a:noFill/>
         </p:spPr>
         <p:txBody>
-          <a:bodyPr wrap="square" lIns="0" rIns="0" tIns="0" bIns="0" anchor="t">
+          <a:bodyPr wrap="square" lIns="0" tIns="0" rIns="0" bIns="0" anchor="t">
             <a:spAutoFit/>
           </a:bodyPr>
           <a:lstStyle/>
@@ -35738,7 +35097,7 @@
 </file>
 
 <file path=ppt/slides/slide8.xml><?xml version="1.0" encoding="utf-8"?>
-<p:sld xmlns:a="http://schemas.openxmlformats.org/drawingml/2006/main" xmlns:p="http://schemas.openxmlformats.org/presentationml/2006/main" xmlns:r="http://schemas.openxmlformats.org/officeDocument/2006/relationships">
+<p:sld xmlns:a="http://schemas.openxmlformats.org/drawingml/2006/main" xmlns:r="http://schemas.openxmlformats.org/officeDocument/2006/relationships" xmlns:p="http://schemas.openxmlformats.org/presentationml/2006/main">
   <p:cSld>
     <p:bg>
       <p:bgPr>
@@ -35754,7 +35113,14 @@
         <p:cNvGrpSpPr/>
         <p:nvPr/>
       </p:nvGrpSpPr>
-      <p:grpSpPr/>
+      <p:grpSpPr>
+        <a:xfrm>
+          <a:off x="0" y="0"/>
+          <a:ext cx="0" cy="0"/>
+          <a:chOff x="0" y="0"/>
+          <a:chExt cx="0" cy="0"/>
+        </a:xfrm>
+      </p:grpSpPr>
       <p:sp>
         <p:nvSpPr>
           <p:cNvPr id="2" name="TextBox 1"/>
@@ -35772,7 +35138,7 @@
           <a:noFill/>
         </p:spPr>
         <p:txBody>
-          <a:bodyPr wrap="square" lIns="0" rIns="0" tIns="0" bIns="0" anchor="t">
+          <a:bodyPr wrap="square" lIns="0" tIns="0" rIns="0" bIns="0" anchor="t">
             <a:spAutoFit/>
           </a:bodyPr>
           <a:lstStyle/>
@@ -35817,7 +35183,7 @@
           <a:noFill/>
         </p:spPr>
         <p:txBody>
-          <a:bodyPr wrap="square" lIns="0" rIns="0" tIns="0" bIns="0" anchor="t">
+          <a:bodyPr wrap="square" lIns="0" tIns="0" rIns="0" bIns="0" anchor="t">
             <a:spAutoFit/>
           </a:bodyPr>
           <a:lstStyle/>
@@ -35882,51 +35248,6 @@
       </p:cxnSp>
       <p:sp>
         <p:nvSpPr>
-          <p:cNvPr id="5" name="TextBox 4"/>
-          <p:cNvSpPr txBox="1"/>
-          <p:nvPr/>
-        </p:nvSpPr>
-        <p:spPr>
-          <a:xfrm>
-            <a:off x="777240" y="6382512"/>
-            <a:ext cx="5486400" cy="182880"/>
-          </a:xfrm>
-          <a:prstGeom prst="rect">
-            <a:avLst/>
-          </a:prstGeom>
-          <a:noFill/>
-        </p:spPr>
-        <p:txBody>
-          <a:bodyPr wrap="square" lIns="0" rIns="0" tIns="0" bIns="0" anchor="t">
-            <a:spAutoFit/>
-          </a:bodyPr>
-          <a:lstStyle/>
-          <a:p>
-            <a:pPr algn="l">
-              <a:lnSpc>
-                <a:spcPct val="125000"/>
-              </a:lnSpc>
-              <a:spcBef>
-                <a:spcPts val="0"/>
-              </a:spcBef>
-              <a:spcAft>
-                <a:spcPts val="0"/>
-              </a:spcAft>
-            </a:pPr>
-            <a:r>
-              <a:rPr sz="900" b="0" i="1">
-                <a:solidFill>
-                  <a:srgbClr val="5D6470"/>
-                </a:solidFill>
-                <a:latin typeface="IBM Plex Serif"/>
-              </a:rPr>
-              <a:t>NextFrame · discrete mathematics, semester VII</a:t>
-            </a:r>
-          </a:p>
-        </p:txBody>
-      </p:sp>
-      <p:sp>
-        <p:nvSpPr>
           <p:cNvPr id="6" name="TextBox 5"/>
           <p:cNvSpPr txBox="1"/>
           <p:nvPr/>
@@ -35942,7 +35263,7 @@
           <a:noFill/>
         </p:spPr>
         <p:txBody>
-          <a:bodyPr wrap="square" lIns="0" rIns="0" tIns="0" bIns="0" anchor="t">
+          <a:bodyPr wrap="square" lIns="0" tIns="0" rIns="0" bIns="0" anchor="t">
             <a:spAutoFit/>
           </a:bodyPr>
           <a:lstStyle/>
@@ -35987,7 +35308,7 @@
           <a:noFill/>
         </p:spPr>
         <p:txBody>
-          <a:bodyPr wrap="square" lIns="0" rIns="0" tIns="0" bIns="0" anchor="t">
+          <a:bodyPr wrap="square" lIns="0" tIns="0" rIns="0" bIns="0" anchor="t">
             <a:spAutoFit/>
           </a:bodyPr>
           <a:lstStyle/>
@@ -36032,7 +35353,7 @@
           <a:noFill/>
         </p:spPr>
         <p:txBody>
-          <a:bodyPr wrap="square" lIns="0" rIns="0" tIns="0" bIns="0" anchor="t">
+          <a:bodyPr wrap="square" lIns="0" tIns="0" rIns="0" bIns="0" anchor="t">
             <a:spAutoFit/>
           </a:bodyPr>
           <a:lstStyle/>
@@ -36077,7 +35398,7 @@
           <a:noFill/>
         </p:spPr>
         <p:txBody>
-          <a:bodyPr wrap="square" lIns="0" rIns="0" tIns="0" bIns="0" anchor="t">
+          <a:bodyPr wrap="square" lIns="0" tIns="0" rIns="0" bIns="0" anchor="t">
             <a:spAutoFit/>
           </a:bodyPr>
           <a:lstStyle/>
@@ -36122,7 +35443,7 @@
           <a:noFill/>
         </p:spPr>
         <p:txBody>
-          <a:bodyPr wrap="square" lIns="0" rIns="0" tIns="0" bIns="0" anchor="t">
+          <a:bodyPr wrap="square" lIns="0" tIns="0" rIns="0" bIns="0" anchor="t">
             <a:spAutoFit/>
           </a:bodyPr>
           <a:lstStyle/>
@@ -36211,7 +35532,7 @@
           <a:noFill/>
         </p:spPr>
         <p:txBody>
-          <a:bodyPr wrap="square" lIns="0" rIns="0" tIns="0" bIns="0" anchor="t">
+          <a:bodyPr wrap="square" lIns="0" tIns="0" rIns="0" bIns="0" anchor="t">
             <a:spAutoFit/>
           </a:bodyPr>
           <a:lstStyle/>
@@ -36256,7 +35577,7 @@
           <a:noFill/>
         </p:spPr>
         <p:txBody>
-          <a:bodyPr wrap="square" lIns="0" rIns="0" tIns="0" bIns="0" anchor="t">
+          <a:bodyPr wrap="square" lIns="0" tIns="0" rIns="0" bIns="0" anchor="t">
             <a:spAutoFit/>
           </a:bodyPr>
           <a:lstStyle/>
@@ -36301,7 +35622,7 @@
           <a:noFill/>
         </p:spPr>
         <p:txBody>
-          <a:bodyPr wrap="square" lIns="0" rIns="0" tIns="0" bIns="0" anchor="t">
+          <a:bodyPr wrap="square" lIns="0" tIns="0" rIns="0" bIns="0" anchor="t">
             <a:spAutoFit/>
           </a:bodyPr>
           <a:lstStyle/>
@@ -36390,7 +35711,7 @@
           <a:noFill/>
         </p:spPr>
         <p:txBody>
-          <a:bodyPr wrap="square" lIns="0" rIns="0" tIns="0" bIns="0" anchor="t">
+          <a:bodyPr wrap="square" lIns="0" tIns="0" rIns="0" bIns="0" anchor="t">
             <a:spAutoFit/>
           </a:bodyPr>
           <a:lstStyle/>
@@ -36435,7 +35756,7 @@
           <a:noFill/>
         </p:spPr>
         <p:txBody>
-          <a:bodyPr wrap="square" lIns="0" rIns="0" tIns="0" bIns="0" anchor="t">
+          <a:bodyPr wrap="square" lIns="0" tIns="0" rIns="0" bIns="0" anchor="t">
             <a:spAutoFit/>
           </a:bodyPr>
           <a:lstStyle/>
@@ -36480,7 +35801,7 @@
           <a:noFill/>
         </p:spPr>
         <p:txBody>
-          <a:bodyPr wrap="square" lIns="0" rIns="0" tIns="0" bIns="0" anchor="t">
+          <a:bodyPr wrap="square" lIns="0" tIns="0" rIns="0" bIns="0" anchor="t">
             <a:spAutoFit/>
           </a:bodyPr>
           <a:lstStyle/>
@@ -36569,7 +35890,7 @@
           <a:noFill/>
         </p:spPr>
         <p:txBody>
-          <a:bodyPr wrap="square" lIns="0" rIns="0" tIns="0" bIns="0" anchor="t">
+          <a:bodyPr wrap="square" lIns="0" tIns="0" rIns="0" bIns="0" anchor="t">
             <a:spAutoFit/>
           </a:bodyPr>
           <a:lstStyle/>
@@ -36614,7 +35935,7 @@
           <a:noFill/>
         </p:spPr>
         <p:txBody>
-          <a:bodyPr wrap="square" lIns="0" rIns="0" tIns="0" bIns="0" anchor="t">
+          <a:bodyPr wrap="square" lIns="0" tIns="0" rIns="0" bIns="0" anchor="t">
             <a:spAutoFit/>
           </a:bodyPr>
           <a:lstStyle/>
@@ -36659,7 +35980,7 @@
           <a:noFill/>
         </p:spPr>
         <p:txBody>
-          <a:bodyPr wrap="square" lIns="0" rIns="0" tIns="0" bIns="0" anchor="t">
+          <a:bodyPr wrap="square" lIns="0" tIns="0" rIns="0" bIns="0" anchor="t">
             <a:spAutoFit/>
           </a:bodyPr>
           <a:lstStyle/>
@@ -36748,7 +36069,7 @@
           <a:noFill/>
         </p:spPr>
         <p:txBody>
-          <a:bodyPr wrap="square" lIns="0" rIns="0" tIns="0" bIns="0" anchor="t">
+          <a:bodyPr wrap="square" lIns="0" tIns="0" rIns="0" bIns="0" anchor="t">
             <a:spAutoFit/>
           </a:bodyPr>
           <a:lstStyle/>
@@ -36793,7 +36114,7 @@
           <a:noFill/>
         </p:spPr>
         <p:txBody>
-          <a:bodyPr wrap="square" lIns="0" rIns="0" tIns="0" bIns="0" anchor="t">
+          <a:bodyPr wrap="square" lIns="0" tIns="0" rIns="0" bIns="0" anchor="t">
             <a:spAutoFit/>
           </a:bodyPr>
           <a:lstStyle/>
@@ -36838,7 +36159,7 @@
           <a:noFill/>
         </p:spPr>
         <p:txBody>
-          <a:bodyPr wrap="square" lIns="0" rIns="0" tIns="0" bIns="0" anchor="t">
+          <a:bodyPr wrap="square" lIns="0" tIns="0" rIns="0" bIns="0" anchor="t">
             <a:spAutoFit/>
           </a:bodyPr>
           <a:lstStyle/>
@@ -36927,7 +36248,7 @@
           <a:noFill/>
         </p:spPr>
         <p:txBody>
-          <a:bodyPr wrap="square" lIns="0" rIns="0" tIns="0" bIns="0" anchor="t">
+          <a:bodyPr wrap="square" lIns="0" tIns="0" rIns="0" bIns="0" anchor="t">
             <a:spAutoFit/>
           </a:bodyPr>
           <a:lstStyle/>
@@ -36972,7 +36293,7 @@
           <a:noFill/>
         </p:spPr>
         <p:txBody>
-          <a:bodyPr wrap="square" lIns="0" rIns="0" tIns="0" bIns="0" anchor="t">
+          <a:bodyPr wrap="square" lIns="0" tIns="0" rIns="0" bIns="0" anchor="t">
             <a:spAutoFit/>
           </a:bodyPr>
           <a:lstStyle/>
@@ -37017,7 +36338,7 @@
           <a:noFill/>
         </p:spPr>
         <p:txBody>
-          <a:bodyPr wrap="square" lIns="0" rIns="0" tIns="0" bIns="0" anchor="t">
+          <a:bodyPr wrap="square" lIns="0" tIns="0" rIns="0" bIns="0" anchor="t">
             <a:spAutoFit/>
           </a:bodyPr>
           <a:lstStyle/>
@@ -37106,7 +36427,7 @@
           <a:noFill/>
         </p:spPr>
         <p:txBody>
-          <a:bodyPr wrap="square" lIns="0" rIns="0" tIns="0" bIns="0" anchor="t">
+          <a:bodyPr wrap="square" lIns="0" tIns="0" rIns="0" bIns="0" anchor="t">
             <a:spAutoFit/>
           </a:bodyPr>
           <a:lstStyle/>
@@ -37151,7 +36472,7 @@
           <a:noFill/>
         </p:spPr>
         <p:txBody>
-          <a:bodyPr wrap="square" lIns="0" rIns="0" tIns="0" bIns="0" anchor="t">
+          <a:bodyPr wrap="square" lIns="0" tIns="0" rIns="0" bIns="0" anchor="t">
             <a:spAutoFit/>
           </a:bodyPr>
           <a:lstStyle/>
@@ -37196,7 +36517,7 @@
           <a:noFill/>
         </p:spPr>
         <p:txBody>
-          <a:bodyPr wrap="square" lIns="0" rIns="0" tIns="0" bIns="0" anchor="t">
+          <a:bodyPr wrap="square" lIns="0" tIns="0" rIns="0" bIns="0" anchor="t">
             <a:spAutoFit/>
           </a:bodyPr>
           <a:lstStyle/>
@@ -37285,7 +36606,7 @@
           <a:noFill/>
         </p:spPr>
         <p:txBody>
-          <a:bodyPr wrap="square" lIns="0" rIns="0" tIns="0" bIns="0" anchor="t">
+          <a:bodyPr wrap="square" lIns="0" tIns="0" rIns="0" bIns="0" anchor="t">
             <a:spAutoFit/>
           </a:bodyPr>
           <a:lstStyle/>
@@ -37330,7 +36651,7 @@
           <a:noFill/>
         </p:spPr>
         <p:txBody>
-          <a:bodyPr wrap="square" lIns="0" rIns="0" tIns="0" bIns="0" anchor="t">
+          <a:bodyPr wrap="square" lIns="0" tIns="0" rIns="0" bIns="0" anchor="t">
             <a:spAutoFit/>
           </a:bodyPr>
           <a:lstStyle/>
@@ -37375,7 +36696,7 @@
           <a:noFill/>
         </p:spPr>
         <p:txBody>
-          <a:bodyPr wrap="square" lIns="0" rIns="0" tIns="0" bIns="0" anchor="t">
+          <a:bodyPr wrap="square" lIns="0" tIns="0" rIns="0" bIns="0" anchor="t">
             <a:spAutoFit/>
           </a:bodyPr>
           <a:lstStyle/>
@@ -37464,7 +36785,7 @@
           <a:noFill/>
         </p:spPr>
         <p:txBody>
-          <a:bodyPr wrap="square" lIns="0" rIns="0" tIns="0" bIns="0" anchor="t">
+          <a:bodyPr wrap="square" lIns="0" tIns="0" rIns="0" bIns="0" anchor="t">
             <a:spAutoFit/>
           </a:bodyPr>
           <a:lstStyle/>
@@ -37509,7 +36830,7 @@
           <a:noFill/>
         </p:spPr>
         <p:txBody>
-          <a:bodyPr wrap="square" lIns="0" rIns="0" tIns="0" bIns="0" anchor="t">
+          <a:bodyPr wrap="square" lIns="0" tIns="0" rIns="0" bIns="0" anchor="t">
             <a:spAutoFit/>
           </a:bodyPr>
           <a:lstStyle/>
@@ -37554,7 +36875,7 @@
           <a:noFill/>
         </p:spPr>
         <p:txBody>
-          <a:bodyPr wrap="square" lIns="0" rIns="0" tIns="0" bIns="0" anchor="t">
+          <a:bodyPr wrap="square" lIns="0" tIns="0" rIns="0" bIns="0" anchor="t">
             <a:spAutoFit/>
           </a:bodyPr>
           <a:lstStyle/>
@@ -37643,7 +36964,7 @@
           <a:noFill/>
         </p:spPr>
         <p:txBody>
-          <a:bodyPr wrap="square" lIns="0" rIns="0" tIns="0" bIns="0" anchor="t">
+          <a:bodyPr wrap="square" lIns="0" tIns="0" rIns="0" bIns="0" anchor="t">
             <a:spAutoFit/>
           </a:bodyPr>
           <a:lstStyle/>
@@ -37688,7 +37009,7 @@
           <a:noFill/>
         </p:spPr>
         <p:txBody>
-          <a:bodyPr wrap="square" lIns="0" rIns="0" tIns="0" bIns="0" anchor="t">
+          <a:bodyPr wrap="square" lIns="0" tIns="0" rIns="0" bIns="0" anchor="t">
             <a:spAutoFit/>
           </a:bodyPr>
           <a:lstStyle/>
@@ -37733,7 +37054,7 @@
           <a:noFill/>
         </p:spPr>
         <p:txBody>
-          <a:bodyPr wrap="square" lIns="0" rIns="0" tIns="0" bIns="0" anchor="t">
+          <a:bodyPr wrap="square" lIns="0" tIns="0" rIns="0" bIns="0" anchor="t">
             <a:spAutoFit/>
           </a:bodyPr>
           <a:lstStyle/>
@@ -37822,7 +37143,7 @@
           <a:noFill/>
         </p:spPr>
         <p:txBody>
-          <a:bodyPr wrap="square" lIns="0" rIns="0" tIns="0" bIns="0" anchor="t">
+          <a:bodyPr wrap="square" lIns="0" tIns="0" rIns="0" bIns="0" anchor="t">
             <a:spAutoFit/>
           </a:bodyPr>
           <a:lstStyle/>
@@ -37867,7 +37188,7 @@
           <a:noFill/>
         </p:spPr>
         <p:txBody>
-          <a:bodyPr wrap="square" lIns="0" rIns="0" tIns="0" bIns="0" anchor="t">
+          <a:bodyPr wrap="square" lIns="0" tIns="0" rIns="0" bIns="0" anchor="t">
             <a:spAutoFit/>
           </a:bodyPr>
           <a:lstStyle/>
@@ -37912,7 +37233,7 @@
           <a:noFill/>
         </p:spPr>
         <p:txBody>
-          <a:bodyPr wrap="square" lIns="0" rIns="0" tIns="0" bIns="0" anchor="t">
+          <a:bodyPr wrap="square" lIns="0" tIns="0" rIns="0" bIns="0" anchor="t">
             <a:spAutoFit/>
           </a:bodyPr>
           <a:lstStyle/>
@@ -38001,7 +37322,7 @@
           <a:noFill/>
         </p:spPr>
         <p:txBody>
-          <a:bodyPr wrap="square" lIns="0" rIns="0" tIns="0" bIns="0" anchor="t">
+          <a:bodyPr wrap="square" lIns="0" tIns="0" rIns="0" bIns="0" anchor="t">
             <a:spAutoFit/>
           </a:bodyPr>
           <a:lstStyle/>
@@ -38046,7 +37367,7 @@
           <a:noFill/>
         </p:spPr>
         <p:txBody>
-          <a:bodyPr wrap="square" lIns="0" rIns="0" tIns="0" bIns="0" anchor="t">
+          <a:bodyPr wrap="square" lIns="0" tIns="0" rIns="0" bIns="0" anchor="t">
             <a:spAutoFit/>
           </a:bodyPr>
           <a:lstStyle/>
@@ -38091,7 +37412,7 @@
           <a:noFill/>
         </p:spPr>
         <p:txBody>
-          <a:bodyPr wrap="square" lIns="0" rIns="0" tIns="0" bIns="0" anchor="t">
+          <a:bodyPr wrap="square" lIns="0" tIns="0" rIns="0" bIns="0" anchor="t">
             <a:spAutoFit/>
           </a:bodyPr>
           <a:lstStyle/>
@@ -38180,7 +37501,7 @@
           <a:noFill/>
         </p:spPr>
         <p:txBody>
-          <a:bodyPr wrap="square" lIns="0" rIns="0" tIns="0" bIns="0" anchor="t">
+          <a:bodyPr wrap="square" lIns="0" tIns="0" rIns="0" bIns="0" anchor="t">
             <a:spAutoFit/>
           </a:bodyPr>
           <a:lstStyle/>
@@ -38225,7 +37546,7 @@
           <a:noFill/>
         </p:spPr>
         <p:txBody>
-          <a:bodyPr wrap="square" lIns="0" rIns="0" tIns="0" bIns="0" anchor="t">
+          <a:bodyPr wrap="square" lIns="0" tIns="0" rIns="0" bIns="0" anchor="t">
             <a:spAutoFit/>
           </a:bodyPr>
           <a:lstStyle/>
@@ -38270,7 +37591,7 @@
           <a:noFill/>
         </p:spPr>
         <p:txBody>
-          <a:bodyPr wrap="square" lIns="0" rIns="0" tIns="0" bIns="0" anchor="t">
+          <a:bodyPr wrap="square" lIns="0" tIns="0" rIns="0" bIns="0" anchor="t">
             <a:spAutoFit/>
           </a:bodyPr>
           <a:lstStyle/>
@@ -38359,7 +37680,7 @@
           <a:noFill/>
         </p:spPr>
         <p:txBody>
-          <a:bodyPr wrap="square" lIns="0" rIns="0" tIns="0" bIns="0" anchor="t">
+          <a:bodyPr wrap="square" lIns="0" tIns="0" rIns="0" bIns="0" anchor="t">
             <a:spAutoFit/>
           </a:bodyPr>
           <a:lstStyle/>
@@ -38404,7 +37725,7 @@
           <a:noFill/>
         </p:spPr>
         <p:txBody>
-          <a:bodyPr wrap="square" lIns="0" rIns="0" tIns="0" bIns="0" anchor="t">
+          <a:bodyPr wrap="square" lIns="0" tIns="0" rIns="0" bIns="0" anchor="t">
             <a:spAutoFit/>
           </a:bodyPr>
           <a:lstStyle/>
@@ -38449,7 +37770,7 @@
           <a:noFill/>
         </p:spPr>
         <p:txBody>
-          <a:bodyPr wrap="square" lIns="0" rIns="0" tIns="0" bIns="0" anchor="t">
+          <a:bodyPr wrap="square" lIns="0" tIns="0" rIns="0" bIns="0" anchor="t">
             <a:spAutoFit/>
           </a:bodyPr>
           <a:lstStyle/>
@@ -38538,7 +37859,7 @@
           <a:noFill/>
         </p:spPr>
         <p:txBody>
-          <a:bodyPr wrap="square" lIns="0" rIns="0" tIns="0" bIns="0" anchor="t">
+          <a:bodyPr wrap="square" lIns="0" tIns="0" rIns="0" bIns="0" anchor="t">
             <a:spAutoFit/>
           </a:bodyPr>
           <a:lstStyle/>
@@ -38583,7 +37904,7 @@
           <a:noFill/>
         </p:spPr>
         <p:txBody>
-          <a:bodyPr wrap="square" lIns="0" rIns="0" tIns="0" bIns="0" anchor="t">
+          <a:bodyPr wrap="square" lIns="0" tIns="0" rIns="0" bIns="0" anchor="t">
             <a:spAutoFit/>
           </a:bodyPr>
           <a:lstStyle/>
@@ -38628,7 +37949,7 @@
           <a:noFill/>
         </p:spPr>
         <p:txBody>
-          <a:bodyPr wrap="square" lIns="0" rIns="0" tIns="0" bIns="0" anchor="t">
+          <a:bodyPr wrap="square" lIns="0" tIns="0" rIns="0" bIns="0" anchor="t">
             <a:spAutoFit/>
           </a:bodyPr>
           <a:lstStyle/>
@@ -38717,7 +38038,7 @@
           <a:noFill/>
         </p:spPr>
         <p:txBody>
-          <a:bodyPr wrap="square" lIns="0" rIns="0" tIns="0" bIns="0" anchor="t">
+          <a:bodyPr wrap="square" lIns="0" tIns="0" rIns="0" bIns="0" anchor="t">
             <a:spAutoFit/>
           </a:bodyPr>
           <a:lstStyle/>
@@ -38762,7 +38083,7 @@
           <a:noFill/>
         </p:spPr>
         <p:txBody>
-          <a:bodyPr wrap="square" lIns="0" rIns="0" tIns="0" bIns="0" anchor="t">
+          <a:bodyPr wrap="square" lIns="0" tIns="0" rIns="0" bIns="0" anchor="t">
             <a:spAutoFit/>
           </a:bodyPr>
           <a:lstStyle/>
@@ -38807,7 +38128,7 @@
           <a:noFill/>
         </p:spPr>
         <p:txBody>
-          <a:bodyPr wrap="square" lIns="0" rIns="0" tIns="0" bIns="0" anchor="t">
+          <a:bodyPr wrap="square" lIns="0" tIns="0" rIns="0" bIns="0" anchor="t">
             <a:spAutoFit/>
           </a:bodyPr>
           <a:lstStyle/>
@@ -38896,7 +38217,7 @@
           <a:noFill/>
         </p:spPr>
         <p:txBody>
-          <a:bodyPr wrap="square" lIns="0" rIns="0" tIns="0" bIns="0" anchor="t">
+          <a:bodyPr wrap="square" lIns="0" tIns="0" rIns="0" bIns="0" anchor="t">
             <a:spAutoFit/>
           </a:bodyPr>
           <a:lstStyle/>
@@ -38941,7 +38262,7 @@
           <a:noFill/>
         </p:spPr>
         <p:txBody>
-          <a:bodyPr wrap="square" lIns="0" rIns="0" tIns="0" bIns="0" anchor="t">
+          <a:bodyPr wrap="square" lIns="0" tIns="0" rIns="0" bIns="0" anchor="t">
             <a:spAutoFit/>
           </a:bodyPr>
           <a:lstStyle/>
@@ -38986,7 +38307,7 @@
           <a:noFill/>
         </p:spPr>
         <p:txBody>
-          <a:bodyPr wrap="square" lIns="0" rIns="0" tIns="0" bIns="0" anchor="t">
+          <a:bodyPr wrap="square" lIns="0" tIns="0" rIns="0" bIns="0" anchor="t">
             <a:spAutoFit/>
           </a:bodyPr>
           <a:lstStyle/>
@@ -39075,7 +38396,7 @@
           <a:noFill/>
         </p:spPr>
         <p:txBody>
-          <a:bodyPr wrap="square" lIns="0" rIns="0" tIns="0" bIns="0" anchor="t">
+          <a:bodyPr wrap="square" lIns="0" tIns="0" rIns="0" bIns="0" anchor="t">
             <a:spAutoFit/>
           </a:bodyPr>
           <a:lstStyle/>
@@ -39120,7 +38441,7 @@
           <a:noFill/>
         </p:spPr>
         <p:txBody>
-          <a:bodyPr wrap="square" lIns="0" rIns="0" tIns="0" bIns="0" anchor="t">
+          <a:bodyPr wrap="square" lIns="0" tIns="0" rIns="0" bIns="0" anchor="t">
             <a:spAutoFit/>
           </a:bodyPr>
           <a:lstStyle/>
@@ -39165,7 +38486,7 @@
           <a:noFill/>
         </p:spPr>
         <p:txBody>
-          <a:bodyPr wrap="square" lIns="0" rIns="0" tIns="0" bIns="0" anchor="t">
+          <a:bodyPr wrap="square" lIns="0" tIns="0" rIns="0" bIns="0" anchor="t">
             <a:spAutoFit/>
           </a:bodyPr>
           <a:lstStyle/>
@@ -39254,7 +38575,7 @@
           <a:noFill/>
         </p:spPr>
         <p:txBody>
-          <a:bodyPr wrap="square" lIns="0" rIns="0" tIns="0" bIns="0" anchor="t">
+          <a:bodyPr wrap="square" lIns="0" tIns="0" rIns="0" bIns="0" anchor="t">
             <a:spAutoFit/>
           </a:bodyPr>
           <a:lstStyle/>
@@ -39299,7 +38620,7 @@
           <a:noFill/>
         </p:spPr>
         <p:txBody>
-          <a:bodyPr wrap="square" lIns="0" rIns="0" tIns="0" bIns="0" anchor="t">
+          <a:bodyPr wrap="square" lIns="0" tIns="0" rIns="0" bIns="0" anchor="t">
             <a:spAutoFit/>
           </a:bodyPr>
           <a:lstStyle/>
@@ -39344,7 +38665,7 @@
           <a:noFill/>
         </p:spPr>
         <p:txBody>
-          <a:bodyPr wrap="square" lIns="0" rIns="0" tIns="0" bIns="0" anchor="t">
+          <a:bodyPr wrap="square" lIns="0" tIns="0" rIns="0" bIns="0" anchor="t">
             <a:spAutoFit/>
           </a:bodyPr>
           <a:lstStyle/>
@@ -39433,7 +38754,7 @@
           <a:noFill/>
         </p:spPr>
         <p:txBody>
-          <a:bodyPr wrap="square" lIns="0" rIns="0" tIns="0" bIns="0" anchor="t">
+          <a:bodyPr wrap="square" lIns="0" tIns="0" rIns="0" bIns="0" anchor="t">
             <a:spAutoFit/>
           </a:bodyPr>
           <a:lstStyle/>
@@ -39478,7 +38799,7 @@
           <a:noFill/>
         </p:spPr>
         <p:txBody>
-          <a:bodyPr wrap="square" lIns="0" rIns="0" tIns="0" bIns="0" anchor="t">
+          <a:bodyPr wrap="square" lIns="0" tIns="0" rIns="0" bIns="0" anchor="t">
             <a:spAutoFit/>
           </a:bodyPr>
           <a:lstStyle/>
@@ -39523,7 +38844,7 @@
           <a:noFill/>
         </p:spPr>
         <p:txBody>
-          <a:bodyPr wrap="square" lIns="0" rIns="0" tIns="0" bIns="0" anchor="t">
+          <a:bodyPr wrap="square" lIns="0" tIns="0" rIns="0" bIns="0" anchor="t">
             <a:spAutoFit/>
           </a:bodyPr>
           <a:lstStyle/>
@@ -39568,7 +38889,7 @@
           <a:noFill/>
         </p:spPr>
         <p:txBody>
-          <a:bodyPr wrap="square" lIns="0" rIns="0" tIns="0" bIns="0" anchor="t">
+          <a:bodyPr wrap="square" lIns="0" tIns="0" rIns="0" bIns="0" anchor="t">
             <a:spAutoFit/>
           </a:bodyPr>
           <a:lstStyle/>
@@ -39648,7 +38969,7 @@
           <a:noFill/>
         </p:spPr>
         <p:txBody>
-          <a:bodyPr wrap="square" lIns="0" rIns="0" tIns="0" bIns="0" anchor="t">
+          <a:bodyPr wrap="square" lIns="0" tIns="0" rIns="0" bIns="0" anchor="t">
             <a:spAutoFit/>
           </a:bodyPr>
           <a:lstStyle/>
@@ -39693,7 +39014,7 @@
           <a:noFill/>
         </p:spPr>
         <p:txBody>
-          <a:bodyPr wrap="square" lIns="0" rIns="0" tIns="0" bIns="0" anchor="t">
+          <a:bodyPr wrap="square" lIns="0" tIns="0" rIns="0" bIns="0" anchor="t">
             <a:spAutoFit/>
           </a:bodyPr>
           <a:lstStyle/>
@@ -39773,7 +39094,7 @@
           <a:noFill/>
         </p:spPr>
         <p:txBody>
-          <a:bodyPr wrap="square" lIns="0" rIns="0" tIns="0" bIns="0" anchor="t">
+          <a:bodyPr wrap="square" lIns="0" tIns="0" rIns="0" bIns="0" anchor="t">
             <a:spAutoFit/>
           </a:bodyPr>
           <a:lstStyle/>
@@ -39818,7 +39139,7 @@
           <a:noFill/>
         </p:spPr>
         <p:txBody>
-          <a:bodyPr wrap="square" lIns="0" rIns="0" tIns="0" bIns="0" anchor="t">
+          <a:bodyPr wrap="square" lIns="0" tIns="0" rIns="0" bIns="0" anchor="t">
             <a:spAutoFit/>
           </a:bodyPr>
           <a:lstStyle/>
@@ -39898,7 +39219,7 @@
           <a:noFill/>
         </p:spPr>
         <p:txBody>
-          <a:bodyPr wrap="square" lIns="0" rIns="0" tIns="0" bIns="0" anchor="t">
+          <a:bodyPr wrap="square" lIns="0" tIns="0" rIns="0" bIns="0" anchor="t">
             <a:spAutoFit/>
           </a:bodyPr>
           <a:lstStyle/>
@@ -39943,7 +39264,7 @@
           <a:noFill/>
         </p:spPr>
         <p:txBody>
-          <a:bodyPr wrap="square" lIns="0" rIns="0" tIns="0" bIns="0" anchor="t">
+          <a:bodyPr wrap="square" lIns="0" tIns="0" rIns="0" bIns="0" anchor="t">
             <a:spAutoFit/>
           </a:bodyPr>
           <a:lstStyle/>
@@ -40023,7 +39344,7 @@
           <a:noFill/>
         </p:spPr>
         <p:txBody>
-          <a:bodyPr wrap="square" lIns="0" rIns="0" tIns="0" bIns="0" anchor="t">
+          <a:bodyPr wrap="square" lIns="0" tIns="0" rIns="0" bIns="0" anchor="t">
             <a:spAutoFit/>
           </a:bodyPr>
           <a:lstStyle/>
@@ -40068,7 +39389,7 @@
           <a:noFill/>
         </p:spPr>
         <p:txBody>
-          <a:bodyPr wrap="square" lIns="0" rIns="0" tIns="0" bIns="0" anchor="t">
+          <a:bodyPr wrap="square" lIns="0" tIns="0" rIns="0" bIns="0" anchor="t">
             <a:spAutoFit/>
           </a:bodyPr>
           <a:lstStyle/>
@@ -40148,7 +39469,7 @@
           <a:noFill/>
         </p:spPr>
         <p:txBody>
-          <a:bodyPr wrap="square" lIns="0" rIns="0" tIns="0" bIns="0" anchor="t">
+          <a:bodyPr wrap="square" lIns="0" tIns="0" rIns="0" bIns="0" anchor="t">
             <a:spAutoFit/>
           </a:bodyPr>
           <a:lstStyle/>
@@ -40193,7 +39514,7 @@
           <a:noFill/>
         </p:spPr>
         <p:txBody>
-          <a:bodyPr wrap="square" lIns="0" rIns="0" tIns="0" bIns="0" anchor="t">
+          <a:bodyPr wrap="square" lIns="0" tIns="0" rIns="0" bIns="0" anchor="t">
             <a:spAutoFit/>
           </a:bodyPr>
           <a:lstStyle/>
@@ -40273,7 +39594,7 @@
           <a:noFill/>
         </p:spPr>
         <p:txBody>
-          <a:bodyPr wrap="square" lIns="0" rIns="0" tIns="0" bIns="0" anchor="t">
+          <a:bodyPr wrap="square" lIns="0" tIns="0" rIns="0" bIns="0" anchor="t">
             <a:spAutoFit/>
           </a:bodyPr>
           <a:lstStyle/>
@@ -40318,7 +39639,7 @@
           <a:noFill/>
         </p:spPr>
         <p:txBody>
-          <a:bodyPr wrap="square" lIns="0" rIns="0" tIns="0" bIns="0" anchor="t">
+          <a:bodyPr wrap="square" lIns="0" tIns="0" rIns="0" bIns="0" anchor="t">
             <a:spAutoFit/>
           </a:bodyPr>
           <a:lstStyle/>
@@ -40398,7 +39719,7 @@
           <a:noFill/>
         </p:spPr>
         <p:txBody>
-          <a:bodyPr wrap="square" lIns="0" rIns="0" tIns="0" bIns="0" anchor="t">
+          <a:bodyPr wrap="square" lIns="0" tIns="0" rIns="0" bIns="0" anchor="t">
             <a:spAutoFit/>
           </a:bodyPr>
           <a:lstStyle/>
@@ -40443,7 +39764,7 @@
           <a:noFill/>
         </p:spPr>
         <p:txBody>
-          <a:bodyPr wrap="square" lIns="0" rIns="0" tIns="0" bIns="0" anchor="t">
+          <a:bodyPr wrap="square" lIns="0" tIns="0" rIns="0" bIns="0" anchor="t">
             <a:spAutoFit/>
           </a:bodyPr>
           <a:lstStyle/>
@@ -40523,7 +39844,7 @@
           <a:noFill/>
         </p:spPr>
         <p:txBody>
-          <a:bodyPr wrap="square" lIns="0" rIns="0" tIns="0" bIns="0" anchor="t">
+          <a:bodyPr wrap="square" lIns="0" tIns="0" rIns="0" bIns="0" anchor="t">
             <a:spAutoFit/>
           </a:bodyPr>
           <a:lstStyle/>
@@ -40560,7 +39881,7 @@
 </file>
 
 <file path=ppt/slides/slide9.xml><?xml version="1.0" encoding="utf-8"?>
-<p:sld xmlns:a="http://schemas.openxmlformats.org/drawingml/2006/main" xmlns:p="http://schemas.openxmlformats.org/presentationml/2006/main" xmlns:r="http://schemas.openxmlformats.org/officeDocument/2006/relationships">
+<p:sld xmlns:a="http://schemas.openxmlformats.org/drawingml/2006/main" xmlns:r="http://schemas.openxmlformats.org/officeDocument/2006/relationships" xmlns:p="http://schemas.openxmlformats.org/presentationml/2006/main">
   <p:cSld>
     <p:bg>
       <p:bgPr>
@@ -40576,7 +39897,14 @@
         <p:cNvGrpSpPr/>
         <p:nvPr/>
       </p:nvGrpSpPr>
-      <p:grpSpPr/>
+      <p:grpSpPr>
+        <a:xfrm>
+          <a:off x="0" y="0"/>
+          <a:ext cx="0" cy="0"/>
+          <a:chOff x="0" y="0"/>
+          <a:chExt cx="0" cy="0"/>
+        </a:xfrm>
+      </p:grpSpPr>
       <p:sp>
         <p:nvSpPr>
           <p:cNvPr id="2" name="TextBox 1"/>
@@ -40594,7 +39922,7 @@
           <a:noFill/>
         </p:spPr>
         <p:txBody>
-          <a:bodyPr wrap="square" lIns="0" rIns="0" tIns="0" bIns="0" anchor="t">
+          <a:bodyPr wrap="square" lIns="0" tIns="0" rIns="0" bIns="0" anchor="t">
             <a:spAutoFit/>
           </a:bodyPr>
           <a:lstStyle/>
@@ -40639,7 +39967,7 @@
           <a:noFill/>
         </p:spPr>
         <p:txBody>
-          <a:bodyPr wrap="square" lIns="0" rIns="0" tIns="0" bIns="0" anchor="t">
+          <a:bodyPr wrap="square" lIns="0" tIns="0" rIns="0" bIns="0" anchor="t">
             <a:spAutoFit/>
           </a:bodyPr>
           <a:lstStyle/>
@@ -40704,51 +40032,6 @@
       </p:cxnSp>
       <p:sp>
         <p:nvSpPr>
-          <p:cNvPr id="5" name="TextBox 4"/>
-          <p:cNvSpPr txBox="1"/>
-          <p:nvPr/>
-        </p:nvSpPr>
-        <p:spPr>
-          <a:xfrm>
-            <a:off x="777240" y="6382512"/>
-            <a:ext cx="5486400" cy="182880"/>
-          </a:xfrm>
-          <a:prstGeom prst="rect">
-            <a:avLst/>
-          </a:prstGeom>
-          <a:noFill/>
-        </p:spPr>
-        <p:txBody>
-          <a:bodyPr wrap="square" lIns="0" rIns="0" tIns="0" bIns="0" anchor="t">
-            <a:spAutoFit/>
-          </a:bodyPr>
-          <a:lstStyle/>
-          <a:p>
-            <a:pPr algn="l">
-              <a:lnSpc>
-                <a:spcPct val="125000"/>
-              </a:lnSpc>
-              <a:spcBef>
-                <a:spcPts val="0"/>
-              </a:spcBef>
-              <a:spcAft>
-                <a:spcPts val="0"/>
-              </a:spcAft>
-            </a:pPr>
-            <a:r>
-              <a:rPr sz="900" b="0" i="1">
-                <a:solidFill>
-                  <a:srgbClr val="5D6470"/>
-                </a:solidFill>
-                <a:latin typeface="IBM Plex Serif"/>
-              </a:rPr>
-              <a:t>NextFrame · discrete mathematics, semester VII</a:t>
-            </a:r>
-          </a:p>
-        </p:txBody>
-      </p:sp>
-      <p:sp>
-        <p:nvSpPr>
           <p:cNvPr id="6" name="TextBox 5"/>
           <p:cNvSpPr txBox="1"/>
           <p:nvPr/>
@@ -40764,7 +40047,7 @@
           <a:noFill/>
         </p:spPr>
         <p:txBody>
-          <a:bodyPr wrap="square" lIns="0" rIns="0" tIns="0" bIns="0" anchor="t">
+          <a:bodyPr wrap="square" lIns="0" tIns="0" rIns="0" bIns="0" anchor="t">
             <a:spAutoFit/>
           </a:bodyPr>
           <a:lstStyle/>
@@ -40809,7 +40092,7 @@
           <a:noFill/>
         </p:spPr>
         <p:txBody>
-          <a:bodyPr wrap="square" lIns="0" rIns="0" tIns="0" bIns="0" anchor="t">
+          <a:bodyPr wrap="square" lIns="0" tIns="0" rIns="0" bIns="0" anchor="t">
             <a:spAutoFit/>
           </a:bodyPr>
           <a:lstStyle/>
@@ -40854,7 +40137,7 @@
           <a:noFill/>
         </p:spPr>
         <p:txBody>
-          <a:bodyPr wrap="square" lIns="0" rIns="0" tIns="0" bIns="0" anchor="t">
+          <a:bodyPr wrap="square" lIns="0" tIns="0" rIns="0" bIns="0" anchor="t">
             <a:spAutoFit/>
           </a:bodyPr>
           <a:lstStyle/>
@@ -40899,7 +40182,7 @@
           <a:noFill/>
         </p:spPr>
         <p:txBody>
-          <a:bodyPr wrap="square" lIns="0" rIns="0" tIns="0" bIns="0" anchor="t">
+          <a:bodyPr wrap="square" lIns="0" tIns="0" rIns="0" bIns="0" anchor="t">
             <a:spAutoFit/>
           </a:bodyPr>
           <a:lstStyle/>
@@ -40944,7 +40227,7 @@
           <a:noFill/>
         </p:spPr>
         <p:txBody>
-          <a:bodyPr wrap="square" lIns="0" rIns="0" tIns="0" bIns="0" anchor="t">
+          <a:bodyPr wrap="square" lIns="0" tIns="0" rIns="0" bIns="0" anchor="t">
             <a:spAutoFit/>
           </a:bodyPr>
           <a:lstStyle/>
@@ -41024,7 +40307,7 @@
           <a:noFill/>
         </p:spPr>
         <p:txBody>
-          <a:bodyPr wrap="square" lIns="0" rIns="0" tIns="0" bIns="0" anchor="t">
+          <a:bodyPr wrap="square" lIns="0" tIns="0" rIns="0" bIns="0" anchor="t">
             <a:spAutoFit/>
           </a:bodyPr>
           <a:lstStyle/>
@@ -41069,7 +40352,7 @@
           <a:noFill/>
         </p:spPr>
         <p:txBody>
-          <a:bodyPr wrap="square" lIns="0" rIns="0" tIns="0" bIns="0" anchor="t">
+          <a:bodyPr wrap="square" lIns="0" tIns="0" rIns="0" bIns="0" anchor="t">
             <a:spAutoFit/>
           </a:bodyPr>
           <a:lstStyle/>
@@ -41149,7 +40432,7 @@
           <a:noFill/>
         </p:spPr>
         <p:txBody>
-          <a:bodyPr wrap="square" lIns="0" rIns="0" tIns="0" bIns="0" anchor="t">
+          <a:bodyPr wrap="square" lIns="0" tIns="0" rIns="0" bIns="0" anchor="t">
             <a:spAutoFit/>
           </a:bodyPr>
           <a:lstStyle/>
@@ -41194,7 +40477,7 @@
           <a:noFill/>
         </p:spPr>
         <p:txBody>
-          <a:bodyPr wrap="square" lIns="0" rIns="0" tIns="0" bIns="0" anchor="t">
+          <a:bodyPr wrap="square" lIns="0" tIns="0" rIns="0" bIns="0" anchor="t">
             <a:spAutoFit/>
           </a:bodyPr>
           <a:lstStyle/>
@@ -41274,7 +40557,7 @@
           <a:noFill/>
         </p:spPr>
         <p:txBody>
-          <a:bodyPr wrap="square" lIns="0" rIns="0" tIns="0" bIns="0" anchor="t">
+          <a:bodyPr wrap="square" lIns="0" tIns="0" rIns="0" bIns="0" anchor="t">
             <a:spAutoFit/>
           </a:bodyPr>
           <a:lstStyle/>
@@ -41319,7 +40602,7 @@
           <a:noFill/>
         </p:spPr>
         <p:txBody>
-          <a:bodyPr wrap="square" lIns="0" rIns="0" tIns="0" bIns="0" anchor="t">
+          <a:bodyPr wrap="square" lIns="0" tIns="0" rIns="0" bIns="0" anchor="t">
             <a:spAutoFit/>
           </a:bodyPr>
           <a:lstStyle/>
@@ -41399,7 +40682,7 @@
           <a:noFill/>
         </p:spPr>
         <p:txBody>
-          <a:bodyPr wrap="square" lIns="0" rIns="0" tIns="0" bIns="0" anchor="t">
+          <a:bodyPr wrap="square" lIns="0" tIns="0" rIns="0" bIns="0" anchor="t">
             <a:spAutoFit/>
           </a:bodyPr>
           <a:lstStyle/>
@@ -41444,7 +40727,7 @@
           <a:noFill/>
         </p:spPr>
         <p:txBody>
-          <a:bodyPr wrap="square" lIns="0" rIns="0" tIns="0" bIns="0" anchor="t">
+          <a:bodyPr wrap="square" lIns="0" tIns="0" rIns="0" bIns="0" anchor="t">
             <a:spAutoFit/>
           </a:bodyPr>
           <a:lstStyle/>
@@ -41524,7 +40807,7 @@
           <a:noFill/>
         </p:spPr>
         <p:txBody>
-          <a:bodyPr wrap="square" lIns="0" rIns="0" tIns="0" bIns="0" anchor="t">
+          <a:bodyPr wrap="square" lIns="0" tIns="0" rIns="0" bIns="0" anchor="t">
             <a:spAutoFit/>
           </a:bodyPr>
           <a:lstStyle/>
@@ -41569,7 +40852,7 @@
           <a:noFill/>
         </p:spPr>
         <p:txBody>
-          <a:bodyPr wrap="square" lIns="0" rIns="0" tIns="0" bIns="0" anchor="t">
+          <a:bodyPr wrap="square" lIns="0" tIns="0" rIns="0" bIns="0" anchor="t">
             <a:spAutoFit/>
           </a:bodyPr>
           <a:lstStyle/>
@@ -41614,7 +40897,7 @@
           <a:noFill/>
         </p:spPr>
         <p:txBody>
-          <a:bodyPr wrap="square" lIns="0" rIns="0" tIns="0" bIns="0" anchor="t">
+          <a:bodyPr wrap="square" lIns="0" tIns="0" rIns="0" bIns="0" anchor="t">
             <a:spAutoFit/>
           </a:bodyPr>
           <a:lstStyle/>
@@ -41659,7 +40942,7 @@
           <a:noFill/>
         </p:spPr>
         <p:txBody>
-          <a:bodyPr wrap="square" lIns="0" rIns="0" tIns="0" bIns="0" anchor="t">
+          <a:bodyPr wrap="square" lIns="0" tIns="0" rIns="0" bIns="0" anchor="t">
             <a:spAutoFit/>
           </a:bodyPr>
           <a:lstStyle/>
@@ -41739,7 +41022,7 @@
           <a:noFill/>
         </p:spPr>
         <p:txBody>
-          <a:bodyPr wrap="square" lIns="0" rIns="0" tIns="0" bIns="0" anchor="t">
+          <a:bodyPr wrap="square" lIns="0" tIns="0" rIns="0" bIns="0" anchor="t">
             <a:spAutoFit/>
           </a:bodyPr>
           <a:lstStyle/>
@@ -41784,7 +41067,7 @@
           <a:noFill/>
         </p:spPr>
         <p:txBody>
-          <a:bodyPr wrap="square" lIns="0" rIns="0" tIns="0" bIns="0" anchor="t">
+          <a:bodyPr wrap="square" lIns="0" tIns="0" rIns="0" bIns="0" anchor="t">
             <a:spAutoFit/>
           </a:bodyPr>
           <a:lstStyle/>
@@ -41864,7 +41147,7 @@
           <a:noFill/>
         </p:spPr>
         <p:txBody>
-          <a:bodyPr wrap="square" lIns="0" rIns="0" tIns="0" bIns="0" anchor="t">
+          <a:bodyPr wrap="square" lIns="0" tIns="0" rIns="0" bIns="0" anchor="t">
             <a:spAutoFit/>
           </a:bodyPr>
           <a:lstStyle/>
@@ -41909,7 +41192,7 @@
           <a:noFill/>
         </p:spPr>
         <p:txBody>
-          <a:bodyPr wrap="square" lIns="0" rIns="0" tIns="0" bIns="0" anchor="t">
+          <a:bodyPr wrap="square" lIns="0" tIns="0" rIns="0" bIns="0" anchor="t">
             <a:spAutoFit/>
           </a:bodyPr>
           <a:lstStyle/>
@@ -41989,7 +41272,7 @@
           <a:noFill/>
         </p:spPr>
         <p:txBody>
-          <a:bodyPr wrap="square" lIns="0" rIns="0" tIns="0" bIns="0" anchor="t">
+          <a:bodyPr wrap="square" lIns="0" tIns="0" rIns="0" bIns="0" anchor="t">
             <a:spAutoFit/>
           </a:bodyPr>
           <a:lstStyle/>
@@ -42034,7 +41317,7 @@
           <a:noFill/>
         </p:spPr>
         <p:txBody>
-          <a:bodyPr wrap="square" lIns="0" rIns="0" tIns="0" bIns="0" anchor="t">
+          <a:bodyPr wrap="square" lIns="0" tIns="0" rIns="0" bIns="0" anchor="t">
             <a:spAutoFit/>
           </a:bodyPr>
           <a:lstStyle/>
@@ -42114,7 +41397,7 @@
           <a:noFill/>
         </p:spPr>
         <p:txBody>
-          <a:bodyPr wrap="square" lIns="0" rIns="0" tIns="0" bIns="0" anchor="t">
+          <a:bodyPr wrap="square" lIns="0" tIns="0" rIns="0" bIns="0" anchor="t">
             <a:spAutoFit/>
           </a:bodyPr>
           <a:lstStyle/>
@@ -42159,7 +41442,7 @@
           <a:noFill/>
         </p:spPr>
         <p:txBody>
-          <a:bodyPr wrap="square" lIns="0" rIns="0" tIns="0" bIns="0" anchor="t">
+          <a:bodyPr wrap="square" lIns="0" tIns="0" rIns="0" bIns="0" anchor="t">
             <a:spAutoFit/>
           </a:bodyPr>
           <a:lstStyle/>
@@ -42239,7 +41522,7 @@
           <a:noFill/>
         </p:spPr>
         <p:txBody>
-          <a:bodyPr wrap="square" lIns="0" rIns="0" tIns="0" bIns="0" anchor="t">
+          <a:bodyPr wrap="square" lIns="0" tIns="0" rIns="0" bIns="0" anchor="t">
             <a:spAutoFit/>
           </a:bodyPr>
           <a:lstStyle/>
@@ -42284,7 +41567,7 @@
           <a:noFill/>
         </p:spPr>
         <p:txBody>
-          <a:bodyPr wrap="square" lIns="0" rIns="0" tIns="0" bIns="0" anchor="t">
+          <a:bodyPr wrap="square" lIns="0" tIns="0" rIns="0" bIns="0" anchor="t">
             <a:spAutoFit/>
           </a:bodyPr>
           <a:lstStyle/>
@@ -42364,7 +41647,7 @@
           <a:noFill/>
         </p:spPr>
         <p:txBody>
-          <a:bodyPr wrap="square" lIns="0" rIns="0" tIns="0" bIns="0" anchor="t">
+          <a:bodyPr wrap="square" lIns="0" tIns="0" rIns="0" bIns="0" anchor="t">
             <a:spAutoFit/>
           </a:bodyPr>
           <a:lstStyle/>
@@ -42409,7 +41692,7 @@
           <a:noFill/>
         </p:spPr>
         <p:txBody>
-          <a:bodyPr wrap="square" lIns="0" rIns="0" tIns="0" bIns="0" anchor="t">
+          <a:bodyPr wrap="square" lIns="0" tIns="0" rIns="0" bIns="0" anchor="t">
             <a:spAutoFit/>
           </a:bodyPr>
           <a:lstStyle/>
@@ -42489,7 +41772,7 @@
           <a:noFill/>
         </p:spPr>
         <p:txBody>
-          <a:bodyPr wrap="square" lIns="0" rIns="0" tIns="0" bIns="0" anchor="t">
+          <a:bodyPr wrap="square" lIns="0" tIns="0" rIns="0" bIns="0" anchor="t">
             <a:spAutoFit/>
           </a:bodyPr>
           <a:lstStyle/>
@@ -42534,7 +41817,7 @@
           <a:noFill/>
         </p:spPr>
         <p:txBody>
-          <a:bodyPr wrap="square" lIns="0" rIns="0" tIns="0" bIns="0" anchor="t">
+          <a:bodyPr wrap="square" lIns="0" tIns="0" rIns="0" bIns="0" anchor="t">
             <a:spAutoFit/>
           </a:bodyPr>
           <a:lstStyle/>
@@ -42579,7 +41862,7 @@
           <a:noFill/>
         </p:spPr>
         <p:txBody>
-          <a:bodyPr wrap="square" lIns="0" rIns="0" tIns="0" bIns="0" anchor="t">
+          <a:bodyPr wrap="square" lIns="0" tIns="0" rIns="0" bIns="0" anchor="t">
             <a:spAutoFit/>
           </a:bodyPr>
           <a:lstStyle/>
@@ -42624,7 +41907,7 @@
           <a:noFill/>
         </p:spPr>
         <p:txBody>
-          <a:bodyPr wrap="square" lIns="0" rIns="0" tIns="0" bIns="0" anchor="t">
+          <a:bodyPr wrap="square" lIns="0" tIns="0" rIns="0" bIns="0" anchor="t">
             <a:spAutoFit/>
           </a:bodyPr>
           <a:lstStyle/>
@@ -42661,14 +41944,14 @@
 </file>
 
 <file path=ppt/theme/theme1.xml><?xml version="1.0" encoding="utf-8"?>
-<a:theme xmlns:a="http://schemas.openxmlformats.org/drawingml/2006/main" name="Office Theme">
+<a:theme xmlns:a="http://schemas.openxmlformats.org/drawingml/2006/main" xmlns:r="http://schemas.openxmlformats.org/officeDocument/2006/relationships" name="Office Theme">
   <a:themeElements>
     <a:clrScheme name="Office">
       <a:dk1>
-        <a:sysClr val="windowText" lastClr="000000"/>
+        <a:srgbClr val="000000"/>
       </a:dk1>
       <a:lt1>
-        <a:sysClr val="window" lastClr="FFFFFF"/>
+        <a:srgbClr val="FFFFFF"/>
       </a:lt1>
       <a:dk2>
         <a:srgbClr val="1F497D"/>
@@ -42822,7 +42105,7 @@
         </a:gradFill>
       </a:fillStyleLst>
       <a:lnStyleLst>
-        <a:ln w="9525" cap="flat" cmpd="sng" algn="ctr">
+        <a:ln w="9525" cap="flat" cmpd="sng">
           <a:solidFill>
             <a:schemeClr val="phClr">
               <a:shade val="95000"/>
@@ -42831,13 +42114,13 @@
           </a:solidFill>
           <a:prstDash val="solid"/>
         </a:ln>
-        <a:ln w="25400" cap="flat" cmpd="sng" algn="ctr">
+        <a:ln w="25400" cap="flat" cmpd="sng">
           <a:solidFill>
             <a:schemeClr val="phClr"/>
           </a:solidFill>
           <a:prstDash val="solid"/>
         </a:ln>
-        <a:ln w="38100" cap="flat" cmpd="sng" algn="ctr">
+        <a:ln w="38100" cap="flat" cmpd="sng">
           <a:solidFill>
             <a:schemeClr val="phClr"/>
           </a:solidFill>
@@ -42847,7 +42130,7 @@
       <a:effectStyleLst>
         <a:effectStyle>
           <a:effectLst>
-            <a:outerShdw blurRad="40000" dist="20000" dir="5400000" rotWithShape="0">
+            <a:outerShdw blurRad="40000" dist="20000" dir="5400000" algn="b" rotWithShape="0">
               <a:srgbClr val="000000">
                 <a:alpha val="38000"/>
               </a:srgbClr>
@@ -42856,7 +42139,7 @@
         </a:effectStyle>
         <a:effectStyle>
           <a:effectLst>
-            <a:outerShdw blurRad="40000" dist="23000" dir="5400000" rotWithShape="0">
+            <a:outerShdw blurRad="40000" dist="23000" dir="5400000" algn="b" rotWithShape="0">
               <a:srgbClr val="000000">
                 <a:alpha val="35000"/>
               </a:srgbClr>
@@ -42865,13 +42148,13 @@
         </a:effectStyle>
         <a:effectStyle>
           <a:effectLst>
-            <a:outerShdw blurRad="40000" dist="23000" dir="5400000" rotWithShape="0">
+            <a:outerShdw blurRad="40000" dist="23000" dir="5400000" algn="b" rotWithShape="0">
               <a:srgbClr val="000000">
                 <a:alpha val="35000"/>
               </a:srgbClr>
             </a:outerShdw>
           </a:effectLst>
-          <a:scene3d>
+          <a:scene3d xmlns:a="http://schemas.openxmlformats.org/drawingml/2006/main">
             <a:camera prst="orthographicFront">
               <a:rot lat="0" lon="0" rev="0"/>
             </a:camera>
@@ -42879,7 +42162,7 @@
               <a:rot lat="0" lon="0" rev="1200000"/>
             </a:lightRig>
           </a:scene3d>
-          <a:sp3d>
+          <a:sp3d xmlns:a="http://schemas.openxmlformats.org/drawingml/2006/main">
             <a:bevelT w="63500" h="25400"/>
           </a:sp3d>
         </a:effectStyle>
@@ -42936,7 +42219,7 @@
       </a:bgFillStyleLst>
     </a:fmtScheme>
   </a:themeElements>
-  <a:objectDefaults>
+  <a:objectDefaults xmlns:a="http://schemas.openxmlformats.org/drawingml/2006/main">
     <a:spDef>
       <a:spPr/>
       <a:bodyPr/>
@@ -42976,19 +42259,19 @@
       </a:style>
     </a:lnDef>
   </a:objectDefaults>
-  <a:extraClrSchemeLst/>
+  <a:extraClrSchemeLst xmlns:a="http://schemas.openxmlformats.org/drawingml/2006/main"/>
 </a:theme>
 </file>
 
 <file path=ppt/theme/theme2.xml><?xml version="1.0" encoding="utf-8"?>
-<a:theme xmlns:a="http://schemas.openxmlformats.org/drawingml/2006/main" name="Office Theme">
+<a:theme xmlns:a="http://schemas.openxmlformats.org/drawingml/2006/main" xmlns:r="http://schemas.openxmlformats.org/officeDocument/2006/relationships" name="Office Theme">
   <a:themeElements>
     <a:clrScheme name="Office">
       <a:dk1>
-        <a:sysClr val="windowText" lastClr="000000"/>
+        <a:srgbClr val="000000"/>
       </a:dk1>
       <a:lt1>
-        <a:sysClr val="window" lastClr="FFFFFF"/>
+        <a:srgbClr val="FFFFFF"/>
       </a:lt1>
       <a:dk2>
         <a:srgbClr val="1F497D"/>
@@ -43142,7 +42425,7 @@
         </a:gradFill>
       </a:fillStyleLst>
       <a:lnStyleLst>
-        <a:ln w="9525" cap="flat" cmpd="sng" algn="ctr">
+        <a:ln w="9525" cap="flat" cmpd="sng">
           <a:solidFill>
             <a:schemeClr val="phClr">
               <a:shade val="95000"/>
@@ -43151,13 +42434,13 @@
           </a:solidFill>
           <a:prstDash val="solid"/>
         </a:ln>
-        <a:ln w="25400" cap="flat" cmpd="sng" algn="ctr">
+        <a:ln w="25400" cap="flat" cmpd="sng">
           <a:solidFill>
             <a:schemeClr val="phClr"/>
           </a:solidFill>
           <a:prstDash val="solid"/>
         </a:ln>
-        <a:ln w="38100" cap="flat" cmpd="sng" algn="ctr">
+        <a:ln w="38100" cap="flat" cmpd="sng">
           <a:solidFill>
             <a:schemeClr val="phClr"/>
           </a:solidFill>
@@ -43167,7 +42450,7 @@
       <a:effectStyleLst>
         <a:effectStyle>
           <a:effectLst>
-            <a:outerShdw blurRad="40000" dist="20000" dir="5400000" rotWithShape="0">
+            <a:outerShdw blurRad="40000" dist="20000" dir="5400000" algn="b" rotWithShape="0">
               <a:srgbClr val="000000">
                 <a:alpha val="38000"/>
               </a:srgbClr>
@@ -43176,7 +42459,7 @@
         </a:effectStyle>
         <a:effectStyle>
           <a:effectLst>
-            <a:outerShdw blurRad="40000" dist="23000" dir="5400000" rotWithShape="0">
+            <a:outerShdw blurRad="40000" dist="23000" dir="5400000" algn="b" rotWithShape="0">
               <a:srgbClr val="000000">
                 <a:alpha val="35000"/>
               </a:srgbClr>
@@ -43185,13 +42468,13 @@
         </a:effectStyle>
         <a:effectStyle>
           <a:effectLst>
-            <a:outerShdw blurRad="40000" dist="23000" dir="5400000" rotWithShape="0">
+            <a:outerShdw blurRad="40000" dist="23000" dir="5400000" algn="b" rotWithShape="0">
               <a:srgbClr val="000000">
                 <a:alpha val="35000"/>
               </a:srgbClr>
             </a:outerShdw>
           </a:effectLst>
-          <a:scene3d>
+          <a:scene3d xmlns:a="http://schemas.openxmlformats.org/drawingml/2006/main">
             <a:camera prst="orthographicFront">
               <a:rot lat="0" lon="0" rev="0"/>
             </a:camera>
@@ -43199,7 +42482,7 @@
               <a:rot lat="0" lon="0" rev="1200000"/>
             </a:lightRig>
           </a:scene3d>
-          <a:sp3d>
+          <a:sp3d xmlns:a="http://schemas.openxmlformats.org/drawingml/2006/main">
             <a:bevelT w="63500" h="25400"/>
           </a:sp3d>
         </a:effectStyle>
@@ -43256,7 +42539,7 @@
       </a:bgFillStyleLst>
     </a:fmtScheme>
   </a:themeElements>
-  <a:objectDefaults>
+  <a:objectDefaults xmlns:a="http://schemas.openxmlformats.org/drawingml/2006/main">
     <a:spDef>
       <a:spPr/>
       <a:bodyPr/>
@@ -43296,6 +42579,6 @@
       </a:style>
     </a:lnDef>
   </a:objectDefaults>
-  <a:extraClrSchemeLst/>
+  <a:extraClrSchemeLst xmlns:a="http://schemas.openxmlformats.org/drawingml/2006/main"/>
 </a:theme>
 </file>
--- a/deck/NextFrame.pptx
+++ b/deck/NextFrame.pptx
@@ -25867,7 +25867,7 @@
                 </a:solidFill>
                 <a:latin typeface="IBM Plex Mono"/>
               </a:rPr>
-              <a:t>46,887 = 2 × 8,498</a:t>
+              <a:t>16,996 = 2 × 8,498</a:t>
             </a:r>
           </a:p>
         </p:txBody>
